--- a/slides/CSC270-Lecture-02-The-Database-Approach.pptx
+++ b/slides/CSC270-Lecture-02-The-Database-Approach.pptx
@@ -8,13 +8,23 @@
     <p:sldId id="256" r:id="rId2"/>
     <p:sldId id="257" r:id="rId3"/>
     <p:sldId id="258" r:id="rId4"/>
+    <p:sldId id="266" r:id="rId17"/>
     <p:sldId id="259" r:id="rId5"/>
+    <p:sldId id="267" r:id="rId18"/>
+    <p:sldId id="268" r:id="rId19"/>
     <p:sldId id="260" r:id="rId6"/>
+    <p:sldId id="269" r:id="rId20"/>
+    <p:sldId id="270" r:id="rId21"/>
     <p:sldId id="261" r:id="rId7"/>
+    <p:sldId id="271" r:id="rId22"/>
     <p:sldId id="262" r:id="rId8"/>
     <p:sldId id="263" r:id="rId9"/>
+    <p:sldId id="272" r:id="rId23"/>
     <p:sldId id="264" r:id="rId10"/>
+    <p:sldId id="273" r:id="rId24"/>
+    <p:sldId id="274" r:id="rId25"/>
     <p:sldId id="265" r:id="rId11"/>
+    <p:sldId id="275" r:id="rId26"/>
   </p:sldIdLst>
   <p:notesMasterIdLst>
     <p:notesMasterId r:id="rId12"/>
@@ -1701,7 +1711,7 @@
               <a:buNone/>
             </a:pPr>
             <a:r>
-              <a:rPr lang="en-US" sz="1600" b="1" spc="300" kern="0" dirty="0">
+              <a:rPr lang="en-US" sz="1800" b="1" spc="300" kern="0" dirty="0">
                 <a:solidFill>
                   <a:srgbClr val="2FE6C4"/>
                 </a:solidFill>
@@ -1711,7 +1721,7 @@
               </a:rPr>
               <a:t>LECTURE 2</a:t>
             </a:r>
-            <a:endParaRPr lang="en-US" sz="1600" dirty="0"/>
+            <a:endParaRPr lang="en-US" sz="1800" dirty="0"/>
           </a:p>
         </p:txBody>
       </p:sp>
@@ -1818,7 +1828,7 @@
               <a:buNone/>
             </a:pPr>
             <a:r>
-              <a:rPr lang="en-US" sz="1300" dirty="0">
+              <a:rPr lang="en-US" sz="1800" dirty="0">
                 <a:solidFill>
                   <a:srgbClr val="8A939B"/>
                 </a:solidFill>
@@ -1828,7 +1838,7 @@
               </a:rPr>
               <a:t>COMSATS University Islamabad, Lahore Campus</a:t>
             </a:r>
-            <a:endParaRPr lang="en-US" sz="1300" dirty="0"/>
+            <a:endParaRPr lang="en-US" sz="1800" dirty="0"/>
           </a:p>
         </p:txBody>
       </p:sp>
@@ -1857,7 +1867,7 @@
               <a:buNone/>
             </a:pPr>
             <a:r>
-              <a:rPr lang="en-US" sz="1000" u="sng" dirty="0">
+              <a:rPr lang="en-US" sz="1200" u="sng" dirty="0">
                 <a:solidFill>
                   <a:srgbClr val="8A939B"/>
                 </a:solidFill>
@@ -1878,7 +1888,7 @@
               <a:buNone/>
             </a:pPr>
             <a:r>
-              <a:rPr lang="en-US" sz="1000" dirty="0">
+              <a:rPr lang="en-US" sz="1200" dirty="0">
                 <a:solidFill>
                   <a:srgbClr val="8A939B"/>
                 </a:solidFill>
@@ -1888,7 +1898,7 @@
               </a:rPr>
               <a:t>  ·  1</a:t>
             </a:r>
-            <a:endParaRPr lang="en-US" sz="1000" dirty="0"/>
+            <a:endParaRPr lang="en-US" sz="1200" dirty="0"/>
           </a:p>
         </p:txBody>
       </p:sp>
@@ -1992,7 +2002,7 @@
               <a:buChar char="•"/>
             </a:pPr>
             <a:r>
-              <a:rPr lang="en-US" sz="1600" dirty="0">
+              <a:rPr lang="en-US" sz="1800" dirty="0">
                 <a:solidFill>
                   <a:srgbClr val="FFFFFF"/>
                 </a:solidFill>
@@ -2002,7 +2012,7 @@
               </a:rPr>
               <a:t>Metadata (the system catalog) describes the data and lets a DBMS enforce rules generically rather than through hand-coded logic</a:t>
             </a:r>
-            <a:endParaRPr lang="en-US" sz="1600" dirty="0"/>
+            <a:endParaRPr lang="en-US" sz="1800" dirty="0"/>
           </a:p>
           <a:p>
             <a:pPr marL="342900" indent="-342900">
@@ -2013,7 +2023,7 @@
               <a:buChar char="•"/>
             </a:pPr>
             <a:r>
-              <a:rPr lang="en-US" sz="1600" dirty="0">
+              <a:rPr lang="en-US" sz="1800" dirty="0">
                 <a:solidFill>
                   <a:srgbClr val="FFFFFF"/>
                 </a:solidFill>
@@ -2023,7 +2033,7 @@
               </a:rPr>
               <a:t>The database environment is hardware, software, data, procedures, and people together — excellent table design can still fail if procedures or people are neglected</a:t>
             </a:r>
-            <a:endParaRPr lang="en-US" sz="1600" dirty="0"/>
+            <a:endParaRPr lang="en-US" sz="1800" dirty="0"/>
           </a:p>
           <a:p>
             <a:pPr marL="342900" indent="-342900">
@@ -2034,7 +2044,7 @@
               <a:buChar char="•"/>
             </a:pPr>
             <a:r>
-              <a:rPr lang="en-US" sz="1600" dirty="0">
+              <a:rPr lang="en-US" sz="1800" dirty="0">
                 <a:solidFill>
                   <a:srgbClr val="FFFFFF"/>
                 </a:solidFill>
@@ -2044,7 +2054,7 @@
               </a:rPr>
               <a:t>Distinct roles — DBA, database designers, developers, and end users (naive and sophisticated) — divide responsibility for a shared database</a:t>
             </a:r>
-            <a:endParaRPr lang="en-US" sz="1600" dirty="0"/>
+            <a:endParaRPr lang="en-US" sz="1800" dirty="0"/>
           </a:p>
           <a:p>
             <a:pPr marL="342900" indent="-342900">
@@ -2055,7 +2065,7 @@
               <a:buChar char="•"/>
             </a:pPr>
             <a:r>
-              <a:rPr lang="en-US" sz="1600" dirty="0">
+              <a:rPr lang="en-US" sz="1800" dirty="0">
                 <a:solidFill>
                   <a:srgbClr val="FFFFFF"/>
                 </a:solidFill>
@@ -2065,7 +2075,7 @@
               </a:rPr>
               <a:t>A DBMS is built from cooperating components (query processor, database manager, transaction manager, file manager, catalog) delivering storage, transactions, concurrency, recovery, security, integrity, and data independence</a:t>
             </a:r>
-            <a:endParaRPr lang="en-US" sz="1600" dirty="0"/>
+            <a:endParaRPr lang="en-US" sz="1800" dirty="0"/>
           </a:p>
           <a:p>
             <a:pPr marL="342900" indent="-342900">
@@ -2076,7 +2086,7 @@
               <a:buChar char="•"/>
             </a:pPr>
             <a:r>
-              <a:rPr lang="en-US" sz="1600" dirty="0">
+              <a:rPr lang="en-US" sz="1800" dirty="0">
                 <a:solidFill>
                   <a:srgbClr val="FFFFFF"/>
                 </a:solidFill>
@@ -2086,7 +2096,7 @@
               </a:rPr>
               <a:t>Data independence lets one level change without forcing dependent applications to change — expanded fully in Lecture 4</a:t>
             </a:r>
-            <a:endParaRPr lang="en-US" sz="1600" dirty="0"/>
+            <a:endParaRPr lang="en-US" sz="1800" dirty="0"/>
           </a:p>
         </p:txBody>
       </p:sp>
@@ -2115,7 +2125,7 @@
               <a:buNone/>
             </a:pPr>
             <a:r>
-              <a:rPr lang="en-US" sz="1000" u="sng" dirty="0">
+              <a:rPr lang="en-US" sz="1200" u="sng" dirty="0">
                 <a:solidFill>
                   <a:srgbClr val="8A939B"/>
                 </a:solidFill>
@@ -2136,7 +2146,7 @@
               <a:buNone/>
             </a:pPr>
             <a:r>
-              <a:rPr lang="en-US" sz="1000" dirty="0">
+              <a:rPr lang="en-US" sz="1200" dirty="0">
                 <a:solidFill>
                   <a:srgbClr val="8A939B"/>
                 </a:solidFill>
@@ -2144,9 +2154,9 @@
                 <a:ea typeface="Calibri" pitchFamily="34" charset="-122"/>
                 <a:cs typeface="Calibri" pitchFamily="34" charset="-120"/>
               </a:rPr>
-              <a:t>  ·  10</a:t>
-            </a:r>
-            <a:endParaRPr lang="en-US" sz="1000" dirty="0"/>
+              <a:t>  ·  19</a:t>
+            </a:r>
+            <a:endParaRPr lang="en-US" sz="1200" dirty="0"/>
           </a:p>
         </p:txBody>
       </p:sp>
@@ -2158,7 +2168,7 @@
 </p:sld>
 </file>
 
-<file path=ppt/slides/slide2.xml><?xml version="1.0" encoding="utf-8"?>
+<file path=ppt/slides/slide11.xml><?xml version="1.0" encoding="utf-8"?>
 <p:sld xmlns:a="http://schemas.openxmlformats.org/drawingml/2006/main" xmlns:r="http://schemas.openxmlformats.org/officeDocument/2006/relationships" xmlns:p="http://schemas.openxmlformats.org/presentationml/2006/main">
   <p:cSld name="Slide 2">
     <p:bg>
@@ -2215,7 +2225,7 @@
                 <a:ea typeface="Calibri" pitchFamily="34" charset="-122"/>
                 <a:cs typeface="Calibri" pitchFamily="34" charset="-120"/>
               </a:rPr>
-              <a:t>In This Lecture</a:t>
+              <a:t>Worked Example: Metadata Catching a Bad Insert</a:t>
             </a:r>
             <a:endParaRPr lang="en-US" sz="2800" dirty="0"/>
           </a:p>
@@ -2246,7 +2256,7 @@
               <a:buNone/>
             </a:pPr>
             <a:r>
-              <a:rPr lang="en-US" sz="1000" u="sng" dirty="0">
+              <a:rPr lang="en-US" sz="1200" u="sng" dirty="0">
                 <a:solidFill>
                   <a:srgbClr val="8A939B"/>
                 </a:solidFill>
@@ -2267,7 +2277,7 @@
               <a:buNone/>
             </a:pPr>
             <a:r>
-              <a:rPr lang="en-US" sz="1000" dirty="0">
+              <a:rPr lang="en-US" sz="1200" dirty="0">
                 <a:solidFill>
                   <a:srgbClr val="8A939B"/>
                 </a:solidFill>
@@ -2275,9 +2285,9 @@
                 <a:ea typeface="Calibri" pitchFamily="34" charset="-122"/>
                 <a:cs typeface="Calibri" pitchFamily="34" charset="-120"/>
               </a:rPr>
-              <a:t>  ·  2</a:t>
-            </a:r>
-            <a:endParaRPr lang="en-US" sz="1000" dirty="0"/>
+              <a:t>  ·  4</a:t>
+            </a:r>
+            <a:endParaRPr lang="en-US" sz="1200" dirty="0"/>
           </a:p>
         </p:txBody>
       </p:sp>
@@ -2310,7 +2320,7 @@
               <a:buChar char="•"/>
             </a:pPr>
             <a:r>
-              <a:rPr lang="en-US" sz="1600" dirty="0">
+              <a:rPr lang="en-US" sz="1800" dirty="0">
                 <a:solidFill>
                   <a:srgbClr val="1F2429"/>
                 </a:solidFill>
@@ -2318,9 +2328,9 @@
                 <a:ea typeface="Calibri" pitchFamily="34" charset="-122"/>
                 <a:cs typeface="Calibri" pitchFamily="34" charset="-120"/>
               </a:rPr>
-              <a:t>The distinction between data and metadata, and why a database needs both</a:t>
-            </a:r>
-            <a:endParaRPr lang="en-US" sz="1600" dirty="0"/>
+              <a:t>An application tries to insert the text “N/A” into the Account table's balance column</a:t>
+            </a:r>
+            <a:endParaRPr lang="en-US" sz="1800" dirty="0"/>
           </a:p>
           <a:p>
             <a:pPr marL="342900" indent="-342900">
@@ -2331,7 +2341,7 @@
               <a:buChar char="•"/>
             </a:pPr>
             <a:r>
-              <a:rPr lang="en-US" sz="1600" dirty="0">
+              <a:rPr lang="en-US" sz="1800" dirty="0">
                 <a:solidFill>
                   <a:srgbClr val="1F2429"/>
                 </a:solidFill>
@@ -2339,9 +2349,9 @@
                 <a:ea typeface="Calibri" pitchFamily="34" charset="-122"/>
                 <a:cs typeface="Calibri" pitchFamily="34" charset="-120"/>
               </a:rPr>
-              <a:t>The full database environment: hardware, software, data, procedures, and people</a:t>
-            </a:r>
-            <a:endParaRPr lang="en-US" sz="1600" dirty="0"/>
+              <a:t>Before touching any data, the DBMS looks up balance in the catalog</a:t>
+            </a:r>
+            <a:endParaRPr lang="en-US" sz="1800" dirty="0"/>
           </a:p>
           <a:p>
             <a:pPr marL="342900" indent="-342900">
@@ -2352,7 +2362,7 @@
               <a:buChar char="•"/>
             </a:pPr>
             <a:r>
-              <a:rPr lang="en-US" sz="1600" dirty="0">
+              <a:rPr lang="en-US" sz="1800" dirty="0">
                 <a:solidFill>
                   <a:srgbClr val="1F2429"/>
                 </a:solidFill>
@@ -2360,9 +2370,9 @@
                 <a:ea typeface="Calibri" pitchFamily="34" charset="-122"/>
                 <a:cs typeface="Calibri" pitchFamily="34" charset="-120"/>
               </a:rPr>
-              <a:t>The roles people play around a database — DBA, designers, developers, end users</a:t>
-            </a:r>
-            <a:endParaRPr lang="en-US" sz="1600" dirty="0"/>
+              <a:t>The catalog says balance is DECIMAL and must be &gt;= 0 — “N/A” satisfies neither rule</a:t>
+            </a:r>
+            <a:endParaRPr lang="en-US" sz="1800" dirty="0"/>
           </a:p>
           <a:p>
             <a:pPr marL="342900" indent="-342900">
@@ -2373,7 +2383,7 @@
               <a:buChar char="•"/>
             </a:pPr>
             <a:r>
-              <a:rPr lang="en-US" sz="1600" dirty="0">
+              <a:rPr lang="en-US" sz="1800" dirty="0">
                 <a:solidFill>
                   <a:srgbClr val="1F2429"/>
                 </a:solidFill>
@@ -2381,9 +2391,9 @@
                 <a:ea typeface="Calibri" pitchFamily="34" charset="-122"/>
                 <a:cs typeface="Calibri" pitchFamily="34" charset="-120"/>
               </a:rPr>
-              <a:t>The major components a DBMS is built from</a:t>
-            </a:r>
-            <a:endParaRPr lang="en-US" sz="1600" dirty="0"/>
+              <a:t>The DBMS refuses the insert immediately, with no special-case code written for balance specifically</a:t>
+            </a:r>
+            <a:endParaRPr lang="en-US" sz="1800" dirty="0"/>
           </a:p>
           <a:p>
             <a:pPr marL="342900" indent="-342900">
@@ -2394,7 +2404,7 @@
               <a:buChar char="•"/>
             </a:pPr>
             <a:r>
-              <a:rPr lang="en-US" sz="1600" dirty="0">
+              <a:rPr lang="en-US" sz="1800" dirty="0">
                 <a:solidFill>
                   <a:srgbClr val="1F2429"/>
                 </a:solidFill>
@@ -2402,9 +2412,9 @@
                 <a:ea typeface="Calibri" pitchFamily="34" charset="-122"/>
                 <a:cs typeface="Calibri" pitchFamily="34" charset="-120"/>
               </a:rPr>
-              <a:t>The core functions every DBMS performs</a:t>
-            </a:r>
-            <a:endParaRPr lang="en-US" sz="1600" dirty="0"/>
+              <a:t>The same catalog lookup protects every column, in every table, automatically — that is general rule enforcement</a:t>
+            </a:r>
+            <a:endParaRPr lang="en-US" sz="1800" dirty="0"/>
           </a:p>
           <a:p>
             <a:pPr marL="342900" indent="-342900">
@@ -2415,7 +2425,7 @@
               <a:buChar char="•"/>
             </a:pPr>
             <a:r>
-              <a:rPr lang="en-US" sz="1600" dirty="0">
+              <a:rPr lang="en-US" sz="1800" dirty="0">
                 <a:solidFill>
                   <a:srgbClr val="1F2429"/>
                 </a:solidFill>
@@ -2423,9 +2433,9 @@
                 <a:ea typeface="Calibri" pitchFamily="34" charset="-122"/>
                 <a:cs typeface="Calibri" pitchFamily="34" charset="-120"/>
               </a:rPr>
-              <a:t>A first look at data dependence vs. data independence</a:t>
-            </a:r>
-            <a:endParaRPr lang="en-US" sz="1600" dirty="0"/>
+              <a:t>Without metadata, the DBMS would have no way to know balance was ever supposed to be numeric</a:t>
+            </a:r>
+            <a:endParaRPr lang="en-US" sz="1800" dirty="0"/>
           </a:p>
         </p:txBody>
       </p:sp>
@@ -2437,9 +2447,9 @@
 </p:sld>
 </file>
 
-<file path=ppt/slides/slide3.xml><?xml version="1.0" encoding="utf-8"?>
+<file path=ppt/slides/slide12.xml><?xml version="1.0" encoding="utf-8"?>
 <p:sld xmlns:a="http://schemas.openxmlformats.org/drawingml/2006/main" xmlns:r="http://schemas.openxmlformats.org/officeDocument/2006/relationships" xmlns:p="http://schemas.openxmlformats.org/presentationml/2006/main">
-  <p:cSld name="Slide 3">
+  <p:cSld name="Slide 2">
     <p:bg>
       <p:bgPr>
         <a:solidFill>
@@ -2494,7 +2504,7 @@
                 <a:ea typeface="Calibri" pitchFamily="34" charset="-122"/>
                 <a:cs typeface="Calibri" pitchFamily="34" charset="-120"/>
               </a:rPr>
-              <a:t>Data and Metadata</a:t>
+              <a:t>When One Component Fails: A Worked Scenario</a:t>
             </a:r>
             <a:endParaRPr lang="en-US" sz="2800" dirty="0"/>
           </a:p>
@@ -2525,7 +2535,7 @@
               <a:buNone/>
             </a:pPr>
             <a:r>
-              <a:rPr lang="en-US" sz="1000" u="sng" dirty="0">
+              <a:rPr lang="en-US" sz="1200" u="sng" dirty="0">
                 <a:solidFill>
                   <a:srgbClr val="8A939B"/>
                 </a:solidFill>
@@ -2546,7 +2556,7 @@
               <a:buNone/>
             </a:pPr>
             <a:r>
-              <a:rPr lang="en-US" sz="1000" dirty="0">
+              <a:rPr lang="en-US" sz="1200" dirty="0">
                 <a:solidFill>
                   <a:srgbClr val="8A939B"/>
                 </a:solidFill>
@@ -2554,9 +2564,9 @@
                 <a:ea typeface="Calibri" pitchFamily="34" charset="-122"/>
                 <a:cs typeface="Calibri" pitchFamily="34" charset="-120"/>
               </a:rPr>
-              <a:t>  ·  3</a:t>
-            </a:r>
-            <a:endParaRPr lang="en-US" sz="1000" dirty="0"/>
+              <a:t>  ·  6</a:t>
+            </a:r>
+            <a:endParaRPr lang="en-US" sz="1200" dirty="0"/>
           </a:p>
         </p:txBody>
       </p:sp>
@@ -2568,8 +2578,8 @@
         </p:nvSpPr>
         <p:spPr>
           <a:xfrm>
-            <a:off x="640080" y="1188720"/>
-            <a:ext cx="10881360" cy="914400"/>
+            <a:off x="640080" y="1371600"/>
+            <a:ext cx="10332720" cy="4846320"/>
           </a:xfrm>
           <a:prstGeom prst="rect">
             <a:avLst/>
@@ -2581,25 +2591,15 @@
           <a:bodyPr wrap="square" lIns="0" tIns="0" rIns="0" bIns="0" rtlCol="0" anchor="t"/>
           <a:lstStyle/>
           <a:p>
-            <a:pPr indent="0" marL="0">
-              <a:buNone/>
-            </a:pPr>
-            <a:r>
-              <a:rPr lang="en-US" sz="1550" b="1" dirty="0">
-                <a:solidFill>
-                  <a:srgbClr val="8B7FD9"/>
-                </a:solidFill>
-                <a:latin typeface="Calibri" pitchFamily="34" charset="0"/>
-                <a:ea typeface="Calibri" pitchFamily="34" charset="-122"/>
-                <a:cs typeface="Calibri" pitchFamily="34" charset="-120"/>
-              </a:rPr>
-              <a:t>Data</a:t>
-            </a:r>
-            <a:pPr indent="0" marL="0">
-              <a:buNone/>
-            </a:pPr>
-            <a:r>
-              <a:rPr lang="en-US" sz="1550" dirty="0">
+            <a:pPr marL="342900" indent="-342900">
+              <a:spcAft>
+                <a:spcPts val="1800"/>
+              </a:spcAft>
+              <a:buSzPct val="100000"/>
+              <a:buChar char="•"/>
+            </a:pPr>
+            <a:r>
+              <a:rPr lang="en-US" sz="1800" dirty="0">
                 <a:solidFill>
                   <a:srgbClr val="1F2429"/>
                 </a:solidFill>
@@ -2607,27 +2607,20 @@
                 <a:ea typeface="Calibri" pitchFamily="34" charset="-122"/>
                 <a:cs typeface="Calibri" pitchFamily="34" charset="-120"/>
               </a:rPr>
-              <a:t> is the actual facts being stored. On its own, a raw value like 4500000 tells you nothing — a database needs a second layer describing the first: </a:t>
-            </a:r>
-            <a:pPr indent="0" marL="0">
-              <a:buNone/>
-            </a:pPr>
-            <a:r>
-              <a:rPr lang="en-US" sz="1550" b="1" dirty="0">
-                <a:solidFill>
-                  <a:srgbClr val="2FE6C4"/>
-                </a:solidFill>
-                <a:latin typeface="Calibri" pitchFamily="34" charset="0"/>
-                <a:ea typeface="Calibri" pitchFamily="34" charset="-122"/>
-                <a:cs typeface="Calibri" pitchFamily="34" charset="-120"/>
-              </a:rPr>
-              <a:t>metadata</a:t>
-            </a:r>
-            <a:pPr indent="0" marL="0">
-              <a:buNone/>
-            </a:pPr>
-            <a:r>
-              <a:rPr lang="en-US" sz="1550" dirty="0">
+              <a:t>Hardware fails — the bank's database server goes down; even perfect table design can't serve a single query</a:t>
+            </a:r>
+            <a:endParaRPr lang="en-US" sz="1800" dirty="0"/>
+          </a:p>
+          <a:p>
+            <a:pPr marL="342900" indent="-342900">
+              <a:spcAft>
+                <a:spcPts val="1800"/>
+              </a:spcAft>
+              <a:buSzPct val="100000"/>
+              <a:buChar char="•"/>
+            </a:pPr>
+            <a:r>
+              <a:rPr lang="en-US" sz="1800" dirty="0">
                 <a:solidFill>
                   <a:srgbClr val="1F2429"/>
                 </a:solidFill>
@@ -2635,304 +2628,20 @@
                 <a:ea typeface="Calibri" pitchFamily="34" charset="-122"/>
                 <a:cs typeface="Calibri" pitchFamily="34" charset="-120"/>
               </a:rPr>
-              <a:t> (the system catalog / data dictionary), data about the data.</a:t>
-            </a:r>
-            <a:endParaRPr lang="en-US" sz="1550" dirty="0"/>
-          </a:p>
-        </p:txBody>
-      </p:sp>
-      <p:sp>
-        <p:nvSpPr>
-          <p:cNvPr id="5" name="Text 3"/>
-          <p:cNvSpPr txBox="1"/>
-          <p:nvPr/>
-        </p:nvSpPr>
-        <p:spPr>
-          <a:xfrm>
-            <a:off x="640080" y="2286000"/>
-            <a:ext cx="10881360" cy="274320"/>
-          </a:xfrm>
-          <a:prstGeom prst="rect">
-            <a:avLst/>
-          </a:prstGeom>
-          <a:noFill/>
-          <a:ln/>
-        </p:spPr>
-        <p:txBody>
-          <a:bodyPr wrap="square" lIns="0" tIns="0" rIns="0" bIns="0" rtlCol="0" anchor="ctr"/>
-          <a:lstStyle/>
-          <a:p>
-            <a:pPr indent="0" marL="0">
-              <a:buNone/>
-            </a:pPr>
-            <a:r>
-              <a:rPr lang="en-US" sz="1200" b="1" dirty="0">
-                <a:solidFill>
-                  <a:srgbClr val="8A939B"/>
-                </a:solidFill>
-                <a:latin typeface="Calibri" pitchFamily="34" charset="0"/>
-                <a:ea typeface="Calibri" pitchFamily="34" charset="-122"/>
-                <a:cs typeface="Calibri" pitchFamily="34" charset="-120"/>
-              </a:rPr>
-              <a:t>Data vs. metadata, for a bank's Account table</a:t>
-            </a:r>
-            <a:endParaRPr lang="en-US" sz="1200" dirty="0"/>
-          </a:p>
-        </p:txBody>
-      </p:sp>
-      <p:sp>
-        <p:nvSpPr>
-          <p:cNvPr id="6" name="Shape 4"/>
-          <p:cNvSpPr/>
-          <p:nvPr/>
-        </p:nvSpPr>
-        <p:spPr>
-          <a:xfrm>
-            <a:off x="640080" y="2606040"/>
-            <a:ext cx="5326380" cy="1417320"/>
-          </a:xfrm>
-          <a:prstGeom prst="roundRect">
-            <a:avLst>
-              <a:gd name="adj" fmla="val 5161"/>
-            </a:avLst>
-          </a:prstGeom>
-          <a:solidFill>
-            <a:srgbClr val="2FE6C4"/>
-          </a:solidFill>
-          <a:ln/>
-        </p:spPr>
-      </p:sp>
-      <p:sp>
-        <p:nvSpPr>
-          <p:cNvPr id="7" name="Text 5"/>
-          <p:cNvSpPr txBox="1"/>
-          <p:nvPr/>
-        </p:nvSpPr>
-        <p:spPr>
-          <a:xfrm>
-            <a:off x="822960" y="2734056"/>
-            <a:ext cx="4960620" cy="320040"/>
-          </a:xfrm>
-          <a:prstGeom prst="rect">
-            <a:avLst/>
-          </a:prstGeom>
-          <a:noFill/>
-          <a:ln/>
-        </p:spPr>
-        <p:txBody>
-          <a:bodyPr wrap="square" lIns="0" tIns="0" rIns="0" bIns="0" rtlCol="0" anchor="ctr"/>
-          <a:lstStyle/>
-          <a:p>
-            <a:pPr indent="0" marL="0">
-              <a:buNone/>
-            </a:pPr>
-            <a:r>
-              <a:rPr lang="en-US" sz="1350" b="1" dirty="0">
-                <a:solidFill>
-                  <a:srgbClr val="FFFFFF"/>
-                </a:solidFill>
-                <a:latin typeface="Calibri" pitchFamily="34" charset="0"/>
-                <a:ea typeface="Calibri" pitchFamily="34" charset="-122"/>
-                <a:cs typeface="Calibri" pitchFamily="34" charset="-120"/>
-              </a:rPr>
-              <a:t>Data</a:t>
-            </a:r>
-            <a:endParaRPr lang="en-US" sz="1350" dirty="0"/>
-          </a:p>
-        </p:txBody>
-      </p:sp>
-      <p:sp>
-        <p:nvSpPr>
-          <p:cNvPr id="8" name="Text 6"/>
-          <p:cNvSpPr txBox="1"/>
-          <p:nvPr/>
-        </p:nvSpPr>
-        <p:spPr>
-          <a:xfrm>
-            <a:off x="822960" y="3081528"/>
-            <a:ext cx="4960620" cy="850392"/>
-          </a:xfrm>
-          <a:prstGeom prst="rect">
-            <a:avLst/>
-          </a:prstGeom>
-          <a:noFill/>
-          <a:ln/>
-        </p:spPr>
-        <p:txBody>
-          <a:bodyPr wrap="square" lIns="0" tIns="0" rIns="0" bIns="0" rtlCol="0" anchor="t"/>
-          <a:lstStyle/>
-          <a:p>
-            <a:pPr indent="0" marL="0">
-              <a:buNone/>
-            </a:pPr>
-            <a:r>
-              <a:rPr lang="en-US" sz="1050" dirty="0">
-                <a:solidFill>
-                  <a:srgbClr val="FFFFFF"/>
-                </a:solidFill>
-                <a:latin typeface="Calibri" pitchFamily="34" charset="0"/>
-                <a:ea typeface="Calibri" pitchFamily="34" charset="-122"/>
-                <a:cs typeface="Calibri" pitchFamily="34" charset="-120"/>
-              </a:rPr>
-              <a:t>“SL21”, 4500000, “B003” — the actual stored values</a:t>
-            </a:r>
-            <a:endParaRPr lang="en-US" sz="1050" dirty="0"/>
-          </a:p>
-        </p:txBody>
-      </p:sp>
-      <p:sp>
-        <p:nvSpPr>
-          <p:cNvPr id="9" name="Shape 7"/>
-          <p:cNvSpPr/>
-          <p:nvPr/>
-        </p:nvSpPr>
-        <p:spPr>
-          <a:xfrm>
-            <a:off x="6195060" y="2606040"/>
-            <a:ext cx="5326380" cy="1417320"/>
-          </a:xfrm>
-          <a:prstGeom prst="roundRect">
-            <a:avLst>
-              <a:gd name="adj" fmla="val 5161"/>
-            </a:avLst>
-          </a:prstGeom>
-          <a:solidFill>
-            <a:srgbClr val="8B7FD9"/>
-          </a:solidFill>
-          <a:ln/>
-        </p:spPr>
-      </p:sp>
-      <p:sp>
-        <p:nvSpPr>
-          <p:cNvPr id="10" name="Text 8"/>
-          <p:cNvSpPr txBox="1"/>
-          <p:nvPr/>
-        </p:nvSpPr>
-        <p:spPr>
-          <a:xfrm>
-            <a:off x="6377940" y="2734056"/>
-            <a:ext cx="4960620" cy="320040"/>
-          </a:xfrm>
-          <a:prstGeom prst="rect">
-            <a:avLst/>
-          </a:prstGeom>
-          <a:noFill/>
-          <a:ln/>
-        </p:spPr>
-        <p:txBody>
-          <a:bodyPr wrap="square" lIns="0" tIns="0" rIns="0" bIns="0" rtlCol="0" anchor="ctr"/>
-          <a:lstStyle/>
-          <a:p>
-            <a:pPr indent="0" marL="0">
-              <a:buNone/>
-            </a:pPr>
-            <a:r>
-              <a:rPr lang="en-US" sz="1350" b="1" dirty="0">
-                <a:solidFill>
-                  <a:srgbClr val="FFFFFF"/>
-                </a:solidFill>
-                <a:latin typeface="Calibri" pitchFamily="34" charset="0"/>
-                <a:ea typeface="Calibri" pitchFamily="34" charset="-122"/>
-                <a:cs typeface="Calibri" pitchFamily="34" charset="-120"/>
-              </a:rPr>
-              <a:t>Metadata</a:t>
-            </a:r>
-            <a:endParaRPr lang="en-US" sz="1350" dirty="0"/>
-          </a:p>
-        </p:txBody>
-      </p:sp>
-      <p:sp>
-        <p:nvSpPr>
-          <p:cNvPr id="11" name="Text 9"/>
-          <p:cNvSpPr txBox="1"/>
-          <p:nvPr/>
-        </p:nvSpPr>
-        <p:spPr>
-          <a:xfrm>
-            <a:off x="6377940" y="3081528"/>
-            <a:ext cx="4960620" cy="850392"/>
-          </a:xfrm>
-          <a:prstGeom prst="rect">
-            <a:avLst/>
-          </a:prstGeom>
-          <a:noFill/>
-          <a:ln/>
-        </p:spPr>
-        <p:txBody>
-          <a:bodyPr wrap="square" lIns="0" tIns="0" rIns="0" bIns="0" rtlCol="0" anchor="t"/>
-          <a:lstStyle/>
-          <a:p>
-            <a:pPr indent="0" marL="0">
-              <a:buNone/>
-            </a:pPr>
-            <a:r>
-              <a:rPr lang="en-US" sz="1050" dirty="0">
-                <a:solidFill>
-                  <a:srgbClr val="FFFFFF"/>
-                </a:solidFill>
-                <a:latin typeface="Calibri" pitchFamily="34" charset="0"/>
-                <a:ea typeface="Calibri" pitchFamily="34" charset="-122"/>
-                <a:cs typeface="Calibri" pitchFamily="34" charset="-120"/>
-              </a:rPr>
-              <a:t>accountNo is CHAR(5) and a primary key; balance is DECIMAL and must be &gt;= 0; branchNo is a foreign key to Branch</a:t>
-            </a:r>
-            <a:endParaRPr lang="en-US" sz="1050" dirty="0"/>
-          </a:p>
-        </p:txBody>
-      </p:sp>
-      <p:sp>
-        <p:nvSpPr>
-          <p:cNvPr id="12" name="Shape 10"/>
-          <p:cNvSpPr/>
-          <p:nvPr/>
-        </p:nvSpPr>
-        <p:spPr>
-          <a:xfrm>
-            <a:off x="640080" y="4343400"/>
-            <a:ext cx="10881360" cy="1417320"/>
-          </a:xfrm>
-          <a:prstGeom prst="roundRect">
-            <a:avLst>
-              <a:gd name="adj" fmla="val 5161"/>
-            </a:avLst>
-          </a:prstGeom>
-          <a:solidFill>
-            <a:srgbClr val="F7F8F9"/>
-          </a:solidFill>
-          <a:ln w="12700">
-            <a:solidFill>
-              <a:srgbClr val="2FE6C4"/>
-            </a:solidFill>
-            <a:prstDash val="solid"/>
-          </a:ln>
-        </p:spPr>
-      </p:sp>
-      <p:sp>
-        <p:nvSpPr>
-          <p:cNvPr id="13" name="Text 11"/>
-          <p:cNvSpPr txBox="1"/>
-          <p:nvPr/>
-        </p:nvSpPr>
-        <p:spPr>
-          <a:xfrm>
-            <a:off x="868680" y="4480560"/>
-            <a:ext cx="10424160" cy="1143000"/>
-          </a:xfrm>
-          <a:prstGeom prst="rect">
-            <a:avLst/>
-          </a:prstGeom>
-          <a:noFill/>
-          <a:ln/>
-        </p:spPr>
-        <p:txBody>
-          <a:bodyPr wrap="square" lIns="0" tIns="0" rIns="0" bIns="0" rtlCol="0" anchor="t"/>
-          <a:lstStyle/>
-          <a:p>
-            <a:pPr indent="0" marL="0">
-              <a:buNone/>
-            </a:pPr>
-            <a:r>
-              <a:rPr lang="en-US" sz="1250" b="1" dirty="0">
+              <a:t>Software fails — the DBMS crashes or the OS needs patching; the data exists but nothing can reach it</a:t>
+            </a:r>
+            <a:endParaRPr lang="en-US" sz="1800" dirty="0"/>
+          </a:p>
+          <a:p>
+            <a:pPr marL="342900" indent="-342900">
+              <a:spcAft>
+                <a:spcPts val="1800"/>
+              </a:spcAft>
+              <a:buSzPct val="100000"/>
+              <a:buChar char="•"/>
+            </a:pPr>
+            <a:r>
+              <a:rPr lang="en-US" sz="1800" dirty="0">
                 <a:solidFill>
                   <a:srgbClr val="1F2429"/>
                 </a:solidFill>
@@ -2940,13 +2649,20 @@
                 <a:ea typeface="Calibri" pitchFamily="34" charset="-122"/>
                 <a:cs typeface="Calibri" pitchFamily="34" charset="-120"/>
               </a:rPr>
-              <a:t>Metadata is why a DBMS can reject bad requests before running them.  </a:t>
-            </a:r>
-            <a:pPr indent="0" marL="0">
-              <a:buNone/>
-            </a:pPr>
-            <a:r>
-              <a:rPr lang="en-US" sz="1250" dirty="0">
+              <a:t>Data fails — metadata is wrong or missing, so bad values slip in silently</a:t>
+            </a:r>
+            <a:endParaRPr lang="en-US" sz="1800" dirty="0"/>
+          </a:p>
+          <a:p>
+            <a:pPr marL="342900" indent="-342900">
+              <a:spcAft>
+                <a:spcPts val="1800"/>
+              </a:spcAft>
+              <a:buSzPct val="100000"/>
+              <a:buChar char="•"/>
+            </a:pPr>
+            <a:r>
+              <a:rPr lang="en-US" sz="1800" dirty="0">
                 <a:solidFill>
                   <a:srgbClr val="1F2429"/>
                 </a:solidFill>
@@ -2954,9 +2670,30 @@
                 <a:ea typeface="Calibri" pitchFamily="34" charset="-122"/>
                 <a:cs typeface="Calibri" pitchFamily="34" charset="-120"/>
               </a:rPr>
-              <a:t>When an application tries to insert a letter into balance, the DBMS looks up balance's type in the catalog, sees it's numeric, and refuses the insert — general rule enforcement, not hand-coded per column.</a:t>
-            </a:r>
-            <a:endParaRPr lang="en-US" sz="1250" dirty="0"/>
+              <a:t>Procedures fail — no documented backup schedule exists; a disk failure becomes permanent data loss</a:t>
+            </a:r>
+            <a:endParaRPr lang="en-US" sz="1800" dirty="0"/>
+          </a:p>
+          <a:p>
+            <a:pPr marL="342900" indent="-342900">
+              <a:spcAft>
+                <a:spcPts val="1800"/>
+              </a:spcAft>
+              <a:buSzPct val="100000"/>
+              <a:buChar char="•"/>
+            </a:pPr>
+            <a:r>
+              <a:rPr lang="en-US" sz="1800" dirty="0">
+                <a:solidFill>
+                  <a:srgbClr val="1F2429"/>
+                </a:solidFill>
+                <a:latin typeface="Calibri" pitchFamily="34" charset="0"/>
+                <a:ea typeface="Calibri" pitchFamily="34" charset="-122"/>
+                <a:cs typeface="Calibri" pitchFamily="34" charset="-120"/>
+              </a:rPr>
+              <a:t>People fail — the on-call DBA was never trained on the recovery tool; the outage runs for hours instead of minutes</a:t>
+            </a:r>
+            <a:endParaRPr lang="en-US" sz="1800" dirty="0"/>
           </a:p>
         </p:txBody>
       </p:sp>
@@ -2968,9 +2705,9 @@
 </p:sld>
 </file>
 
-<file path=ppt/slides/slide4.xml><?xml version="1.0" encoding="utf-8"?>
+<file path=ppt/slides/slide13.xml><?xml version="1.0" encoding="utf-8"?>
 <p:sld xmlns:a="http://schemas.openxmlformats.org/drawingml/2006/main" xmlns:r="http://schemas.openxmlformats.org/officeDocument/2006/relationships" xmlns:p="http://schemas.openxmlformats.org/presentationml/2006/main">
-  <p:cSld name="Slide 4">
+  <p:cSld name="Slide 2">
     <p:bg>
       <p:bgPr>
         <a:solidFill>
@@ -3025,7 +2762,7 @@
                 <a:ea typeface="Calibri" pitchFamily="34" charset="-122"/>
                 <a:cs typeface="Calibri" pitchFamily="34" charset="-120"/>
               </a:rPr>
-              <a:t>The Database Environment</a:t>
+              <a:t>The Database Environment, Applied to COMSATS</a:t>
             </a:r>
             <a:endParaRPr lang="en-US" sz="2800" dirty="0"/>
           </a:p>
@@ -3056,7 +2793,7 @@
               <a:buNone/>
             </a:pPr>
             <a:r>
-              <a:rPr lang="en-US" sz="1000" u="sng" dirty="0">
+              <a:rPr lang="en-US" sz="1200" u="sng" dirty="0">
                 <a:solidFill>
                   <a:srgbClr val="8A939B"/>
                 </a:solidFill>
@@ -3077,7 +2814,7 @@
               <a:buNone/>
             </a:pPr>
             <a:r>
-              <a:rPr lang="en-US" sz="1000" dirty="0">
+              <a:rPr lang="en-US" sz="1200" dirty="0">
                 <a:solidFill>
                   <a:srgbClr val="8A939B"/>
                 </a:solidFill>
@@ -3085,9 +2822,9 @@
                 <a:ea typeface="Calibri" pitchFamily="34" charset="-122"/>
                 <a:cs typeface="Calibri" pitchFamily="34" charset="-120"/>
               </a:rPr>
-              <a:t>  ·  4</a:t>
-            </a:r>
-            <a:endParaRPr lang="en-US" sz="1000" dirty="0"/>
+              <a:t>  ·  7</a:t>
+            </a:r>
+            <a:endParaRPr lang="en-US" sz="1200" dirty="0"/>
           </a:p>
         </p:txBody>
       </p:sp>
@@ -3099,8 +2836,8 @@
         </p:nvSpPr>
         <p:spPr>
           <a:xfrm>
-            <a:off x="640080" y="1143000"/>
-            <a:ext cx="10881360" cy="457200"/>
+            <a:off x="640080" y="1371600"/>
+            <a:ext cx="10332720" cy="4846320"/>
           </a:xfrm>
           <a:prstGeom prst="rect">
             <a:avLst/>
@@ -3109,14 +2846,18 @@
           <a:ln/>
         </p:spPr>
         <p:txBody>
-          <a:bodyPr wrap="square" lIns="0" tIns="0" rIns="0" bIns="0" rtlCol="0" anchor="ctr"/>
-          <a:lstStyle/>
-          <a:p>
-            <a:pPr indent="0" marL="0">
-              <a:buNone/>
-            </a:pPr>
-            <a:r>
-              <a:rPr lang="en-US" sz="1400" dirty="0">
+          <a:bodyPr wrap="square" lIns="0" tIns="0" rIns="0" bIns="0" rtlCol="0" anchor="t"/>
+          <a:lstStyle/>
+          <a:p>
+            <a:pPr marL="342900" indent="-342900">
+              <a:spcAft>
+                <a:spcPts val="1800"/>
+              </a:spcAft>
+              <a:buSzPct val="100000"/>
+              <a:buChar char="•"/>
+            </a:pPr>
+            <a:r>
+              <a:rPr lang="en-US" sz="1800" dirty="0">
                 <a:solidFill>
                   <a:srgbClr val="1F2429"/>
                 </a:solidFill>
@@ -3124,589 +2865,93 @@
                 <a:ea typeface="Calibri" pitchFamily="34" charset="-122"/>
                 <a:cs typeface="Calibri" pitchFamily="34" charset="-120"/>
               </a:rPr>
-              <a:t>A working database is never just “the data.” Connolly &amp; Begg describe the environment as five interacting components:</a:t>
-            </a:r>
-            <a:endParaRPr lang="en-US" sz="1400" dirty="0"/>
-          </a:p>
-        </p:txBody>
-      </p:sp>
-      <p:sp>
-        <p:nvSpPr>
-          <p:cNvPr id="5" name="Shape 3"/>
-          <p:cNvSpPr/>
-          <p:nvPr/>
-        </p:nvSpPr>
-        <p:spPr>
-          <a:xfrm>
-            <a:off x="1554480" y="1691640"/>
-            <a:ext cx="9052560" cy="786384"/>
-          </a:xfrm>
-          <a:prstGeom prst="roundRect">
-            <a:avLst>
-              <a:gd name="adj" fmla="val 9302"/>
-            </a:avLst>
-          </a:prstGeom>
-          <a:solidFill>
-            <a:srgbClr val="2FE6C4"/>
-          </a:solidFill>
-          <a:ln/>
-        </p:spPr>
-      </p:sp>
-      <p:sp>
-        <p:nvSpPr>
-          <p:cNvPr id="6" name="Text 4"/>
-          <p:cNvSpPr txBox="1"/>
-          <p:nvPr/>
-        </p:nvSpPr>
-        <p:spPr>
-          <a:xfrm>
-            <a:off x="1783080" y="1764792"/>
-            <a:ext cx="8595360" cy="274320"/>
-          </a:xfrm>
-          <a:prstGeom prst="rect">
-            <a:avLst/>
-          </a:prstGeom>
-          <a:noFill/>
-          <a:ln/>
-        </p:spPr>
-        <p:txBody>
-          <a:bodyPr wrap="square" lIns="0" tIns="0" rIns="0" bIns="0" rtlCol="0" anchor="ctr"/>
-          <a:lstStyle/>
-          <a:p>
-            <a:pPr indent="0" marL="0">
-              <a:buNone/>
-            </a:pPr>
-            <a:r>
-              <a:rPr lang="en-US" sz="1400" b="1" dirty="0">
-                <a:solidFill>
-                  <a:srgbClr val="FFFFFF"/>
-                </a:solidFill>
-                <a:latin typeface="Calibri" pitchFamily="34" charset="0"/>
-                <a:ea typeface="Calibri" pitchFamily="34" charset="-122"/>
-                <a:cs typeface="Calibri" pitchFamily="34" charset="-120"/>
-              </a:rPr>
-              <a:t>Hardware</a:t>
-            </a:r>
-            <a:endParaRPr lang="en-US" sz="1400" dirty="0"/>
-          </a:p>
-        </p:txBody>
-      </p:sp>
-      <p:sp>
-        <p:nvSpPr>
-          <p:cNvPr id="7" name="Text 5"/>
-          <p:cNvSpPr txBox="1"/>
-          <p:nvPr/>
-        </p:nvSpPr>
-        <p:spPr>
-          <a:xfrm>
-            <a:off x="1783080" y="2020824"/>
-            <a:ext cx="8595360" cy="402336"/>
-          </a:xfrm>
-          <a:prstGeom prst="rect">
-            <a:avLst/>
-          </a:prstGeom>
-          <a:noFill/>
-          <a:ln/>
-        </p:spPr>
-        <p:txBody>
-          <a:bodyPr wrap="square" lIns="0" tIns="0" rIns="0" bIns="0" rtlCol="0" anchor="t"/>
-          <a:lstStyle/>
-          <a:p>
-            <a:pPr indent="0" marL="0">
-              <a:buNone/>
-            </a:pPr>
-            <a:r>
-              <a:rPr lang="en-US" sz="1050" dirty="0">
-                <a:solidFill>
-                  <a:srgbClr val="FFFFFF"/>
-                </a:solidFill>
-                <a:latin typeface="Calibri" pitchFamily="34" charset="0"/>
-                <a:ea typeface="Calibri" pitchFamily="34" charset="-122"/>
-                <a:cs typeface="Calibri" pitchFamily="34" charset="-120"/>
-              </a:rPr>
-              <a:t>Servers, storage devices, network — where the bytes physically live</a:t>
-            </a:r>
-            <a:endParaRPr lang="en-US" sz="1050" dirty="0"/>
-          </a:p>
-        </p:txBody>
-      </p:sp>
-      <p:sp>
-        <p:nvSpPr>
-          <p:cNvPr id="8" name="Shape 6"/>
-          <p:cNvSpPr/>
-          <p:nvPr/>
-        </p:nvSpPr>
-        <p:spPr>
-          <a:xfrm rot="5400000">
-            <a:off x="6007608" y="2484882"/>
-            <a:ext cx="146304" cy="123444"/>
-          </a:xfrm>
-          <a:prstGeom prst="rightArrow">
-            <a:avLst/>
-          </a:prstGeom>
-          <a:solidFill>
-            <a:srgbClr val="8A939B"/>
-          </a:solidFill>
-          <a:ln/>
-        </p:spPr>
-      </p:sp>
-      <p:sp>
-        <p:nvSpPr>
-          <p:cNvPr id="9" name="Shape 7"/>
-          <p:cNvSpPr/>
-          <p:nvPr/>
-        </p:nvSpPr>
-        <p:spPr>
-          <a:xfrm>
-            <a:off x="1554480" y="2615184"/>
-            <a:ext cx="9052560" cy="786384"/>
-          </a:xfrm>
-          <a:prstGeom prst="roundRect">
-            <a:avLst>
-              <a:gd name="adj" fmla="val 9302"/>
-            </a:avLst>
-          </a:prstGeom>
-          <a:solidFill>
-            <a:srgbClr val="8B7FD9"/>
-          </a:solidFill>
-          <a:ln/>
-        </p:spPr>
-      </p:sp>
-      <p:sp>
-        <p:nvSpPr>
-          <p:cNvPr id="10" name="Text 8"/>
-          <p:cNvSpPr txBox="1"/>
-          <p:nvPr/>
-        </p:nvSpPr>
-        <p:spPr>
-          <a:xfrm>
-            <a:off x="1783080" y="2688336"/>
-            <a:ext cx="8595360" cy="274320"/>
-          </a:xfrm>
-          <a:prstGeom prst="rect">
-            <a:avLst/>
-          </a:prstGeom>
-          <a:noFill/>
-          <a:ln/>
-        </p:spPr>
-        <p:txBody>
-          <a:bodyPr wrap="square" lIns="0" tIns="0" rIns="0" bIns="0" rtlCol="0" anchor="ctr"/>
-          <a:lstStyle/>
-          <a:p>
-            <a:pPr indent="0" marL="0">
-              <a:buNone/>
-            </a:pPr>
-            <a:r>
-              <a:rPr lang="en-US" sz="1400" b="1" dirty="0">
-                <a:solidFill>
-                  <a:srgbClr val="FFFFFF"/>
-                </a:solidFill>
-                <a:latin typeface="Calibri" pitchFamily="34" charset="0"/>
-                <a:ea typeface="Calibri" pitchFamily="34" charset="-122"/>
-                <a:cs typeface="Calibri" pitchFamily="34" charset="-120"/>
-              </a:rPr>
-              <a:t>Software</a:t>
-            </a:r>
-            <a:endParaRPr lang="en-US" sz="1400" dirty="0"/>
-          </a:p>
-        </p:txBody>
-      </p:sp>
-      <p:sp>
-        <p:nvSpPr>
-          <p:cNvPr id="11" name="Text 9"/>
-          <p:cNvSpPr txBox="1"/>
-          <p:nvPr/>
-        </p:nvSpPr>
-        <p:spPr>
-          <a:xfrm>
-            <a:off x="1783080" y="2944368"/>
-            <a:ext cx="8595360" cy="402336"/>
-          </a:xfrm>
-          <a:prstGeom prst="rect">
-            <a:avLst/>
-          </a:prstGeom>
-          <a:noFill/>
-          <a:ln/>
-        </p:spPr>
-        <p:txBody>
-          <a:bodyPr wrap="square" lIns="0" tIns="0" rIns="0" bIns="0" rtlCol="0" anchor="t"/>
-          <a:lstStyle/>
-          <a:p>
-            <a:pPr indent="0" marL="0">
-              <a:buNone/>
-            </a:pPr>
-            <a:r>
-              <a:rPr lang="en-US" sz="1050" dirty="0">
-                <a:solidFill>
-                  <a:srgbClr val="FFFFFF"/>
-                </a:solidFill>
-                <a:latin typeface="Calibri" pitchFamily="34" charset="0"/>
-                <a:ea typeface="Calibri" pitchFamily="34" charset="-122"/>
-                <a:cs typeface="Calibri" pitchFamily="34" charset="-120"/>
-              </a:rPr>
-              <a:t>The DBMS itself, the operating system, and application programs</a:t>
-            </a:r>
-            <a:endParaRPr lang="en-US" sz="1050" dirty="0"/>
-          </a:p>
-        </p:txBody>
-      </p:sp>
-      <p:sp>
-        <p:nvSpPr>
-          <p:cNvPr id="12" name="Shape 10"/>
-          <p:cNvSpPr/>
-          <p:nvPr/>
-        </p:nvSpPr>
-        <p:spPr>
-          <a:xfrm rot="5400000">
-            <a:off x="6007608" y="3408426"/>
-            <a:ext cx="146304" cy="123444"/>
-          </a:xfrm>
-          <a:prstGeom prst="rightArrow">
-            <a:avLst/>
-          </a:prstGeom>
-          <a:solidFill>
-            <a:srgbClr val="8A939B"/>
-          </a:solidFill>
-          <a:ln/>
-        </p:spPr>
-      </p:sp>
-      <p:sp>
-        <p:nvSpPr>
-          <p:cNvPr id="13" name="Shape 11"/>
-          <p:cNvSpPr/>
-          <p:nvPr/>
-        </p:nvSpPr>
-        <p:spPr>
-          <a:xfrm>
-            <a:off x="1554480" y="3538728"/>
-            <a:ext cx="9052560" cy="786384"/>
-          </a:xfrm>
-          <a:prstGeom prst="roundRect">
-            <a:avLst>
-              <a:gd name="adj" fmla="val 9302"/>
-            </a:avLst>
-          </a:prstGeom>
-          <a:solidFill>
-            <a:srgbClr val="E8A33D"/>
-          </a:solidFill>
-          <a:ln/>
-        </p:spPr>
-      </p:sp>
-      <p:sp>
-        <p:nvSpPr>
-          <p:cNvPr id="14" name="Text 12"/>
-          <p:cNvSpPr txBox="1"/>
-          <p:nvPr/>
-        </p:nvSpPr>
-        <p:spPr>
-          <a:xfrm>
-            <a:off x="1783080" y="3611880"/>
-            <a:ext cx="8595360" cy="274320"/>
-          </a:xfrm>
-          <a:prstGeom prst="rect">
-            <a:avLst/>
-          </a:prstGeom>
-          <a:noFill/>
-          <a:ln/>
-        </p:spPr>
-        <p:txBody>
-          <a:bodyPr wrap="square" lIns="0" tIns="0" rIns="0" bIns="0" rtlCol="0" anchor="ctr"/>
-          <a:lstStyle/>
-          <a:p>
-            <a:pPr indent="0" marL="0">
-              <a:buNone/>
-            </a:pPr>
-            <a:r>
-              <a:rPr lang="en-US" sz="1400" b="1" dirty="0">
-                <a:solidFill>
-                  <a:srgbClr val="FFFFFF"/>
-                </a:solidFill>
-                <a:latin typeface="Calibri" pitchFamily="34" charset="0"/>
-                <a:ea typeface="Calibri" pitchFamily="34" charset="-122"/>
-                <a:cs typeface="Calibri" pitchFamily="34" charset="-120"/>
-              </a:rPr>
-              <a:t>Data</a:t>
-            </a:r>
-            <a:endParaRPr lang="en-US" sz="1400" dirty="0"/>
-          </a:p>
-        </p:txBody>
-      </p:sp>
-      <p:sp>
-        <p:nvSpPr>
-          <p:cNvPr id="15" name="Text 13"/>
-          <p:cNvSpPr txBox="1"/>
-          <p:nvPr/>
-        </p:nvSpPr>
-        <p:spPr>
-          <a:xfrm>
-            <a:off x="1783080" y="3867912"/>
-            <a:ext cx="8595360" cy="402336"/>
-          </a:xfrm>
-          <a:prstGeom prst="rect">
-            <a:avLst/>
-          </a:prstGeom>
-          <a:noFill/>
-          <a:ln/>
-        </p:spPr>
-        <p:txBody>
-          <a:bodyPr wrap="square" lIns="0" tIns="0" rIns="0" bIns="0" rtlCol="0" anchor="t"/>
-          <a:lstStyle/>
-          <a:p>
-            <a:pPr indent="0" marL="0">
-              <a:buNone/>
-            </a:pPr>
-            <a:r>
-              <a:rPr lang="en-US" sz="1050" dirty="0">
-                <a:solidFill>
-                  <a:srgbClr val="FFFFFF"/>
-                </a:solidFill>
-                <a:latin typeface="Calibri" pitchFamily="34" charset="0"/>
-                <a:ea typeface="Calibri" pitchFamily="34" charset="-122"/>
-                <a:cs typeface="Calibri" pitchFamily="34" charset="-120"/>
-              </a:rPr>
-              <a:t>The facts being stored, plus the metadata describing them</a:t>
-            </a:r>
-            <a:endParaRPr lang="en-US" sz="1050" dirty="0"/>
-          </a:p>
-        </p:txBody>
-      </p:sp>
-      <p:sp>
-        <p:nvSpPr>
-          <p:cNvPr id="16" name="Shape 14"/>
-          <p:cNvSpPr/>
-          <p:nvPr/>
-        </p:nvSpPr>
-        <p:spPr>
-          <a:xfrm rot="5400000">
-            <a:off x="6007608" y="4331970"/>
-            <a:ext cx="146304" cy="123444"/>
-          </a:xfrm>
-          <a:prstGeom prst="rightArrow">
-            <a:avLst/>
-          </a:prstGeom>
-          <a:solidFill>
-            <a:srgbClr val="8A939B"/>
-          </a:solidFill>
-          <a:ln/>
-        </p:spPr>
-      </p:sp>
-      <p:sp>
-        <p:nvSpPr>
-          <p:cNvPr id="17" name="Shape 15"/>
-          <p:cNvSpPr/>
-          <p:nvPr/>
-        </p:nvSpPr>
-        <p:spPr>
-          <a:xfrm>
-            <a:off x="1554480" y="4462272"/>
-            <a:ext cx="9052560" cy="786384"/>
-          </a:xfrm>
-          <a:prstGeom prst="roundRect">
-            <a:avLst>
-              <a:gd name="adj" fmla="val 9302"/>
-            </a:avLst>
-          </a:prstGeom>
-          <a:solidFill>
-            <a:srgbClr val="2FE6C4"/>
-          </a:solidFill>
-          <a:ln/>
-        </p:spPr>
-      </p:sp>
-      <p:sp>
-        <p:nvSpPr>
-          <p:cNvPr id="18" name="Text 16"/>
-          <p:cNvSpPr txBox="1"/>
-          <p:nvPr/>
-        </p:nvSpPr>
-        <p:spPr>
-          <a:xfrm>
-            <a:off x="1783080" y="4535424"/>
-            <a:ext cx="8595360" cy="274320"/>
-          </a:xfrm>
-          <a:prstGeom prst="rect">
-            <a:avLst/>
-          </a:prstGeom>
-          <a:noFill/>
-          <a:ln/>
-        </p:spPr>
-        <p:txBody>
-          <a:bodyPr wrap="square" lIns="0" tIns="0" rIns="0" bIns="0" rtlCol="0" anchor="ctr"/>
-          <a:lstStyle/>
-          <a:p>
-            <a:pPr indent="0" marL="0">
-              <a:buNone/>
-            </a:pPr>
-            <a:r>
-              <a:rPr lang="en-US" sz="1400" b="1" dirty="0">
-                <a:solidFill>
-                  <a:srgbClr val="FFFFFF"/>
-                </a:solidFill>
-                <a:latin typeface="Calibri" pitchFamily="34" charset="0"/>
-                <a:ea typeface="Calibri" pitchFamily="34" charset="-122"/>
-                <a:cs typeface="Calibri" pitchFamily="34" charset="-120"/>
-              </a:rPr>
-              <a:t>Procedures</a:t>
-            </a:r>
-            <a:endParaRPr lang="en-US" sz="1400" dirty="0"/>
-          </a:p>
-        </p:txBody>
-      </p:sp>
-      <p:sp>
-        <p:nvSpPr>
-          <p:cNvPr id="19" name="Text 17"/>
-          <p:cNvSpPr txBox="1"/>
-          <p:nvPr/>
-        </p:nvSpPr>
-        <p:spPr>
-          <a:xfrm>
-            <a:off x="1783080" y="4791456"/>
-            <a:ext cx="8595360" cy="402336"/>
-          </a:xfrm>
-          <a:prstGeom prst="rect">
-            <a:avLst/>
-          </a:prstGeom>
-          <a:noFill/>
-          <a:ln/>
-        </p:spPr>
-        <p:txBody>
-          <a:bodyPr wrap="square" lIns="0" tIns="0" rIns="0" bIns="0" rtlCol="0" anchor="t"/>
-          <a:lstStyle/>
-          <a:p>
-            <a:pPr indent="0" marL="0">
-              <a:buNone/>
-            </a:pPr>
-            <a:r>
-              <a:rPr lang="en-US" sz="1050" dirty="0">
-                <a:solidFill>
-                  <a:srgbClr val="FFFFFF"/>
-                </a:solidFill>
-                <a:latin typeface="Calibri" pitchFamily="34" charset="0"/>
-                <a:ea typeface="Calibri" pitchFamily="34" charset="-122"/>
-                <a:cs typeface="Calibri" pitchFamily="34" charset="-120"/>
-              </a:rPr>
-              <a:t>Documented instructions — backup schedules, login steps</a:t>
-            </a:r>
-            <a:endParaRPr lang="en-US" sz="1050" dirty="0"/>
-          </a:p>
-        </p:txBody>
-      </p:sp>
-      <p:sp>
-        <p:nvSpPr>
-          <p:cNvPr id="20" name="Shape 18"/>
-          <p:cNvSpPr/>
-          <p:nvPr/>
-        </p:nvSpPr>
-        <p:spPr>
-          <a:xfrm rot="5400000">
-            <a:off x="6007608" y="5255514"/>
-            <a:ext cx="146304" cy="123444"/>
-          </a:xfrm>
-          <a:prstGeom prst="rightArrow">
-            <a:avLst/>
-          </a:prstGeom>
-          <a:solidFill>
-            <a:srgbClr val="8A939B"/>
-          </a:solidFill>
-          <a:ln/>
-        </p:spPr>
-      </p:sp>
-      <p:sp>
-        <p:nvSpPr>
-          <p:cNvPr id="21" name="Shape 19"/>
-          <p:cNvSpPr/>
-          <p:nvPr/>
-        </p:nvSpPr>
-        <p:spPr>
-          <a:xfrm>
-            <a:off x="1554480" y="5385816"/>
-            <a:ext cx="9052560" cy="786384"/>
-          </a:xfrm>
-          <a:prstGeom prst="roundRect">
-            <a:avLst>
-              <a:gd name="adj" fmla="val 9302"/>
-            </a:avLst>
-          </a:prstGeom>
-          <a:solidFill>
-            <a:srgbClr val="8B7FD9"/>
-          </a:solidFill>
-          <a:ln/>
-        </p:spPr>
-      </p:sp>
-      <p:sp>
-        <p:nvSpPr>
-          <p:cNvPr id="22" name="Text 20"/>
-          <p:cNvSpPr txBox="1"/>
-          <p:nvPr/>
-        </p:nvSpPr>
-        <p:spPr>
-          <a:xfrm>
-            <a:off x="1783080" y="5458968"/>
-            <a:ext cx="8595360" cy="274320"/>
-          </a:xfrm>
-          <a:prstGeom prst="rect">
-            <a:avLst/>
-          </a:prstGeom>
-          <a:noFill/>
-          <a:ln/>
-        </p:spPr>
-        <p:txBody>
-          <a:bodyPr wrap="square" lIns="0" tIns="0" rIns="0" bIns="0" rtlCol="0" anchor="ctr"/>
-          <a:lstStyle/>
-          <a:p>
-            <a:pPr indent="0" marL="0">
-              <a:buNone/>
-            </a:pPr>
-            <a:r>
-              <a:rPr lang="en-US" sz="1400" b="1" dirty="0">
-                <a:solidFill>
-                  <a:srgbClr val="FFFFFF"/>
-                </a:solidFill>
-                <a:latin typeface="Calibri" pitchFamily="34" charset="0"/>
-                <a:ea typeface="Calibri" pitchFamily="34" charset="-122"/>
-                <a:cs typeface="Calibri" pitchFamily="34" charset="-120"/>
-              </a:rPr>
-              <a:t>People</a:t>
-            </a:r>
-            <a:endParaRPr lang="en-US" sz="1400" dirty="0"/>
-          </a:p>
-        </p:txBody>
-      </p:sp>
-      <p:sp>
-        <p:nvSpPr>
-          <p:cNvPr id="23" name="Text 21"/>
-          <p:cNvSpPr txBox="1"/>
-          <p:nvPr/>
-        </p:nvSpPr>
-        <p:spPr>
-          <a:xfrm>
-            <a:off x="1783080" y="5715000"/>
-            <a:ext cx="8595360" cy="402336"/>
-          </a:xfrm>
-          <a:prstGeom prst="rect">
-            <a:avLst/>
-          </a:prstGeom>
-          <a:noFill/>
-          <a:ln/>
-        </p:spPr>
-        <p:txBody>
-          <a:bodyPr wrap="square" lIns="0" tIns="0" rIns="0" bIns="0" rtlCol="0" anchor="t"/>
-          <a:lstStyle/>
-          <a:p>
-            <a:pPr indent="0" marL="0">
-              <a:buNone/>
-            </a:pPr>
-            <a:r>
-              <a:rPr lang="en-US" sz="1050" dirty="0">
-                <a:solidFill>
-                  <a:srgbClr val="FFFFFF"/>
-                </a:solidFill>
-                <a:latin typeface="Calibri" pitchFamily="34" charset="0"/>
-                <a:ea typeface="Calibri" pitchFamily="34" charset="-122"/>
-                <a:cs typeface="Calibri" pitchFamily="34" charset="-120"/>
-              </a:rPr>
-              <a:t>Everyone who designs, administers, develops for, or uses the database</a:t>
-            </a:r>
-            <a:endParaRPr lang="en-US" sz="1050" dirty="0"/>
+              <a:t>Hardware — the servers in COMSATS's data center that physically hold the Student table</a:t>
+            </a:r>
+            <a:endParaRPr lang="en-US" sz="1800" dirty="0"/>
+          </a:p>
+          <a:p>
+            <a:pPr marL="342900" indent="-342900">
+              <a:spcAft>
+                <a:spcPts val="1800"/>
+              </a:spcAft>
+              <a:buSzPct val="100000"/>
+              <a:buChar char="•"/>
+            </a:pPr>
+            <a:r>
+              <a:rPr lang="en-US" sz="1800" dirty="0">
+                <a:solidFill>
+                  <a:srgbClr val="1F2429"/>
+                </a:solidFill>
+                <a:latin typeface="Calibri" pitchFamily="34" charset="0"/>
+                <a:ea typeface="Calibri" pitchFamily="34" charset="-122"/>
+                <a:cs typeface="Calibri" pitchFamily="34" charset="-120"/>
+              </a:rPr>
+              <a:t>Software — the DBMS plus the registrar's, library's, and finance's application programs</a:t>
+            </a:r>
+            <a:endParaRPr lang="en-US" sz="1800" dirty="0"/>
+          </a:p>
+          <a:p>
+            <a:pPr marL="342900" indent="-342900">
+              <a:spcAft>
+                <a:spcPts val="1800"/>
+              </a:spcAft>
+              <a:buSzPct val="100000"/>
+              <a:buChar char="•"/>
+            </a:pPr>
+            <a:r>
+              <a:rPr lang="en-US" sz="1800" dirty="0">
+                <a:solidFill>
+                  <a:srgbClr val="1F2429"/>
+                </a:solidFill>
+                <a:latin typeface="Calibri" pitchFamily="34" charset="0"/>
+                <a:ea typeface="Calibri" pitchFamily="34" charset="-122"/>
+                <a:cs typeface="Calibri" pitchFamily="34" charset="-120"/>
+              </a:rPr>
+              <a:t>Data — the Student relation itself, plus the metadata describing RegNo, Name, Address, Program</a:t>
+            </a:r>
+            <a:endParaRPr lang="en-US" sz="1800" dirty="0"/>
+          </a:p>
+          <a:p>
+            <a:pPr marL="342900" indent="-342900">
+              <a:spcAft>
+                <a:spcPts val="1800"/>
+              </a:spcAft>
+              <a:buSzPct val="100000"/>
+              <a:buChar char="•"/>
+            </a:pPr>
+            <a:r>
+              <a:rPr lang="en-US" sz="1800" dirty="0">
+                <a:solidFill>
+                  <a:srgbClr val="1F2429"/>
+                </a:solidFill>
+                <a:latin typeface="Calibri" pitchFamily="34" charset="0"/>
+                <a:ea typeface="Calibri" pitchFamily="34" charset="-122"/>
+                <a:cs typeface="Calibri" pitchFamily="34" charset="-120"/>
+              </a:rPr>
+              <a:t>Procedures — documented steps for enrolling a new student or restoring from last night's backup</a:t>
+            </a:r>
+            <a:endParaRPr lang="en-US" sz="1800" dirty="0"/>
+          </a:p>
+          <a:p>
+            <a:pPr marL="342900" indent="-342900">
+              <a:spcAft>
+                <a:spcPts val="1800"/>
+              </a:spcAft>
+              <a:buSzPct val="100000"/>
+              <a:buChar char="•"/>
+            </a:pPr>
+            <a:r>
+              <a:rPr lang="en-US" sz="1800" dirty="0">
+                <a:solidFill>
+                  <a:srgbClr val="1F2429"/>
+                </a:solidFill>
+                <a:latin typeface="Calibri" pitchFamily="34" charset="0"/>
+                <a:ea typeface="Calibri" pitchFamily="34" charset="-122"/>
+                <a:cs typeface="Calibri" pitchFamily="34" charset="-120"/>
+              </a:rPr>
+              <a:t>People — the DBA who manages the shared database, and the registrar, library, and finance staff who use it</a:t>
+            </a:r>
+            <a:endParaRPr lang="en-US" sz="1800" dirty="0"/>
           </a:p>
         </p:txBody>
       </p:sp>
@@ -3718,7 +2963,523 @@
 </p:sld>
 </file>
 
-<file path=ppt/slides/slide5.xml><?xml version="1.0" encoding="utf-8"?>
+<file path=ppt/slides/slide14.xml><?xml version="1.0" encoding="utf-8"?>
+<p:sld xmlns:a="http://schemas.openxmlformats.org/drawingml/2006/main" xmlns:r="http://schemas.openxmlformats.org/officeDocument/2006/relationships" xmlns:p="http://schemas.openxmlformats.org/presentationml/2006/main">
+  <p:cSld name="Slide 2">
+    <p:bg>
+      <p:bgPr>
+        <a:solidFill>
+          <a:srgbClr val="F7F8F9"/>
+        </a:solidFill>
+      </p:bgPr>
+    </p:bg>
+    <p:spTree>
+      <p:nvGrpSpPr>
+        <p:cNvPr id="1" name=""/>
+        <p:cNvGrpSpPr/>
+        <p:nvPr/>
+      </p:nvGrpSpPr>
+      <p:grpSpPr>
+        <a:xfrm>
+          <a:off x="0" y="0"/>
+          <a:ext cx="0" cy="0"/>
+          <a:chOff x="0" y="0"/>
+          <a:chExt cx="0" cy="0"/>
+        </a:xfrm>
+      </p:grpSpPr>
+      <p:sp>
+        <p:nvSpPr>
+          <p:cNvPr id="2" name="Text 0"/>
+          <p:cNvSpPr txBox="1"/>
+          <p:nvPr/>
+        </p:nvSpPr>
+        <p:spPr>
+          <a:xfrm>
+            <a:off x="548640" y="365760"/>
+            <a:ext cx="11064240" cy="731520"/>
+          </a:xfrm>
+          <a:prstGeom prst="rect">
+            <a:avLst/>
+          </a:prstGeom>
+          <a:noFill/>
+          <a:ln/>
+        </p:spPr>
+        <p:txBody>
+          <a:bodyPr wrap="square" lIns="0" tIns="0" rIns="0" bIns="0" rtlCol="0" anchor="ctr"/>
+          <a:lstStyle/>
+          <a:p>
+            <a:pPr indent="0" marL="0">
+              <a:buNone/>
+            </a:pPr>
+            <a:r>
+              <a:rPr lang="en-US" sz="2800" b="1" dirty="0">
+                <a:solidFill>
+                  <a:srgbClr val="1F2429"/>
+                </a:solidFill>
+                <a:latin typeface="Calibri" pitchFamily="34" charset="0"/>
+                <a:ea typeface="Calibri" pitchFamily="34" charset="-122"/>
+                <a:cs typeface="Calibri" pitchFamily="34" charset="-120"/>
+              </a:rPr>
+              <a:t>Naive vs. Sophisticated End Users</a:t>
+            </a:r>
+            <a:endParaRPr lang="en-US" sz="2800" dirty="0"/>
+          </a:p>
+        </p:txBody>
+      </p:sp>
+      <p:sp>
+        <p:nvSpPr>
+          <p:cNvPr id="3" name="Text 1"/>
+          <p:cNvSpPr txBox="1"/>
+          <p:nvPr/>
+        </p:nvSpPr>
+        <p:spPr>
+          <a:xfrm>
+            <a:off x="9951415" y="6455664"/>
+            <a:ext cx="2011680" cy="292608"/>
+          </a:xfrm>
+          <a:prstGeom prst="rect">
+            <a:avLst/>
+          </a:prstGeom>
+          <a:noFill/>
+          <a:ln/>
+        </p:spPr>
+        <p:txBody>
+          <a:bodyPr wrap="square" lIns="0" tIns="0" rIns="0" bIns="0" rtlCol="0" anchor="ctr"/>
+          <a:lstStyle/>
+          <a:p>
+            <a:pPr algn="r" indent="0" marL="0">
+              <a:buNone/>
+            </a:pPr>
+            <a:r>
+              <a:rPr lang="en-US" sz="1200" u="sng" dirty="0">
+                <a:solidFill>
+                  <a:srgbClr val="8A939B"/>
+                </a:solidFill>
+                <a:latin typeface="Calibri" pitchFamily="34" charset="0"/>
+                <a:ea typeface="Calibri" pitchFamily="34" charset="-122"/>
+                <a:cs typeface="Calibri" pitchFamily="34" charset="-120"/>
+                <a:hlinkClick r:id="rId1" invalidUrl="" action="" tgtFrame="" tooltip="" history="1" highlightClick="0" endSnd="0">
+                  <a:extLst>
+                    <a:ext uri="{A12FA001-AC4F-418D-AE19-62706E023703}">
+                      <ahyp:hlinkClr xmlns:ahyp="http://schemas.microsoft.com/office/drawing/2018/hyperlinkcolor" val="tx"/>
+                    </a:ext>
+                  </a:extLst>
+                </a:hlinkClick>
+              </a:rPr>
+              <a:t>cuinotes.com</a:t>
+            </a:r>
+            <a:pPr algn="r" indent="0" marL="0">
+              <a:buNone/>
+            </a:pPr>
+            <a:r>
+              <a:rPr lang="en-US" sz="1200" dirty="0">
+                <a:solidFill>
+                  <a:srgbClr val="8A939B"/>
+                </a:solidFill>
+                <a:latin typeface="Calibri" pitchFamily="34" charset="0"/>
+                <a:ea typeface="Calibri" pitchFamily="34" charset="-122"/>
+                <a:cs typeface="Calibri" pitchFamily="34" charset="-120"/>
+              </a:rPr>
+              <a:t>  ·  9</a:t>
+            </a:r>
+            <a:endParaRPr lang="en-US" sz="1200" dirty="0"/>
+          </a:p>
+        </p:txBody>
+      </p:sp>
+      <p:sp>
+        <p:nvSpPr>
+          <p:cNvPr id="4" name="Text 2"/>
+          <p:cNvSpPr txBox="1"/>
+          <p:nvPr/>
+        </p:nvSpPr>
+        <p:spPr>
+          <a:xfrm>
+            <a:off x="640080" y="1371600"/>
+            <a:ext cx="10332720" cy="4846320"/>
+          </a:xfrm>
+          <a:prstGeom prst="rect">
+            <a:avLst/>
+          </a:prstGeom>
+          <a:noFill/>
+          <a:ln/>
+        </p:spPr>
+        <p:txBody>
+          <a:bodyPr wrap="square" lIns="0" tIns="0" rIns="0" bIns="0" rtlCol="0" anchor="t"/>
+          <a:lstStyle/>
+          <a:p>
+            <a:pPr marL="342900" indent="-342900">
+              <a:spcAft>
+                <a:spcPts val="1800"/>
+              </a:spcAft>
+              <a:buSzPct val="100000"/>
+              <a:buChar char="•"/>
+            </a:pPr>
+            <a:r>
+              <a:rPr lang="en-US" sz="1800" dirty="0">
+                <a:solidFill>
+                  <a:srgbClr val="1F2429"/>
+                </a:solidFill>
+                <a:latin typeface="Calibri" pitchFamily="34" charset="0"/>
+                <a:ea typeface="Calibri" pitchFamily="34" charset="-122"/>
+                <a:cs typeface="Calibri" pitchFamily="34" charset="-120"/>
+              </a:rPr>
+              <a:t>Naive users interact only through a fixed application interface, unaware a database even exists underneath</a:t>
+            </a:r>
+            <a:endParaRPr lang="en-US" sz="1800" dirty="0"/>
+          </a:p>
+          <a:p>
+            <a:pPr marL="342900" indent="-342900">
+              <a:spcAft>
+                <a:spcPts val="1800"/>
+              </a:spcAft>
+              <a:buSzPct val="100000"/>
+              <a:buChar char="•"/>
+            </a:pPr>
+            <a:r>
+              <a:rPr lang="en-US" sz="1800" dirty="0">
+                <a:solidFill>
+                  <a:srgbClr val="1F2429"/>
+                </a:solidFill>
+                <a:latin typeface="Calibri" pitchFamily="34" charset="0"/>
+                <a:ea typeface="Calibri" pitchFamily="34" charset="-122"/>
+                <a:cs typeface="Calibri" pitchFamily="34" charset="-120"/>
+              </a:rPr>
+              <a:t>Example: a bank teller using a withdrawal screen — they click buttons and never see a table or write a query</a:t>
+            </a:r>
+            <a:endParaRPr lang="en-US" sz="1800" dirty="0"/>
+          </a:p>
+          <a:p>
+            <a:pPr marL="342900" indent="-342900">
+              <a:spcAft>
+                <a:spcPts val="1800"/>
+              </a:spcAft>
+              <a:buSzPct val="100000"/>
+              <a:buChar char="•"/>
+            </a:pPr>
+            <a:r>
+              <a:rPr lang="en-US" sz="1800" dirty="0">
+                <a:solidFill>
+                  <a:srgbClr val="1F2429"/>
+                </a:solidFill>
+                <a:latin typeface="Calibri" pitchFamily="34" charset="0"/>
+                <a:ea typeface="Calibri" pitchFamily="34" charset="-122"/>
+                <a:cs typeface="Calibri" pitchFamily="34" charset="-120"/>
+              </a:rPr>
+              <a:t>Sophisticated users write their own queries directly against the database, without a pre-built application</a:t>
+            </a:r>
+            <a:endParaRPr lang="en-US" sz="1800" dirty="0"/>
+          </a:p>
+          <a:p>
+            <a:pPr marL="342900" indent="-342900">
+              <a:spcAft>
+                <a:spcPts val="1800"/>
+              </a:spcAft>
+              <a:buSzPct val="100000"/>
+              <a:buChar char="•"/>
+            </a:pPr>
+            <a:r>
+              <a:rPr lang="en-US" sz="1800" dirty="0">
+                <a:solidFill>
+                  <a:srgbClr val="1F2429"/>
+                </a:solidFill>
+                <a:latin typeface="Calibri" pitchFamily="34" charset="0"/>
+                <a:ea typeface="Calibri" pitchFamily="34" charset="-122"/>
+                <a:cs typeface="Calibri" pitchFamily="34" charset="-120"/>
+              </a:rPr>
+              <a:t>Example: a risk analyst querying total outstanding loans per branch, built from scratch for a one-off question</a:t>
+            </a:r>
+            <a:endParaRPr lang="en-US" sz="1800" dirty="0"/>
+          </a:p>
+          <a:p>
+            <a:pPr marL="342900" indent="-342900">
+              <a:spcAft>
+                <a:spcPts val="1800"/>
+              </a:spcAft>
+              <a:buSzPct val="100000"/>
+              <a:buChar char="•"/>
+            </a:pPr>
+            <a:r>
+              <a:rPr lang="en-US" sz="1800" dirty="0">
+                <a:solidFill>
+                  <a:srgbClr val="1F2429"/>
+                </a:solidFill>
+                <a:latin typeface="Calibri" pitchFamily="34" charset="0"/>
+                <a:ea typeface="Calibri" pitchFamily="34" charset="-122"/>
+                <a:cs typeface="Calibri" pitchFamily="34" charset="-120"/>
+              </a:rPr>
+              <a:t>Most end users are naive by design — a well-built application means nobody needs to be sophisticated just to do their job</a:t>
+            </a:r>
+            <a:endParaRPr lang="en-US" sz="1800" dirty="0"/>
+          </a:p>
+        </p:txBody>
+      </p:sp>
+    </p:spTree>
+  </p:cSld>
+  <p:clrMapOvr>
+    <a:masterClrMapping/>
+  </p:clrMapOvr>
+</p:sld>
+</file>
+
+<file path=ppt/slides/slide15.xml><?xml version="1.0" encoding="utf-8"?>
+<p:sld xmlns:a="http://schemas.openxmlformats.org/drawingml/2006/main" xmlns:r="http://schemas.openxmlformats.org/officeDocument/2006/relationships" xmlns:p="http://schemas.openxmlformats.org/presentationml/2006/main">
+  <p:cSld name="Slide 2">
+    <p:bg>
+      <p:bgPr>
+        <a:solidFill>
+          <a:srgbClr val="F7F8F9"/>
+        </a:solidFill>
+      </p:bgPr>
+    </p:bg>
+    <p:spTree>
+      <p:nvGrpSpPr>
+        <p:cNvPr id="1" name=""/>
+        <p:cNvGrpSpPr/>
+        <p:nvPr/>
+      </p:nvGrpSpPr>
+      <p:grpSpPr>
+        <a:xfrm>
+          <a:off x="0" y="0"/>
+          <a:ext cx="0" cy="0"/>
+          <a:chOff x="0" y="0"/>
+          <a:chExt cx="0" cy="0"/>
+        </a:xfrm>
+      </p:grpSpPr>
+      <p:sp>
+        <p:nvSpPr>
+          <p:cNvPr id="2" name="Text 0"/>
+          <p:cNvSpPr txBox="1"/>
+          <p:nvPr/>
+        </p:nvSpPr>
+        <p:spPr>
+          <a:xfrm>
+            <a:off x="548640" y="365760"/>
+            <a:ext cx="11064240" cy="731520"/>
+          </a:xfrm>
+          <a:prstGeom prst="rect">
+            <a:avLst/>
+          </a:prstGeom>
+          <a:noFill/>
+          <a:ln/>
+        </p:spPr>
+        <p:txBody>
+          <a:bodyPr wrap="square" lIns="0" tIns="0" rIns="0" bIns="0" rtlCol="0" anchor="ctr"/>
+          <a:lstStyle/>
+          <a:p>
+            <a:pPr indent="0" marL="0">
+              <a:buNone/>
+            </a:pPr>
+            <a:r>
+              <a:rPr lang="en-US" sz="2800" b="1" dirty="0">
+                <a:solidFill>
+                  <a:srgbClr val="1F2429"/>
+                </a:solidFill>
+                <a:latin typeface="Calibri" pitchFamily="34" charset="0"/>
+                <a:ea typeface="Calibri" pitchFamily="34" charset="-122"/>
+                <a:cs typeface="Calibri" pitchFamily="34" charset="-120"/>
+              </a:rPr>
+              <a:t>Why the DBA Role Matters</a:t>
+            </a:r>
+            <a:endParaRPr lang="en-US" sz="2800" dirty="0"/>
+          </a:p>
+        </p:txBody>
+      </p:sp>
+      <p:sp>
+        <p:nvSpPr>
+          <p:cNvPr id="3" name="Text 1"/>
+          <p:cNvSpPr txBox="1"/>
+          <p:nvPr/>
+        </p:nvSpPr>
+        <p:spPr>
+          <a:xfrm>
+            <a:off x="9951415" y="6455664"/>
+            <a:ext cx="2011680" cy="292608"/>
+          </a:xfrm>
+          <a:prstGeom prst="rect">
+            <a:avLst/>
+          </a:prstGeom>
+          <a:noFill/>
+          <a:ln/>
+        </p:spPr>
+        <p:txBody>
+          <a:bodyPr wrap="square" lIns="0" tIns="0" rIns="0" bIns="0" rtlCol="0" anchor="ctr"/>
+          <a:lstStyle/>
+          <a:p>
+            <a:pPr algn="r" indent="0" marL="0">
+              <a:buNone/>
+            </a:pPr>
+            <a:r>
+              <a:rPr lang="en-US" sz="1200" u="sng" dirty="0">
+                <a:solidFill>
+                  <a:srgbClr val="8A939B"/>
+                </a:solidFill>
+                <a:latin typeface="Calibri" pitchFamily="34" charset="0"/>
+                <a:ea typeface="Calibri" pitchFamily="34" charset="-122"/>
+                <a:cs typeface="Calibri" pitchFamily="34" charset="-120"/>
+                <a:hlinkClick r:id="rId1" invalidUrl="" action="" tgtFrame="" tooltip="" history="1" highlightClick="0" endSnd="0">
+                  <a:extLst>
+                    <a:ext uri="{A12FA001-AC4F-418D-AE19-62706E023703}">
+                      <ahyp:hlinkClr xmlns:ahyp="http://schemas.microsoft.com/office/drawing/2018/hyperlinkcolor" val="tx"/>
+                    </a:ext>
+                  </a:extLst>
+                </a:hlinkClick>
+              </a:rPr>
+              <a:t>cuinotes.com</a:t>
+            </a:r>
+            <a:pPr algn="r" indent="0" marL="0">
+              <a:buNone/>
+            </a:pPr>
+            <a:r>
+              <a:rPr lang="en-US" sz="1200" dirty="0">
+                <a:solidFill>
+                  <a:srgbClr val="8A939B"/>
+                </a:solidFill>
+                <a:latin typeface="Calibri" pitchFamily="34" charset="0"/>
+                <a:ea typeface="Calibri" pitchFamily="34" charset="-122"/>
+                <a:cs typeface="Calibri" pitchFamily="34" charset="-120"/>
+              </a:rPr>
+              <a:t>  ·  10</a:t>
+            </a:r>
+            <a:endParaRPr lang="en-US" sz="1200" dirty="0"/>
+          </a:p>
+        </p:txBody>
+      </p:sp>
+      <p:sp>
+        <p:nvSpPr>
+          <p:cNvPr id="4" name="Text 2"/>
+          <p:cNvSpPr txBox="1"/>
+          <p:nvPr/>
+        </p:nvSpPr>
+        <p:spPr>
+          <a:xfrm>
+            <a:off x="640080" y="1371600"/>
+            <a:ext cx="10332720" cy="4846320"/>
+          </a:xfrm>
+          <a:prstGeom prst="rect">
+            <a:avLst/>
+          </a:prstGeom>
+          <a:noFill/>
+          <a:ln/>
+        </p:spPr>
+        <p:txBody>
+          <a:bodyPr wrap="square" lIns="0" tIns="0" rIns="0" bIns="0" rtlCol="0" anchor="t"/>
+          <a:lstStyle/>
+          <a:p>
+            <a:pPr marL="342900" indent="-342900">
+              <a:spcAft>
+                <a:spcPts val="1800"/>
+              </a:spcAft>
+              <a:buSzPct val="100000"/>
+              <a:buChar char="•"/>
+            </a:pPr>
+            <a:r>
+              <a:rPr lang="en-US" sz="1800" dirty="0">
+                <a:solidFill>
+                  <a:srgbClr val="1F2429"/>
+                </a:solidFill>
+                <a:latin typeface="Calibri" pitchFamily="34" charset="0"/>
+                <a:ea typeface="Calibri" pitchFamily="34" charset="-122"/>
+                <a:cs typeface="Calibri" pitchFamily="34" charset="-120"/>
+              </a:rPr>
+              <a:t>In a file-based world, no single person was responsible for an organization's data as a whole</a:t>
+            </a:r>
+            <a:endParaRPr lang="en-US" sz="1800" dirty="0"/>
+          </a:p>
+          <a:p>
+            <a:pPr marL="342900" indent="-342900">
+              <a:spcAft>
+                <a:spcPts val="1800"/>
+              </a:spcAft>
+              <a:buSzPct val="100000"/>
+              <a:buChar char="•"/>
+            </a:pPr>
+            <a:r>
+              <a:rPr lang="en-US" sz="1800" dirty="0">
+                <a:solidFill>
+                  <a:srgbClr val="1F2429"/>
+                </a:solidFill>
+                <a:latin typeface="Calibri" pitchFamily="34" charset="0"/>
+                <a:ea typeface="Calibri" pitchFamily="34" charset="-122"/>
+                <a:cs typeface="Calibri" pitchFamily="34" charset="-120"/>
+              </a:rPr>
+              <a:t>Each application programmer managed only their own files, with their own ad hoc rules</a:t>
+            </a:r>
+            <a:endParaRPr lang="en-US" sz="1800" dirty="0"/>
+          </a:p>
+          <a:p>
+            <a:pPr marL="342900" indent="-342900">
+              <a:spcAft>
+                <a:spcPts val="1800"/>
+              </a:spcAft>
+              <a:buSzPct val="100000"/>
+              <a:buChar char="•"/>
+            </a:pPr>
+            <a:r>
+              <a:rPr lang="en-US" sz="1800" dirty="0">
+                <a:solidFill>
+                  <a:srgbClr val="1F2429"/>
+                </a:solidFill>
+                <a:latin typeface="Calibri" pitchFamily="34" charset="0"/>
+                <a:ea typeface="Calibri" pitchFamily="34" charset="-122"/>
+                <a:cs typeface="Calibri" pitchFamily="34" charset="-120"/>
+              </a:rPr>
+              <a:t>The database approach concentrates that responsibility into one role: the DBA</a:t>
+            </a:r>
+            <a:endParaRPr lang="en-US" sz="1800" dirty="0"/>
+          </a:p>
+          <a:p>
+            <a:pPr marL="342900" indent="-342900">
+              <a:spcAft>
+                <a:spcPts val="1800"/>
+              </a:spcAft>
+              <a:buSzPct val="100000"/>
+              <a:buChar char="•"/>
+            </a:pPr>
+            <a:r>
+              <a:rPr lang="en-US" sz="1800" dirty="0">
+                <a:solidFill>
+                  <a:srgbClr val="1F2429"/>
+                </a:solidFill>
+                <a:latin typeface="Calibri" pitchFamily="34" charset="0"/>
+                <a:ea typeface="Calibri" pitchFamily="34" charset="-122"/>
+                <a:cs typeface="Calibri" pitchFamily="34" charset="-120"/>
+              </a:rPr>
+              <a:t>Centralizing the data means centralizing the risk if it is mismanaged — one bad decision now affects everyone</a:t>
+            </a:r>
+            <a:endParaRPr lang="en-US" sz="1800" dirty="0"/>
+          </a:p>
+          <a:p>
+            <a:pPr marL="342900" indent="-342900">
+              <a:spcAft>
+                <a:spcPts val="1800"/>
+              </a:spcAft>
+              <a:buSzPct val="100000"/>
+              <a:buChar char="•"/>
+            </a:pPr>
+            <a:r>
+              <a:rPr lang="en-US" sz="1800" dirty="0">
+                <a:solidFill>
+                  <a:srgbClr val="1F2429"/>
+                </a:solidFill>
+                <a:latin typeface="Calibri" pitchFamily="34" charset="0"/>
+                <a:ea typeface="Calibri" pitchFamily="34" charset="-122"/>
+                <a:cs typeface="Calibri" pitchFamily="34" charset="-120"/>
+              </a:rPr>
+              <a:t>That is why the DBA's concerns — security, performance, backup/recovery, availability — cover the whole organization at once</a:t>
+            </a:r>
+            <a:endParaRPr lang="en-US" sz="1800" dirty="0"/>
+          </a:p>
+        </p:txBody>
+      </p:sp>
+    </p:spTree>
+  </p:cSld>
+  <p:clrMapOvr>
+    <a:masterClrMapping/>
+  </p:clrMapOvr>
+</p:sld>
+</file>
+
+<file path=ppt/slides/slide16.xml><?xml version="1.0" encoding="utf-8"?>
 <p:sld xmlns:a="http://schemas.openxmlformats.org/drawingml/2006/main" xmlns:r="http://schemas.openxmlformats.org/officeDocument/2006/relationships" xmlns:p="http://schemas.openxmlformats.org/presentationml/2006/main">
   <p:cSld name="Slide 5">
     <p:bg>
@@ -3775,7 +3536,7 @@
                 <a:ea typeface="Calibri" pitchFamily="34" charset="-122"/>
                 <a:cs typeface="Calibri" pitchFamily="34" charset="-120"/>
               </a:rPr>
-              <a:t>Roles Around a Database</a:t>
+              <a:t>Worked Example: Tracing One Query Through the DBMS</a:t>
             </a:r>
             <a:endParaRPr lang="en-US" sz="2800" dirty="0"/>
           </a:p>
@@ -3806,7 +3567,7 @@
               <a:buNone/>
             </a:pPr>
             <a:r>
-              <a:rPr lang="en-US" sz="1000" u="sng" dirty="0">
+              <a:rPr lang="en-US" sz="1200" u="sng" dirty="0">
                 <a:solidFill>
                   <a:srgbClr val="8A939B"/>
                 </a:solidFill>
@@ -3827,7 +3588,7 @@
               <a:buNone/>
             </a:pPr>
             <a:r>
-              <a:rPr lang="en-US" sz="1000" dirty="0">
+              <a:rPr lang="en-US" sz="1200" dirty="0">
                 <a:solidFill>
                   <a:srgbClr val="8A939B"/>
                 </a:solidFill>
@@ -3835,9 +3596,9 @@
                 <a:ea typeface="Calibri" pitchFamily="34" charset="-122"/>
                 <a:cs typeface="Calibri" pitchFamily="34" charset="-120"/>
               </a:rPr>
-              <a:t>  ·  5</a:t>
-            </a:r>
-            <a:endParaRPr lang="en-US" sz="1000" dirty="0"/>
+              <a:t>  ·  12</a:t>
+            </a:r>
+            <a:endParaRPr lang="en-US" sz="1200" dirty="0"/>
           </a:p>
         </p:txBody>
       </p:sp>
@@ -3878,7 +3639,7 @@
                         <a:buNone/>
                       </a:pPr>
                       <a:r>
-                        <a:rPr lang="en-US" sz="1250" b="1" dirty="0">
+                        <a:rPr lang="en-US" sz="1400" b="1" dirty="0">
                           <a:solidFill>
                             <a:srgbClr val="FFFFFF"/>
                           </a:solidFill>
@@ -3886,9 +3647,9 @@
                           <a:ea typeface="Calibri" pitchFamily="34" charset="-122"/>
                           <a:cs typeface="Calibri" pitchFamily="34" charset="-120"/>
                         </a:rPr>
-                        <a:t>Role</a:t>
+                        <a:t>Component</a:t>
                       </a:r>
-                      <a:endParaRPr lang="en-US" sz="1250" dirty="0">
+                      <a:endParaRPr lang="en-US" sz="1400" dirty="0">
                         <a:latin typeface="Calibri" charset="0"/>
                         <a:ea typeface="Calibri" charset="0"/>
                         <a:cs typeface="Calibri" charset="0"/>
@@ -3946,7 +3707,7 @@
                         <a:buNone/>
                       </a:pPr>
                       <a:r>
-                        <a:rPr lang="en-US" sz="1250" b="1" dirty="0">
+                        <a:rPr lang="en-US" sz="1400" b="1" dirty="0">
                           <a:solidFill>
                             <a:srgbClr val="FFFFFF"/>
                           </a:solidFill>
@@ -3954,9 +3715,9 @@
                           <a:ea typeface="Calibri" pitchFamily="34" charset="-122"/>
                           <a:cs typeface="Calibri" pitchFamily="34" charset="-120"/>
                         </a:rPr>
-                        <a:t>Primary concern</a:t>
+                        <a:t>What It Does Here</a:t>
                       </a:r>
-                      <a:endParaRPr lang="en-US" sz="1250" dirty="0">
+                      <a:endParaRPr lang="en-US" sz="1400" dirty="0">
                         <a:latin typeface="Calibri" charset="0"/>
                         <a:ea typeface="Calibri" charset="0"/>
                         <a:cs typeface="Calibri" charset="0"/>
@@ -4014,7 +3775,7 @@
                         <a:buNone/>
                       </a:pPr>
                       <a:r>
-                        <a:rPr lang="en-US" sz="1250" b="1" dirty="0">
+                        <a:rPr lang="en-US" sz="1400" b="1" dirty="0">
                           <a:solidFill>
                             <a:srgbClr val="FFFFFF"/>
                           </a:solidFill>
@@ -4022,9 +3783,9 @@
                           <a:ea typeface="Calibri" pitchFamily="34" charset="-122"/>
                           <a:cs typeface="Calibri" pitchFamily="34" charset="-120"/>
                         </a:rPr>
-                        <a:t>Example task at a bank</a:t>
+                        <a:t>Result</a:t>
                       </a:r>
-                      <a:endParaRPr lang="en-US" sz="1250" dirty="0">
+                      <a:endParaRPr lang="en-US" sz="1400" dirty="0">
                         <a:latin typeface="Calibri" charset="0"/>
                         <a:ea typeface="Calibri" charset="0"/>
                         <a:cs typeface="Calibri" charset="0"/>
@@ -4084,7 +3845,7 @@
                         <a:buNone/>
                       </a:pPr>
                       <a:r>
-                        <a:rPr lang="en-US" sz="1200" dirty="0">
+                        <a:rPr lang="en-US" sz="1400" dirty="0">
                           <a:solidFill>
                             <a:srgbClr val="1F2429"/>
                           </a:solidFill>
@@ -4092,9 +3853,9 @@
                           <a:ea typeface="Calibri" pitchFamily="34" charset="-122"/>
                           <a:cs typeface="Calibri" pitchFamily="34" charset="-120"/>
                         </a:rPr>
-                        <a:t>Database Administrator (DBA)</a:t>
+                        <a:t>Query Processor</a:t>
                       </a:r>
-                      <a:endParaRPr lang="en-US" sz="1200" dirty="0">
+                      <a:endParaRPr lang="en-US" sz="1400" dirty="0">
                         <a:latin typeface="Calibri" charset="0"/>
                         <a:ea typeface="Calibri" charset="0"/>
                         <a:cs typeface="Calibri" charset="0"/>
@@ -4149,7 +3910,7 @@
                         <a:buNone/>
                       </a:pPr>
                       <a:r>
-                        <a:rPr lang="en-US" sz="1200" dirty="0">
+                        <a:rPr lang="en-US" sz="1400" dirty="0">
                           <a:solidFill>
                             <a:srgbClr val="1F2429"/>
                           </a:solidFill>
@@ -4157,9 +3918,9 @@
                           <a:ea typeface="Calibri" pitchFamily="34" charset="-122"/>
                           <a:cs typeface="Calibri" pitchFamily="34" charset="-120"/>
                         </a:rPr>
-                        <a:t>Security, performance, backup/recovery, availability</a:t>
+                        <a:t>Parses the UPDATE statement and checks its syntax</a:t>
                       </a:r>
-                      <a:endParaRPr lang="en-US" sz="1200" dirty="0">
+                      <a:endParaRPr lang="en-US" sz="1400" dirty="0">
                         <a:latin typeface="Calibri" charset="0"/>
                         <a:ea typeface="Calibri" charset="0"/>
                         <a:cs typeface="Calibri" charset="0"/>
@@ -4214,7 +3975,7 @@
                         <a:buNone/>
                       </a:pPr>
                       <a:r>
-                        <a:rPr lang="en-US" sz="1200" dirty="0">
+                        <a:rPr lang="en-US" sz="1400" dirty="0">
                           <a:solidFill>
                             <a:srgbClr val="1F2429"/>
                           </a:solidFill>
@@ -4222,9 +3983,9 @@
                           <a:ea typeface="Calibri" pitchFamily="34" charset="-122"/>
                           <a:cs typeface="Calibri" pitchFamily="34" charset="-120"/>
                         </a:rPr>
-                        <a:t>Granting a new teller SELECT-only access to Account</a:t>
+                        <a:t>Statement is valid and ready to execute</a:t>
                       </a:r>
-                      <a:endParaRPr lang="en-US" sz="1200" dirty="0">
+                      <a:endParaRPr lang="en-US" sz="1400" dirty="0">
                         <a:latin typeface="Calibri" charset="0"/>
                         <a:ea typeface="Calibri" charset="0"/>
                         <a:cs typeface="Calibri" charset="0"/>
@@ -4281,7 +4042,7 @@
                         <a:buNone/>
                       </a:pPr>
                       <a:r>
-                        <a:rPr lang="en-US" sz="1200" dirty="0">
+                        <a:rPr lang="en-US" sz="1400" dirty="0">
                           <a:solidFill>
                             <a:srgbClr val="1F2429"/>
                           </a:solidFill>
@@ -4289,9 +4050,9 @@
                           <a:ea typeface="Calibri" pitchFamily="34" charset="-122"/>
                           <a:cs typeface="Calibri" pitchFamily="34" charset="-120"/>
                         </a:rPr>
-                        <a:t>Database Designers</a:t>
+                        <a:t>Data Dictionary / Catalog</a:t>
                       </a:r>
-                      <a:endParaRPr lang="en-US" sz="1200" dirty="0">
+                      <a:endParaRPr lang="en-US" sz="1400" dirty="0">
                         <a:latin typeface="Calibri" charset="0"/>
                         <a:ea typeface="Calibri" charset="0"/>
                         <a:cs typeface="Calibri" charset="0"/>
@@ -4346,7 +4107,7 @@
                         <a:buNone/>
                       </a:pPr>
                       <a:r>
-                        <a:rPr lang="en-US" sz="1200" dirty="0">
+                        <a:rPr lang="en-US" sz="1400" dirty="0">
                           <a:solidFill>
                             <a:srgbClr val="1F2429"/>
                           </a:solidFill>
@@ -4354,9 +4115,9 @@
                           <a:ea typeface="Calibri" pitchFamily="34" charset="-122"/>
                           <a:cs typeface="Calibri" pitchFamily="34" charset="-120"/>
                         </a:rPr>
-                        <a:t>Deciding what data to store and how it relates</a:t>
+                        <a:t>Confirms Account and balance exist, and the update is permitted</a:t>
                       </a:r>
-                      <a:endParaRPr lang="en-US" sz="1200" dirty="0">
+                      <a:endParaRPr lang="en-US" sz="1400" dirty="0">
                         <a:latin typeface="Calibri" charset="0"/>
                         <a:ea typeface="Calibri" charset="0"/>
                         <a:cs typeface="Calibri" charset="0"/>
@@ -4411,7 +4172,7 @@
                         <a:buNone/>
                       </a:pPr>
                       <a:r>
-                        <a:rPr lang="en-US" sz="1200" dirty="0">
+                        <a:rPr lang="en-US" sz="1400" dirty="0">
                           <a:solidFill>
                             <a:srgbClr val="1F2429"/>
                           </a:solidFill>
@@ -4419,9 +4180,9 @@
                           <a:ea typeface="Calibri" pitchFamily="34" charset="-122"/>
                           <a:cs typeface="Calibri" pitchFamily="34" charset="-120"/>
                         </a:rPr>
-                        <a:t>Deciding Account needs a branchNo foreign key</a:t>
+                        <a:t>Request is recognized as legal</a:t>
                       </a:r>
-                      <a:endParaRPr lang="en-US" sz="1200" dirty="0">
+                      <a:endParaRPr lang="en-US" sz="1400" dirty="0">
                         <a:latin typeface="Calibri" charset="0"/>
                         <a:ea typeface="Calibri" charset="0"/>
                         <a:cs typeface="Calibri" charset="0"/>
@@ -4478,7 +4239,7 @@
                         <a:buNone/>
                       </a:pPr>
                       <a:r>
-                        <a:rPr lang="en-US" sz="1200" dirty="0">
+                        <a:rPr lang="en-US" sz="1400" dirty="0">
                           <a:solidFill>
                             <a:srgbClr val="1F2429"/>
                           </a:solidFill>
@@ -4486,9 +4247,9 @@
                           <a:ea typeface="Calibri" pitchFamily="34" charset="-122"/>
                           <a:cs typeface="Calibri" pitchFamily="34" charset="-120"/>
                         </a:rPr>
-                        <a:t>Application Developers</a:t>
+                        <a:t>Transaction Manager</a:t>
                       </a:r>
-                      <a:endParaRPr lang="en-US" sz="1200" dirty="0">
+                      <a:endParaRPr lang="en-US" sz="1400" dirty="0">
                         <a:latin typeface="Calibri" charset="0"/>
                         <a:ea typeface="Calibri" charset="0"/>
                         <a:cs typeface="Calibri" charset="0"/>
@@ -4543,7 +4304,7 @@
                         <a:buNone/>
                       </a:pPr>
                       <a:r>
-                        <a:rPr lang="en-US" sz="1200" dirty="0">
+                        <a:rPr lang="en-US" sz="1400" dirty="0">
                           <a:solidFill>
                             <a:srgbClr val="1F2429"/>
                           </a:solidFill>
@@ -4551,9 +4312,9 @@
                           <a:ea typeface="Calibri" pitchFamily="34" charset="-122"/>
                           <a:cs typeface="Calibri" pitchFamily="34" charset="-120"/>
                         </a:rPr>
-                        <a:t>Writing the programs end users interact with</a:t>
+                        <a:t>Makes the change safely alongside other concurrent activity</a:t>
                       </a:r>
-                      <a:endParaRPr lang="en-US" sz="1200" dirty="0">
+                      <a:endParaRPr lang="en-US" sz="1400" dirty="0">
                         <a:latin typeface="Calibri" charset="0"/>
                         <a:ea typeface="Calibri" charset="0"/>
                         <a:cs typeface="Calibri" charset="0"/>
@@ -4608,7 +4369,7 @@
                         <a:buNone/>
                       </a:pPr>
                       <a:r>
-                        <a:rPr lang="en-US" sz="1200" dirty="0">
+                        <a:rPr lang="en-US" sz="1400" dirty="0">
                           <a:solidFill>
                             <a:srgbClr val="1F2429"/>
                           </a:solidFill>
@@ -4616,9 +4377,9 @@
                           <a:ea typeface="Calibri" pitchFamily="34" charset="-122"/>
                           <a:cs typeface="Calibri" pitchFamily="34" charset="-120"/>
                         </a:rPr>
-                        <a:t>Building the teller's “process withdrawal” screen</a:t>
+                        <a:t>Update is isolated and recoverable</a:t>
                       </a:r>
-                      <a:endParaRPr lang="en-US" sz="1200" dirty="0">
+                      <a:endParaRPr lang="en-US" sz="1400" dirty="0">
                         <a:latin typeface="Calibri" charset="0"/>
                         <a:ea typeface="Calibri" charset="0"/>
                         <a:cs typeface="Calibri" charset="0"/>
@@ -4675,7 +4436,7 @@
                         <a:buNone/>
                       </a:pPr>
                       <a:r>
-                        <a:rPr lang="en-US" sz="1200" dirty="0">
+                        <a:rPr lang="en-US" sz="1400" dirty="0">
                           <a:solidFill>
                             <a:srgbClr val="1F2429"/>
                           </a:solidFill>
@@ -4683,9 +4444,9 @@
                           <a:ea typeface="Calibri" pitchFamily="34" charset="-122"/>
                           <a:cs typeface="Calibri" pitchFamily="34" charset="-120"/>
                         </a:rPr>
-                        <a:t>End Users</a:t>
+                        <a:t>File Manager</a:t>
                       </a:r>
-                      <a:endParaRPr lang="en-US" sz="1200" dirty="0">
+                      <a:endParaRPr lang="en-US" sz="1400" dirty="0">
                         <a:latin typeface="Calibri" charset="0"/>
                         <a:ea typeface="Calibri" charset="0"/>
                         <a:cs typeface="Calibri" charset="0"/>
@@ -4740,7 +4501,7 @@
                         <a:buNone/>
                       </a:pPr>
                       <a:r>
-                        <a:rPr lang="en-US" sz="1200" dirty="0">
+                        <a:rPr lang="en-US" sz="1400" dirty="0">
                           <a:solidFill>
                             <a:srgbClr val="1F2429"/>
                           </a:solidFill>
@@ -4748,9 +4509,9 @@
                           <a:ea typeface="Calibri" pitchFamily="34" charset="-122"/>
                           <a:cs typeface="Calibri" pitchFamily="34" charset="-120"/>
                         </a:rPr>
-                        <a:t>Using the finished application to do their job</a:t>
+                        <a:t>Writes the new balance value to disk</a:t>
                       </a:r>
-                      <a:endParaRPr lang="en-US" sz="1200" dirty="0">
+                      <a:endParaRPr lang="en-US" sz="1400" dirty="0">
                         <a:latin typeface="Calibri" charset="0"/>
                         <a:ea typeface="Calibri" charset="0"/>
                         <a:cs typeface="Calibri" charset="0"/>
@@ -4805,7 +4566,3814 @@
                         <a:buNone/>
                       </a:pPr>
                       <a:r>
-                        <a:rPr lang="en-US" sz="1200" dirty="0">
+                        <a:rPr lang="en-US" sz="1400" dirty="0">
+                          <a:solidFill>
+                            <a:srgbClr val="1F2429"/>
+                          </a:solidFill>
+                          <a:latin typeface="Calibri" pitchFamily="34" charset="0"/>
+                          <a:ea typeface="Calibri" pitchFamily="34" charset="-122"/>
+                          <a:cs typeface="Calibri" pitchFamily="34" charset="-120"/>
+                        </a:rPr>
+                        <a:t>Change is physically stored</a:t>
+                      </a:r>
+                      <a:endParaRPr lang="en-US" sz="1400" dirty="0">
+                        <a:latin typeface="Calibri" charset="0"/>
+                        <a:ea typeface="Calibri" charset="0"/>
+                        <a:cs typeface="Calibri" charset="0"/>
+                      </a:endParaRPr>
+                    </a:p>
+                  </a:txBody>
+                  <a:tcPr marL="91440" marR="91440" marT="45720" marB="45720" anchor="ctr">
+                    <a:lnL w="9525" cap="flat" cmpd="sng" algn="ctr">
+                      <a:solidFill>
+                        <a:srgbClr val="E1E4E8"/>
+                      </a:solidFill>
+                      <a:prstDash val="solid"/>
+                      <a:round/>
+                      <a:headEnd type="none" w="med" len="med"/>
+                      <a:tailEnd type="none" w="med" len="med"/>
+                    </a:lnL>
+                    <a:lnR w="9525" cap="flat" cmpd="sng" algn="ctr">
+                      <a:solidFill>
+                        <a:srgbClr val="E1E4E8"/>
+                      </a:solidFill>
+                      <a:prstDash val="solid"/>
+                      <a:round/>
+                      <a:headEnd type="none" w="med" len="med"/>
+                      <a:tailEnd type="none" w="med" len="med"/>
+                    </a:lnR>
+                    <a:lnT w="9525" cap="flat" cmpd="sng" algn="ctr">
+                      <a:solidFill>
+                        <a:srgbClr val="E1E4E8"/>
+                      </a:solidFill>
+                      <a:prstDash val="solid"/>
+                      <a:round/>
+                      <a:headEnd type="none" w="med" len="med"/>
+                      <a:tailEnd type="none" w="med" len="med"/>
+                    </a:lnT>
+                    <a:lnB w="9525" cap="flat" cmpd="sng" algn="ctr">
+                      <a:solidFill>
+                        <a:srgbClr val="E1E4E8"/>
+                      </a:solidFill>
+                      <a:prstDash val="solid"/>
+                      <a:round/>
+                      <a:headEnd type="none" w="med" len="med"/>
+                      <a:tailEnd type="none" w="med" len="med"/>
+                    </a:lnB>
+                  </a:tcPr>
+                </a:tc>
+              </a:tr>
+            </a:tbl>
+          </a:graphicData>
+        </a:graphic>
+      </p:graphicFrame>
+      <p:sp>
+        <p:nvSpPr>
+          <p:cNvPr id="5" name="Shape 2"/>
+          <p:cNvSpPr/>
+          <p:nvPr/>
+        </p:nvSpPr>
+        <p:spPr>
+          <a:xfrm>
+            <a:off x="640080" y="3886200"/>
+            <a:ext cx="10881360" cy="1508760"/>
+          </a:xfrm>
+          <a:prstGeom prst="roundRect">
+            <a:avLst>
+              <a:gd name="adj" fmla="val 4848"/>
+            </a:avLst>
+          </a:prstGeom>
+          <a:solidFill>
+            <a:srgbClr val="EDEAFB"/>
+          </a:solidFill>
+          <a:ln w="12700">
+            <a:solidFill>
+              <a:srgbClr val="8B7FD9"/>
+            </a:solidFill>
+            <a:prstDash val="solid"/>
+          </a:ln>
+        </p:spPr>
+      </p:sp>
+      <p:sp>
+        <p:nvSpPr>
+          <p:cNvPr id="6" name="Text 3"/>
+          <p:cNvSpPr txBox="1"/>
+          <p:nvPr/>
+        </p:nvSpPr>
+        <p:spPr>
+          <a:xfrm>
+            <a:off x="868680" y="4023360"/>
+            <a:ext cx="10424160" cy="1234440"/>
+          </a:xfrm>
+          <a:prstGeom prst="rect">
+            <a:avLst/>
+          </a:prstGeom>
+          <a:noFill/>
+          <a:ln/>
+        </p:spPr>
+        <p:txBody>
+          <a:bodyPr wrap="square" lIns="0" tIns="0" rIns="0" bIns="0" rtlCol="0" anchor="t"/>
+          <a:lstStyle/>
+          <a:p>
+            <a:pPr indent="0" marL="0">
+              <a:buNone/>
+            </a:pPr>
+            <a:r>
+              <a:rPr lang="en-US" sz="1800" b="1" dirty="0">
+                <a:solidFill>
+                  <a:srgbClr val="1F2429"/>
+                </a:solidFill>
+                <a:latin typeface="Calibri" pitchFamily="34" charset="0"/>
+                <a:ea typeface="Calibri" pitchFamily="34" charset="-122"/>
+                <a:cs typeface="Calibri" pitchFamily="34" charset="-120"/>
+              </a:rPr>
+              <a:t>The query:  </a:t>
+            </a:r>
+            <a:pPr indent="0" marL="0">
+              <a:buNone/>
+            </a:pPr>
+            <a:r>
+              <a:rPr lang="en-US" sz="1800" dirty="0">
+                <a:solidFill>
+                  <a:srgbClr val="1F2429"/>
+                </a:solidFill>
+                <a:latin typeface="Calibri" pitchFamily="34" charset="0"/>
+                <a:ea typeface="Calibri" pitchFamily="34" charset="-122"/>
+                <a:cs typeface="Calibri" pitchFamily="34" charset="-120"/>
+              </a:rPr>
+              <a:t>UPDATE Account SET balance = balance - 5000 WHERE accountNo = 'SL21' — one statement, four components, each handling a distinct concern.</a:t>
+            </a:r>
+            <a:endParaRPr lang="en-US" sz="1800" dirty="0"/>
+          </a:p>
+        </p:txBody>
+      </p:sp>
+    </p:spTree>
+  </p:cSld>
+  <p:clrMapOvr>
+    <a:masterClrMapping/>
+  </p:clrMapOvr>
+</p:sld>
+</file>
+
+<file path=ppt/slides/slide17.xml><?xml version="1.0" encoding="utf-8"?>
+<p:sld xmlns:a="http://schemas.openxmlformats.org/drawingml/2006/main" xmlns:r="http://schemas.openxmlformats.org/officeDocument/2006/relationships" xmlns:p="http://schemas.openxmlformats.org/presentationml/2006/main">
+  <p:cSld name="Slide 2">
+    <p:bg>
+      <p:bgPr>
+        <a:solidFill>
+          <a:srgbClr val="F7F8F9"/>
+        </a:solidFill>
+      </p:bgPr>
+    </p:bg>
+    <p:spTree>
+      <p:nvGrpSpPr>
+        <p:cNvPr id="1" name=""/>
+        <p:cNvGrpSpPr/>
+        <p:nvPr/>
+      </p:nvGrpSpPr>
+      <p:grpSpPr>
+        <a:xfrm>
+          <a:off x="0" y="0"/>
+          <a:ext cx="0" cy="0"/>
+          <a:chOff x="0" y="0"/>
+          <a:chExt cx="0" cy="0"/>
+        </a:xfrm>
+      </p:grpSpPr>
+      <p:sp>
+        <p:nvSpPr>
+          <p:cNvPr id="2" name="Text 0"/>
+          <p:cNvSpPr txBox="1"/>
+          <p:nvPr/>
+        </p:nvSpPr>
+        <p:spPr>
+          <a:xfrm>
+            <a:off x="548640" y="365760"/>
+            <a:ext cx="11064240" cy="731520"/>
+          </a:xfrm>
+          <a:prstGeom prst="rect">
+            <a:avLst/>
+          </a:prstGeom>
+          <a:noFill/>
+          <a:ln/>
+        </p:spPr>
+        <p:txBody>
+          <a:bodyPr wrap="square" lIns="0" tIns="0" rIns="0" bIns="0" rtlCol="0" anchor="ctr"/>
+          <a:lstStyle/>
+          <a:p>
+            <a:pPr indent="0" marL="0">
+              <a:buNone/>
+            </a:pPr>
+            <a:r>
+              <a:rPr lang="en-US" sz="2800" b="1" dirty="0">
+                <a:solidFill>
+                  <a:srgbClr val="1F2429"/>
+                </a:solidFill>
+                <a:latin typeface="Calibri" pitchFamily="34" charset="0"/>
+                <a:ea typeface="Calibri" pitchFamily="34" charset="-122"/>
+                <a:cs typeface="Calibri" pitchFamily="34" charset="-120"/>
+              </a:rPr>
+              <a:t>Functions in Action: A Withdrawal End to End</a:t>
+            </a:r>
+            <a:endParaRPr lang="en-US" sz="2800" dirty="0"/>
+          </a:p>
+        </p:txBody>
+      </p:sp>
+      <p:sp>
+        <p:nvSpPr>
+          <p:cNvPr id="3" name="Text 1"/>
+          <p:cNvSpPr txBox="1"/>
+          <p:nvPr/>
+        </p:nvSpPr>
+        <p:spPr>
+          <a:xfrm>
+            <a:off x="9951415" y="6455664"/>
+            <a:ext cx="2011680" cy="292608"/>
+          </a:xfrm>
+          <a:prstGeom prst="rect">
+            <a:avLst/>
+          </a:prstGeom>
+          <a:noFill/>
+          <a:ln/>
+        </p:spPr>
+        <p:txBody>
+          <a:bodyPr wrap="square" lIns="0" tIns="0" rIns="0" bIns="0" rtlCol="0" anchor="ctr"/>
+          <a:lstStyle/>
+          <a:p>
+            <a:pPr algn="r" indent="0" marL="0">
+              <a:buNone/>
+            </a:pPr>
+            <a:r>
+              <a:rPr lang="en-US" sz="1200" u="sng" dirty="0">
+                <a:solidFill>
+                  <a:srgbClr val="8A939B"/>
+                </a:solidFill>
+                <a:latin typeface="Calibri" pitchFamily="34" charset="0"/>
+                <a:ea typeface="Calibri" pitchFamily="34" charset="-122"/>
+                <a:cs typeface="Calibri" pitchFamily="34" charset="-120"/>
+                <a:hlinkClick r:id="rId1" invalidUrl="" action="" tgtFrame="" tooltip="" history="1" highlightClick="0" endSnd="0">
+                  <a:extLst>
+                    <a:ext uri="{A12FA001-AC4F-418D-AE19-62706E023703}">
+                      <ahyp:hlinkClr xmlns:ahyp="http://schemas.microsoft.com/office/drawing/2018/hyperlinkcolor" val="tx"/>
+                    </a:ext>
+                  </a:extLst>
+                </a:hlinkClick>
+              </a:rPr>
+              <a:t>cuinotes.com</a:t>
+            </a:r>
+            <a:pPr algn="r" indent="0" marL="0">
+              <a:buNone/>
+            </a:pPr>
+            <a:r>
+              <a:rPr lang="en-US" sz="1200" dirty="0">
+                <a:solidFill>
+                  <a:srgbClr val="8A939B"/>
+                </a:solidFill>
+                <a:latin typeface="Calibri" pitchFamily="34" charset="0"/>
+                <a:ea typeface="Calibri" pitchFamily="34" charset="-122"/>
+                <a:cs typeface="Calibri" pitchFamily="34" charset="-120"/>
+              </a:rPr>
+              <a:t>  ·  15</a:t>
+            </a:r>
+            <a:endParaRPr lang="en-US" sz="1200" dirty="0"/>
+          </a:p>
+        </p:txBody>
+      </p:sp>
+      <p:sp>
+        <p:nvSpPr>
+          <p:cNvPr id="4" name="Text 2"/>
+          <p:cNvSpPr txBox="1"/>
+          <p:nvPr/>
+        </p:nvSpPr>
+        <p:spPr>
+          <a:xfrm>
+            <a:off x="640080" y="1371600"/>
+            <a:ext cx="10332720" cy="4846320"/>
+          </a:xfrm>
+          <a:prstGeom prst="rect">
+            <a:avLst/>
+          </a:prstGeom>
+          <a:noFill/>
+          <a:ln/>
+        </p:spPr>
+        <p:txBody>
+          <a:bodyPr wrap="square" lIns="0" tIns="0" rIns="0" bIns="0" rtlCol="0" anchor="t"/>
+          <a:lstStyle/>
+          <a:p>
+            <a:pPr marL="342900" indent="-342900">
+              <a:spcAft>
+                <a:spcPts val="1800"/>
+              </a:spcAft>
+              <a:buSzPct val="100000"/>
+              <a:buChar char="•"/>
+            </a:pPr>
+            <a:r>
+              <a:rPr lang="en-US" sz="1800" dirty="0">
+                <a:solidFill>
+                  <a:srgbClr val="1F2429"/>
+                </a:solidFill>
+                <a:latin typeface="Calibri" pitchFamily="34" charset="0"/>
+                <a:ea typeface="Calibri" pitchFamily="34" charset="-122"/>
+                <a:cs typeface="Calibri" pitchFamily="34" charset="-120"/>
+              </a:rPr>
+              <a:t>Transaction support — debit the account and log the withdrawal as one unit; both happen or neither does</a:t>
+            </a:r>
+            <a:endParaRPr lang="en-US" sz="1800" dirty="0"/>
+          </a:p>
+          <a:p>
+            <a:pPr marL="342900" indent="-342900">
+              <a:spcAft>
+                <a:spcPts val="1800"/>
+              </a:spcAft>
+              <a:buSzPct val="100000"/>
+              <a:buChar char="•"/>
+            </a:pPr>
+            <a:r>
+              <a:rPr lang="en-US" sz="1800" dirty="0">
+                <a:solidFill>
+                  <a:srgbClr val="1F2429"/>
+                </a:solidFill>
+                <a:latin typeface="Calibri" pitchFamily="34" charset="0"/>
+                <a:ea typeface="Calibri" pitchFamily="34" charset="-122"/>
+                <a:cs typeface="Calibri" pitchFamily="34" charset="-120"/>
+              </a:rPr>
+              <a:t>Concurrency control — two withdrawals hitting the same account at once can't both succeed and overdraw it</a:t>
+            </a:r>
+            <a:endParaRPr lang="en-US" sz="1800" dirty="0"/>
+          </a:p>
+          <a:p>
+            <a:pPr marL="342900" indent="-342900">
+              <a:spcAft>
+                <a:spcPts val="1800"/>
+              </a:spcAft>
+              <a:buSzPct val="100000"/>
+              <a:buChar char="•"/>
+            </a:pPr>
+            <a:r>
+              <a:rPr lang="en-US" sz="1800" dirty="0">
+                <a:solidFill>
+                  <a:srgbClr val="1F2429"/>
+                </a:solidFill>
+                <a:latin typeface="Calibri" pitchFamily="34" charset="0"/>
+                <a:ea typeface="Calibri" pitchFamily="34" charset="-122"/>
+                <a:cs typeface="Calibri" pitchFamily="34" charset="-120"/>
+              </a:rPr>
+              <a:t>Integrity services — a rule rejects the withdrawal outright if it would push balance below zero</a:t>
+            </a:r>
+            <a:endParaRPr lang="en-US" sz="1800" dirty="0"/>
+          </a:p>
+          <a:p>
+            <a:pPr marL="342900" indent="-342900">
+              <a:spcAft>
+                <a:spcPts val="1800"/>
+              </a:spcAft>
+              <a:buSzPct val="100000"/>
+              <a:buChar char="•"/>
+            </a:pPr>
+            <a:r>
+              <a:rPr lang="en-US" sz="1800" dirty="0">
+                <a:solidFill>
+                  <a:srgbClr val="1F2429"/>
+                </a:solidFill>
+                <a:latin typeface="Calibri" pitchFamily="34" charset="0"/>
+                <a:ea typeface="Calibri" pitchFamily="34" charset="-122"/>
+                <a:cs typeface="Calibri" pitchFamily="34" charset="-120"/>
+              </a:rPr>
+              <a:t>Authorization services — the teller's login can debit accounts but cannot change the bank's interest rate table</a:t>
+            </a:r>
+            <a:endParaRPr lang="en-US" sz="1800" dirty="0"/>
+          </a:p>
+          <a:p>
+            <a:pPr marL="342900" indent="-342900">
+              <a:spcAft>
+                <a:spcPts val="1800"/>
+              </a:spcAft>
+              <a:buSzPct val="100000"/>
+              <a:buChar char="•"/>
+            </a:pPr>
+            <a:r>
+              <a:rPr lang="en-US" sz="1800" dirty="0">
+                <a:solidFill>
+                  <a:srgbClr val="1F2429"/>
+                </a:solidFill>
+                <a:latin typeface="Calibri" pitchFamily="34" charset="0"/>
+                <a:ea typeface="Calibri" pitchFamily="34" charset="-122"/>
+                <a:cs typeface="Calibri" pitchFamily="34" charset="-120"/>
+              </a:rPr>
+              <a:t>Recovery services — if the server crashes mid-withdrawal, the DBMS restores a correct state with no half-finished transaction left behind</a:t>
+            </a:r>
+            <a:endParaRPr lang="en-US" sz="1800" dirty="0"/>
+          </a:p>
+        </p:txBody>
+      </p:sp>
+    </p:spTree>
+  </p:cSld>
+  <p:clrMapOvr>
+    <a:masterClrMapping/>
+  </p:clrMapOvr>
+</p:sld>
+</file>
+
+<file path=ppt/slides/slide18.xml><?xml version="1.0" encoding="utf-8"?>
+<p:sld xmlns:a="http://schemas.openxmlformats.org/drawingml/2006/main" xmlns:r="http://schemas.openxmlformats.org/officeDocument/2006/relationships" xmlns:p="http://schemas.openxmlformats.org/presentationml/2006/main">
+  <p:cSld name="Slide 2">
+    <p:bg>
+      <p:bgPr>
+        <a:solidFill>
+          <a:srgbClr val="F7F8F9"/>
+        </a:solidFill>
+      </p:bgPr>
+    </p:bg>
+    <p:spTree>
+      <p:nvGrpSpPr>
+        <p:cNvPr id="1" name=""/>
+        <p:cNvGrpSpPr/>
+        <p:nvPr/>
+      </p:nvGrpSpPr>
+      <p:grpSpPr>
+        <a:xfrm>
+          <a:off x="0" y="0"/>
+          <a:ext cx="0" cy="0"/>
+          <a:chOff x="0" y="0"/>
+          <a:chExt cx="0" cy="0"/>
+        </a:xfrm>
+      </p:grpSpPr>
+      <p:sp>
+        <p:nvSpPr>
+          <p:cNvPr id="2" name="Text 0"/>
+          <p:cNvSpPr txBox="1"/>
+          <p:nvPr/>
+        </p:nvSpPr>
+        <p:spPr>
+          <a:xfrm>
+            <a:off x="548640" y="365760"/>
+            <a:ext cx="11064240" cy="731520"/>
+          </a:xfrm>
+          <a:prstGeom prst="rect">
+            <a:avLst/>
+          </a:prstGeom>
+          <a:noFill/>
+          <a:ln/>
+        </p:spPr>
+        <p:txBody>
+          <a:bodyPr wrap="square" lIns="0" tIns="0" rIns="0" bIns="0" rtlCol="0" anchor="ctr"/>
+          <a:lstStyle/>
+          <a:p>
+            <a:pPr indent="0" marL="0">
+              <a:buNone/>
+            </a:pPr>
+            <a:r>
+              <a:rPr lang="en-US" sz="2800" b="1" dirty="0">
+                <a:solidFill>
+                  <a:srgbClr val="1F2429"/>
+                </a:solidFill>
+                <a:latin typeface="Calibri" pitchFamily="34" charset="0"/>
+                <a:ea typeface="Calibri" pitchFamily="34" charset="-122"/>
+                <a:cs typeface="Calibri" pitchFamily="34" charset="-120"/>
+              </a:rPr>
+              <a:t>Don't Confuse Independence with “Never Changes”</a:t>
+            </a:r>
+            <a:endParaRPr lang="en-US" sz="2800" dirty="0"/>
+          </a:p>
+        </p:txBody>
+      </p:sp>
+      <p:sp>
+        <p:nvSpPr>
+          <p:cNvPr id="3" name="Text 1"/>
+          <p:cNvSpPr txBox="1"/>
+          <p:nvPr/>
+        </p:nvSpPr>
+        <p:spPr>
+          <a:xfrm>
+            <a:off x="9951415" y="6455664"/>
+            <a:ext cx="2011680" cy="292608"/>
+          </a:xfrm>
+          <a:prstGeom prst="rect">
+            <a:avLst/>
+          </a:prstGeom>
+          <a:noFill/>
+          <a:ln/>
+        </p:spPr>
+        <p:txBody>
+          <a:bodyPr wrap="square" lIns="0" tIns="0" rIns="0" bIns="0" rtlCol="0" anchor="ctr"/>
+          <a:lstStyle/>
+          <a:p>
+            <a:pPr algn="r" indent="0" marL="0">
+              <a:buNone/>
+            </a:pPr>
+            <a:r>
+              <a:rPr lang="en-US" sz="1200" u="sng" dirty="0">
+                <a:solidFill>
+                  <a:srgbClr val="8A939B"/>
+                </a:solidFill>
+                <a:latin typeface="Calibri" pitchFamily="34" charset="0"/>
+                <a:ea typeface="Calibri" pitchFamily="34" charset="-122"/>
+                <a:cs typeface="Calibri" pitchFamily="34" charset="-120"/>
+                <a:hlinkClick r:id="rId1" invalidUrl="" action="" tgtFrame="" tooltip="" history="1" highlightClick="0" endSnd="0">
+                  <a:extLst>
+                    <a:ext uri="{A12FA001-AC4F-418D-AE19-62706E023703}">
+                      <ahyp:hlinkClr xmlns:ahyp="http://schemas.microsoft.com/office/drawing/2018/hyperlinkcolor" val="tx"/>
+                    </a:ext>
+                  </a:extLst>
+                </a:hlinkClick>
+              </a:rPr>
+              <a:t>cuinotes.com</a:t>
+            </a:r>
+            <a:pPr algn="r" indent="0" marL="0">
+              <a:buNone/>
+            </a:pPr>
+            <a:r>
+              <a:rPr lang="en-US" sz="1200" dirty="0">
+                <a:solidFill>
+                  <a:srgbClr val="8A939B"/>
+                </a:solidFill>
+                <a:latin typeface="Calibri" pitchFamily="34" charset="0"/>
+                <a:ea typeface="Calibri" pitchFamily="34" charset="-122"/>
+                <a:cs typeface="Calibri" pitchFamily="34" charset="-120"/>
+              </a:rPr>
+              <a:t>  ·  17</a:t>
+            </a:r>
+            <a:endParaRPr lang="en-US" sz="1200" dirty="0"/>
+          </a:p>
+        </p:txBody>
+      </p:sp>
+      <p:sp>
+        <p:nvSpPr>
+          <p:cNvPr id="4" name="Text 2"/>
+          <p:cNvSpPr txBox="1"/>
+          <p:nvPr/>
+        </p:nvSpPr>
+        <p:spPr>
+          <a:xfrm>
+            <a:off x="640080" y="1371600"/>
+            <a:ext cx="10332720" cy="4846320"/>
+          </a:xfrm>
+          <a:prstGeom prst="rect">
+            <a:avLst/>
+          </a:prstGeom>
+          <a:noFill/>
+          <a:ln/>
+        </p:spPr>
+        <p:txBody>
+          <a:bodyPr wrap="square" lIns="0" tIns="0" rIns="0" bIns="0" rtlCol="0" anchor="t"/>
+          <a:lstStyle/>
+          <a:p>
+            <a:pPr marL="342900" indent="-342900">
+              <a:spcAft>
+                <a:spcPts val="1800"/>
+              </a:spcAft>
+              <a:buSzPct val="100000"/>
+              <a:buChar char="•"/>
+            </a:pPr>
+            <a:r>
+              <a:rPr lang="en-US" sz="1800" dirty="0">
+                <a:solidFill>
+                  <a:srgbClr val="1F2429"/>
+                </a:solidFill>
+                <a:latin typeface="Calibri" pitchFamily="34" charset="0"/>
+                <a:ea typeface="Calibri" pitchFamily="34" charset="-122"/>
+                <a:cs typeface="Calibri" pitchFamily="34" charset="-120"/>
+              </a:rPr>
+              <a:t>Data independence does not mean the database's structure is frozen</a:t>
+            </a:r>
+            <a:endParaRPr lang="en-US" sz="1800" dirty="0"/>
+          </a:p>
+          <a:p>
+            <a:pPr marL="342900" indent="-342900">
+              <a:spcAft>
+                <a:spcPts val="1800"/>
+              </a:spcAft>
+              <a:buSzPct val="100000"/>
+              <a:buChar char="•"/>
+            </a:pPr>
+            <a:r>
+              <a:rPr lang="en-US" sz="1800" dirty="0">
+                <a:solidFill>
+                  <a:srgbClr val="1F2429"/>
+                </a:solidFill>
+                <a:latin typeface="Calibri" pitchFamily="34" charset="0"/>
+                <a:ea typeface="Calibri" pitchFamily="34" charset="-122"/>
+                <a:cs typeface="Calibri" pitchFamily="34" charset="-120"/>
+              </a:rPr>
+              <a:t>It means changes at one level can be made without cascading into forced changes at another level</a:t>
+            </a:r>
+            <a:endParaRPr lang="en-US" sz="1800" dirty="0"/>
+          </a:p>
+          <a:p>
+            <a:pPr marL="342900" indent="-342900">
+              <a:spcAft>
+                <a:spcPts val="1800"/>
+              </a:spcAft>
+              <a:buSzPct val="100000"/>
+              <a:buChar char="•"/>
+            </a:pPr>
+            <a:r>
+              <a:rPr lang="en-US" sz="1800" dirty="0">
+                <a:solidFill>
+                  <a:srgbClr val="1F2429"/>
+                </a:solidFill>
+                <a:latin typeface="Calibri" pitchFamily="34" charset="0"/>
+                <a:ea typeface="Calibri" pitchFamily="34" charset="-122"/>
+                <a:cs typeface="Calibri" pitchFamily="34" charset="-120"/>
+              </a:rPr>
+              <a:t>The schema still evolves — new columns get added, storage gets reorganized, indexes get built and dropped</a:t>
+            </a:r>
+            <a:endParaRPr lang="en-US" sz="1800" dirty="0"/>
+          </a:p>
+          <a:p>
+            <a:pPr marL="342900" indent="-342900">
+              <a:spcAft>
+                <a:spcPts val="1800"/>
+              </a:spcAft>
+              <a:buSzPct val="100000"/>
+              <a:buChar char="•"/>
+            </a:pPr>
+            <a:r>
+              <a:rPr lang="en-US" sz="1800" dirty="0">
+                <a:solidFill>
+                  <a:srgbClr val="1F2429"/>
+                </a:solidFill>
+                <a:latin typeface="Calibri" pitchFamily="34" charset="0"/>
+                <a:ea typeface="Calibri" pitchFamily="34" charset="-122"/>
+                <a:cs typeface="Calibri" pitchFamily="34" charset="-120"/>
+              </a:rPr>
+              <a:t>What independence buys you is containment: a DBA's change doesn't force every application programmer to rewrite their code</a:t>
+            </a:r>
+            <a:endParaRPr lang="en-US" sz="1800" dirty="0"/>
+          </a:p>
+          <a:p>
+            <a:pPr marL="342900" indent="-342900">
+              <a:spcAft>
+                <a:spcPts val="1800"/>
+              </a:spcAft>
+              <a:buSzPct val="100000"/>
+              <a:buChar char="•"/>
+            </a:pPr>
+            <a:r>
+              <a:rPr lang="en-US" sz="1800" dirty="0">
+                <a:solidFill>
+                  <a:srgbClr val="1F2429"/>
+                </a:solidFill>
+                <a:latin typeface="Calibri" pitchFamily="34" charset="0"/>
+                <a:ea typeface="Calibri" pitchFamily="34" charset="-122"/>
+                <a:cs typeface="Calibri" pitchFamily="34" charset="-120"/>
+              </a:rPr>
+              <a:t>Lecture 4 splits this into logical and physical data independence, once the ANSI-SPARC three-schema architecture is on the table</a:t>
+            </a:r>
+            <a:endParaRPr lang="en-US" sz="1800" dirty="0"/>
+          </a:p>
+        </p:txBody>
+      </p:sp>
+    </p:spTree>
+  </p:cSld>
+  <p:clrMapOvr>
+    <a:masterClrMapping/>
+  </p:clrMapOvr>
+</p:sld>
+</file>
+
+<file path=ppt/slides/slide19.xml><?xml version="1.0" encoding="utf-8"?>
+<p:sld xmlns:a="http://schemas.openxmlformats.org/drawingml/2006/main" xmlns:r="http://schemas.openxmlformats.org/officeDocument/2006/relationships" xmlns:p="http://schemas.openxmlformats.org/presentationml/2006/main">
+  <p:cSld name="Slide 2">
+    <p:bg>
+      <p:bgPr>
+        <a:solidFill>
+          <a:srgbClr val="F7F8F9"/>
+        </a:solidFill>
+      </p:bgPr>
+    </p:bg>
+    <p:spTree>
+      <p:nvGrpSpPr>
+        <p:cNvPr id="1" name=""/>
+        <p:cNvGrpSpPr/>
+        <p:nvPr/>
+      </p:nvGrpSpPr>
+      <p:grpSpPr>
+        <a:xfrm>
+          <a:off x="0" y="0"/>
+          <a:ext cx="0" cy="0"/>
+          <a:chOff x="0" y="0"/>
+          <a:chExt cx="0" cy="0"/>
+        </a:xfrm>
+      </p:grpSpPr>
+      <p:sp>
+        <p:nvSpPr>
+          <p:cNvPr id="2" name="Text 0"/>
+          <p:cNvSpPr txBox="1"/>
+          <p:nvPr/>
+        </p:nvSpPr>
+        <p:spPr>
+          <a:xfrm>
+            <a:off x="548640" y="365760"/>
+            <a:ext cx="11064240" cy="731520"/>
+          </a:xfrm>
+          <a:prstGeom prst="rect">
+            <a:avLst/>
+          </a:prstGeom>
+          <a:noFill/>
+          <a:ln/>
+        </p:spPr>
+        <p:txBody>
+          <a:bodyPr wrap="square" lIns="0" tIns="0" rIns="0" bIns="0" rtlCol="0" anchor="ctr"/>
+          <a:lstStyle/>
+          <a:p>
+            <a:pPr indent="0" marL="0">
+              <a:buNone/>
+            </a:pPr>
+            <a:r>
+              <a:rPr lang="en-US" sz="2800" b="1" dirty="0">
+                <a:solidFill>
+                  <a:srgbClr val="1F2429"/>
+                </a:solidFill>
+                <a:latin typeface="Calibri" pitchFamily="34" charset="0"/>
+                <a:ea typeface="Calibri" pitchFamily="34" charset="-122"/>
+                <a:cs typeface="Calibri" pitchFamily="34" charset="-120"/>
+              </a:rPr>
+              <a:t>From Data to a Working DBMS — Recap</a:t>
+            </a:r>
+            <a:endParaRPr lang="en-US" sz="2800" dirty="0"/>
+          </a:p>
+        </p:txBody>
+      </p:sp>
+      <p:sp>
+        <p:nvSpPr>
+          <p:cNvPr id="3" name="Text 1"/>
+          <p:cNvSpPr txBox="1"/>
+          <p:nvPr/>
+        </p:nvSpPr>
+        <p:spPr>
+          <a:xfrm>
+            <a:off x="9951415" y="6455664"/>
+            <a:ext cx="2011680" cy="292608"/>
+          </a:xfrm>
+          <a:prstGeom prst="rect">
+            <a:avLst/>
+          </a:prstGeom>
+          <a:noFill/>
+          <a:ln/>
+        </p:spPr>
+        <p:txBody>
+          <a:bodyPr wrap="square" lIns="0" tIns="0" rIns="0" bIns="0" rtlCol="0" anchor="ctr"/>
+          <a:lstStyle/>
+          <a:p>
+            <a:pPr algn="r" indent="0" marL="0">
+              <a:buNone/>
+            </a:pPr>
+            <a:r>
+              <a:rPr lang="en-US" sz="1200" u="sng" dirty="0">
+                <a:solidFill>
+                  <a:srgbClr val="8A939B"/>
+                </a:solidFill>
+                <a:latin typeface="Calibri" pitchFamily="34" charset="0"/>
+                <a:ea typeface="Calibri" pitchFamily="34" charset="-122"/>
+                <a:cs typeface="Calibri" pitchFamily="34" charset="-120"/>
+                <a:hlinkClick r:id="rId1" invalidUrl="" action="" tgtFrame="" tooltip="" history="1" highlightClick="0" endSnd="0">
+                  <a:extLst>
+                    <a:ext uri="{A12FA001-AC4F-418D-AE19-62706E023703}">
+                      <ahyp:hlinkClr xmlns:ahyp="http://schemas.microsoft.com/office/drawing/2018/hyperlinkcolor" val="tx"/>
+                    </a:ext>
+                  </a:extLst>
+                </a:hlinkClick>
+              </a:rPr>
+              <a:t>cuinotes.com</a:t>
+            </a:r>
+            <a:pPr algn="r" indent="0" marL="0">
+              <a:buNone/>
+            </a:pPr>
+            <a:r>
+              <a:rPr lang="en-US" sz="1200" dirty="0">
+                <a:solidFill>
+                  <a:srgbClr val="8A939B"/>
+                </a:solidFill>
+                <a:latin typeface="Calibri" pitchFamily="34" charset="0"/>
+                <a:ea typeface="Calibri" pitchFamily="34" charset="-122"/>
+                <a:cs typeface="Calibri" pitchFamily="34" charset="-120"/>
+              </a:rPr>
+              <a:t>  ·  18</a:t>
+            </a:r>
+            <a:endParaRPr lang="en-US" sz="1200" dirty="0"/>
+          </a:p>
+        </p:txBody>
+      </p:sp>
+      <p:sp>
+        <p:nvSpPr>
+          <p:cNvPr id="4" name="Text 2"/>
+          <p:cNvSpPr txBox="1"/>
+          <p:nvPr/>
+        </p:nvSpPr>
+        <p:spPr>
+          <a:xfrm>
+            <a:off x="640080" y="1371600"/>
+            <a:ext cx="10332720" cy="4846320"/>
+          </a:xfrm>
+          <a:prstGeom prst="rect">
+            <a:avLst/>
+          </a:prstGeom>
+          <a:noFill/>
+          <a:ln/>
+        </p:spPr>
+        <p:txBody>
+          <a:bodyPr wrap="square" lIns="0" tIns="0" rIns="0" bIns="0" rtlCol="0" anchor="t"/>
+          <a:lstStyle/>
+          <a:p>
+            <a:pPr marL="342900" indent="-342900">
+              <a:spcAft>
+                <a:spcPts val="1800"/>
+              </a:spcAft>
+              <a:buSzPct val="100000"/>
+              <a:buChar char="•"/>
+            </a:pPr>
+            <a:r>
+              <a:rPr lang="en-US" sz="1800" dirty="0">
+                <a:solidFill>
+                  <a:srgbClr val="1F2429"/>
+                </a:solidFill>
+                <a:latin typeface="Calibri" pitchFamily="34" charset="0"/>
+                <a:ea typeface="Calibri" pitchFamily="34" charset="-122"/>
+                <a:cs typeface="Calibri" pitchFamily="34" charset="-120"/>
+              </a:rPr>
+              <a:t>We opened the database up: data needs metadata beside it, or a raw value like 4500000 means nothing</a:t>
+            </a:r>
+            <a:endParaRPr lang="en-US" sz="1800" dirty="0"/>
+          </a:p>
+          <a:p>
+            <a:pPr marL="342900" indent="-342900">
+              <a:spcAft>
+                <a:spcPts val="1800"/>
+              </a:spcAft>
+              <a:buSzPct val="100000"/>
+              <a:buChar char="•"/>
+            </a:pPr>
+            <a:r>
+              <a:rPr lang="en-US" sz="1800" dirty="0">
+                <a:solidFill>
+                  <a:srgbClr val="1F2429"/>
+                </a:solidFill>
+                <a:latin typeface="Calibri" pitchFamily="34" charset="0"/>
+                <a:ea typeface="Calibri" pitchFamily="34" charset="-122"/>
+                <a:cs typeface="Calibri" pitchFamily="34" charset="-120"/>
+              </a:rPr>
+              <a:t>A working database is five components together — hardware, software, data, procedures, and people</a:t>
+            </a:r>
+            <a:endParaRPr lang="en-US" sz="1800" dirty="0"/>
+          </a:p>
+          <a:p>
+            <a:pPr marL="342900" indent="-342900">
+              <a:spcAft>
+                <a:spcPts val="1800"/>
+              </a:spcAft>
+              <a:buSzPct val="100000"/>
+              <a:buChar char="•"/>
+            </a:pPr>
+            <a:r>
+              <a:rPr lang="en-US" sz="1800" dirty="0">
+                <a:solidFill>
+                  <a:srgbClr val="1F2429"/>
+                </a:solidFill>
+                <a:latin typeface="Calibri" pitchFamily="34" charset="0"/>
+                <a:ea typeface="Calibri" pitchFamily="34" charset="-122"/>
+                <a:cs typeface="Calibri" pitchFamily="34" charset="-120"/>
+              </a:rPr>
+              <a:t>Distinct roles divide responsibility that file-based systems left scattered across every application programmer</a:t>
+            </a:r>
+            <a:endParaRPr lang="en-US" sz="1800" dirty="0"/>
+          </a:p>
+          <a:p>
+            <a:pPr marL="342900" indent="-342900">
+              <a:spcAft>
+                <a:spcPts val="1800"/>
+              </a:spcAft>
+              <a:buSzPct val="100000"/>
+              <a:buChar char="•"/>
+            </a:pPr>
+            <a:r>
+              <a:rPr lang="en-US" sz="1800" dirty="0">
+                <a:solidFill>
+                  <a:srgbClr val="1F2429"/>
+                </a:solidFill>
+                <a:latin typeface="Calibri" pitchFamily="34" charset="0"/>
+                <a:ea typeface="Calibri" pitchFamily="34" charset="-122"/>
+                <a:cs typeface="Calibri" pitchFamily="34" charset="-120"/>
+              </a:rPr>
+              <a:t>A DBMS's cooperating components together deliver its core functions — storage, transactions, concurrency, recovery, security, integrity</a:t>
+            </a:r>
+            <a:endParaRPr lang="en-US" sz="1800" dirty="0"/>
+          </a:p>
+          <a:p>
+            <a:pPr marL="342900" indent="-342900">
+              <a:spcAft>
+                <a:spcPts val="1800"/>
+              </a:spcAft>
+              <a:buSzPct val="100000"/>
+              <a:buChar char="•"/>
+            </a:pPr>
+            <a:r>
+              <a:rPr lang="en-US" sz="1800" dirty="0">
+                <a:solidFill>
+                  <a:srgbClr val="1F2429"/>
+                </a:solidFill>
+                <a:latin typeface="Calibri" pitchFamily="34" charset="0"/>
+                <a:ea typeface="Calibri" pitchFamily="34" charset="-122"/>
+                <a:cs typeface="Calibri" pitchFamily="34" charset="-120"/>
+              </a:rPr>
+              <a:t>Data independence is the database's direct answer to Lecture 1's program-data dependence problem</a:t>
+            </a:r>
+            <a:endParaRPr lang="en-US" sz="1800" dirty="0"/>
+          </a:p>
+        </p:txBody>
+      </p:sp>
+    </p:spTree>
+  </p:cSld>
+  <p:clrMapOvr>
+    <a:masterClrMapping/>
+  </p:clrMapOvr>
+</p:sld>
+</file>
+
+<file path=ppt/slides/slide2.xml><?xml version="1.0" encoding="utf-8"?>
+<p:sld xmlns:a="http://schemas.openxmlformats.org/drawingml/2006/main" xmlns:r="http://schemas.openxmlformats.org/officeDocument/2006/relationships" xmlns:p="http://schemas.openxmlformats.org/presentationml/2006/main">
+  <p:cSld name="Slide 2">
+    <p:bg>
+      <p:bgPr>
+        <a:solidFill>
+          <a:srgbClr val="F7F8F9"/>
+        </a:solidFill>
+      </p:bgPr>
+    </p:bg>
+    <p:spTree>
+      <p:nvGrpSpPr>
+        <p:cNvPr id="1" name=""/>
+        <p:cNvGrpSpPr/>
+        <p:nvPr/>
+      </p:nvGrpSpPr>
+      <p:grpSpPr>
+        <a:xfrm>
+          <a:off x="0" y="0"/>
+          <a:ext cx="0" cy="0"/>
+          <a:chOff x="0" y="0"/>
+          <a:chExt cx="0" cy="0"/>
+        </a:xfrm>
+      </p:grpSpPr>
+      <p:sp>
+        <p:nvSpPr>
+          <p:cNvPr id="2" name="Text 0"/>
+          <p:cNvSpPr txBox="1"/>
+          <p:nvPr/>
+        </p:nvSpPr>
+        <p:spPr>
+          <a:xfrm>
+            <a:off x="548640" y="365760"/>
+            <a:ext cx="11064240" cy="731520"/>
+          </a:xfrm>
+          <a:prstGeom prst="rect">
+            <a:avLst/>
+          </a:prstGeom>
+          <a:noFill/>
+          <a:ln/>
+        </p:spPr>
+        <p:txBody>
+          <a:bodyPr wrap="square" lIns="0" tIns="0" rIns="0" bIns="0" rtlCol="0" anchor="ctr"/>
+          <a:lstStyle/>
+          <a:p>
+            <a:pPr indent="0" marL="0">
+              <a:buNone/>
+            </a:pPr>
+            <a:r>
+              <a:rPr lang="en-US" sz="2800" b="1" dirty="0">
+                <a:solidFill>
+                  <a:srgbClr val="1F2429"/>
+                </a:solidFill>
+                <a:latin typeface="Calibri" pitchFamily="34" charset="0"/>
+                <a:ea typeface="Calibri" pitchFamily="34" charset="-122"/>
+                <a:cs typeface="Calibri" pitchFamily="34" charset="-120"/>
+              </a:rPr>
+              <a:t>In This Lecture</a:t>
+            </a:r>
+            <a:endParaRPr lang="en-US" sz="2800" dirty="0"/>
+          </a:p>
+        </p:txBody>
+      </p:sp>
+      <p:sp>
+        <p:nvSpPr>
+          <p:cNvPr id="3" name="Text 1"/>
+          <p:cNvSpPr txBox="1"/>
+          <p:nvPr/>
+        </p:nvSpPr>
+        <p:spPr>
+          <a:xfrm>
+            <a:off x="9951415" y="6455664"/>
+            <a:ext cx="2011680" cy="292608"/>
+          </a:xfrm>
+          <a:prstGeom prst="rect">
+            <a:avLst/>
+          </a:prstGeom>
+          <a:noFill/>
+          <a:ln/>
+        </p:spPr>
+        <p:txBody>
+          <a:bodyPr wrap="square" lIns="0" tIns="0" rIns="0" bIns="0" rtlCol="0" anchor="ctr"/>
+          <a:lstStyle/>
+          <a:p>
+            <a:pPr algn="r" indent="0" marL="0">
+              <a:buNone/>
+            </a:pPr>
+            <a:r>
+              <a:rPr lang="en-US" sz="1200" u="sng" dirty="0">
+                <a:solidFill>
+                  <a:srgbClr val="8A939B"/>
+                </a:solidFill>
+                <a:latin typeface="Calibri" pitchFamily="34" charset="0"/>
+                <a:ea typeface="Calibri" pitchFamily="34" charset="-122"/>
+                <a:cs typeface="Calibri" pitchFamily="34" charset="-120"/>
+                <a:hlinkClick r:id="rId1" invalidUrl="" action="" tgtFrame="" tooltip="" history="1" highlightClick="0" endSnd="0">
+                  <a:extLst>
+                    <a:ext uri="{A12FA001-AC4F-418D-AE19-62706E023703}">
+                      <ahyp:hlinkClr xmlns:ahyp="http://schemas.microsoft.com/office/drawing/2018/hyperlinkcolor" val="tx"/>
+                    </a:ext>
+                  </a:extLst>
+                </a:hlinkClick>
+              </a:rPr>
+              <a:t>cuinotes.com</a:t>
+            </a:r>
+            <a:pPr algn="r" indent="0" marL="0">
+              <a:buNone/>
+            </a:pPr>
+            <a:r>
+              <a:rPr lang="en-US" sz="1200" dirty="0">
+                <a:solidFill>
+                  <a:srgbClr val="8A939B"/>
+                </a:solidFill>
+                <a:latin typeface="Calibri" pitchFamily="34" charset="0"/>
+                <a:ea typeface="Calibri" pitchFamily="34" charset="-122"/>
+                <a:cs typeface="Calibri" pitchFamily="34" charset="-120"/>
+              </a:rPr>
+              <a:t>  ·  2</a:t>
+            </a:r>
+            <a:endParaRPr lang="en-US" sz="1200" dirty="0"/>
+          </a:p>
+        </p:txBody>
+      </p:sp>
+      <p:sp>
+        <p:nvSpPr>
+          <p:cNvPr id="4" name="Text 2"/>
+          <p:cNvSpPr txBox="1"/>
+          <p:nvPr/>
+        </p:nvSpPr>
+        <p:spPr>
+          <a:xfrm>
+            <a:off x="640080" y="1371600"/>
+            <a:ext cx="10332720" cy="4846320"/>
+          </a:xfrm>
+          <a:prstGeom prst="rect">
+            <a:avLst/>
+          </a:prstGeom>
+          <a:noFill/>
+          <a:ln/>
+        </p:spPr>
+        <p:txBody>
+          <a:bodyPr wrap="square" lIns="0" tIns="0" rIns="0" bIns="0" rtlCol="0" anchor="t"/>
+          <a:lstStyle/>
+          <a:p>
+            <a:pPr marL="342900" indent="-342900">
+              <a:spcAft>
+                <a:spcPts val="1800"/>
+              </a:spcAft>
+              <a:buSzPct val="100000"/>
+              <a:buChar char="•"/>
+            </a:pPr>
+            <a:r>
+              <a:rPr lang="en-US" sz="1800" dirty="0">
+                <a:solidFill>
+                  <a:srgbClr val="1F2429"/>
+                </a:solidFill>
+                <a:latin typeface="Calibri" pitchFamily="34" charset="0"/>
+                <a:ea typeface="Calibri" pitchFamily="34" charset="-122"/>
+                <a:cs typeface="Calibri" pitchFamily="34" charset="-120"/>
+              </a:rPr>
+              <a:t>The distinction between data and metadata, and why a database needs both</a:t>
+            </a:r>
+            <a:endParaRPr lang="en-US" sz="1800" dirty="0"/>
+          </a:p>
+          <a:p>
+            <a:pPr marL="342900" indent="-342900">
+              <a:spcAft>
+                <a:spcPts val="1800"/>
+              </a:spcAft>
+              <a:buSzPct val="100000"/>
+              <a:buChar char="•"/>
+            </a:pPr>
+            <a:r>
+              <a:rPr lang="en-US" sz="1800" dirty="0">
+                <a:solidFill>
+                  <a:srgbClr val="1F2429"/>
+                </a:solidFill>
+                <a:latin typeface="Calibri" pitchFamily="34" charset="0"/>
+                <a:ea typeface="Calibri" pitchFamily="34" charset="-122"/>
+                <a:cs typeface="Calibri" pitchFamily="34" charset="-120"/>
+              </a:rPr>
+              <a:t>The full database environment: hardware, software, data, procedures, and people</a:t>
+            </a:r>
+            <a:endParaRPr lang="en-US" sz="1800" dirty="0"/>
+          </a:p>
+          <a:p>
+            <a:pPr marL="342900" indent="-342900">
+              <a:spcAft>
+                <a:spcPts val="1800"/>
+              </a:spcAft>
+              <a:buSzPct val="100000"/>
+              <a:buChar char="•"/>
+            </a:pPr>
+            <a:r>
+              <a:rPr lang="en-US" sz="1800" dirty="0">
+                <a:solidFill>
+                  <a:srgbClr val="1F2429"/>
+                </a:solidFill>
+                <a:latin typeface="Calibri" pitchFamily="34" charset="0"/>
+                <a:ea typeface="Calibri" pitchFamily="34" charset="-122"/>
+                <a:cs typeface="Calibri" pitchFamily="34" charset="-120"/>
+              </a:rPr>
+              <a:t>The roles people play around a database — DBA, designers, developers, end users</a:t>
+            </a:r>
+            <a:endParaRPr lang="en-US" sz="1800" dirty="0"/>
+          </a:p>
+          <a:p>
+            <a:pPr marL="342900" indent="-342900">
+              <a:spcAft>
+                <a:spcPts val="1800"/>
+              </a:spcAft>
+              <a:buSzPct val="100000"/>
+              <a:buChar char="•"/>
+            </a:pPr>
+            <a:r>
+              <a:rPr lang="en-US" sz="1800" dirty="0">
+                <a:solidFill>
+                  <a:srgbClr val="1F2429"/>
+                </a:solidFill>
+                <a:latin typeface="Calibri" pitchFamily="34" charset="0"/>
+                <a:ea typeface="Calibri" pitchFamily="34" charset="-122"/>
+                <a:cs typeface="Calibri" pitchFamily="34" charset="-120"/>
+              </a:rPr>
+              <a:t>The major components a DBMS is built from</a:t>
+            </a:r>
+            <a:endParaRPr lang="en-US" sz="1800" dirty="0"/>
+          </a:p>
+          <a:p>
+            <a:pPr marL="342900" indent="-342900">
+              <a:spcAft>
+                <a:spcPts val="1800"/>
+              </a:spcAft>
+              <a:buSzPct val="100000"/>
+              <a:buChar char="•"/>
+            </a:pPr>
+            <a:r>
+              <a:rPr lang="en-US" sz="1800" dirty="0">
+                <a:solidFill>
+                  <a:srgbClr val="1F2429"/>
+                </a:solidFill>
+                <a:latin typeface="Calibri" pitchFamily="34" charset="0"/>
+                <a:ea typeface="Calibri" pitchFamily="34" charset="-122"/>
+                <a:cs typeface="Calibri" pitchFamily="34" charset="-120"/>
+              </a:rPr>
+              <a:t>The core functions every DBMS performs</a:t>
+            </a:r>
+            <a:endParaRPr lang="en-US" sz="1800" dirty="0"/>
+          </a:p>
+          <a:p>
+            <a:pPr marL="342900" indent="-342900">
+              <a:spcAft>
+                <a:spcPts val="1800"/>
+              </a:spcAft>
+              <a:buSzPct val="100000"/>
+              <a:buChar char="•"/>
+            </a:pPr>
+            <a:r>
+              <a:rPr lang="en-US" sz="1800" dirty="0">
+                <a:solidFill>
+                  <a:srgbClr val="1F2429"/>
+                </a:solidFill>
+                <a:latin typeface="Calibri" pitchFamily="34" charset="0"/>
+                <a:ea typeface="Calibri" pitchFamily="34" charset="-122"/>
+                <a:cs typeface="Calibri" pitchFamily="34" charset="-120"/>
+              </a:rPr>
+              <a:t>A first look at data dependence vs. data independence</a:t>
+            </a:r>
+            <a:endParaRPr lang="en-US" sz="1800" dirty="0"/>
+          </a:p>
+        </p:txBody>
+      </p:sp>
+    </p:spTree>
+  </p:cSld>
+  <p:clrMapOvr>
+    <a:masterClrMapping/>
+  </p:clrMapOvr>
+</p:sld>
+</file>
+
+<file path=ppt/slides/slide20.xml><?xml version="1.0" encoding="utf-8"?>
+<p:sld xmlns:a="http://schemas.openxmlformats.org/drawingml/2006/main" xmlns:r="http://schemas.openxmlformats.org/officeDocument/2006/relationships" xmlns:p="http://schemas.openxmlformats.org/presentationml/2006/main">
+  <p:cSld name="Slide 2">
+    <p:bg>
+      <p:bgPr>
+        <a:solidFill>
+          <a:srgbClr val="F7F8F9"/>
+        </a:solidFill>
+      </p:bgPr>
+    </p:bg>
+    <p:spTree>
+      <p:nvGrpSpPr>
+        <p:cNvPr id="1" name=""/>
+        <p:cNvGrpSpPr/>
+        <p:nvPr/>
+      </p:nvGrpSpPr>
+      <p:grpSpPr>
+        <a:xfrm>
+          <a:off x="0" y="0"/>
+          <a:ext cx="0" cy="0"/>
+          <a:chOff x="0" y="0"/>
+          <a:chExt cx="0" cy="0"/>
+        </a:xfrm>
+      </p:grpSpPr>
+      <p:sp>
+        <p:nvSpPr>
+          <p:cNvPr id="2" name="Text 0"/>
+          <p:cNvSpPr txBox="1"/>
+          <p:nvPr/>
+        </p:nvSpPr>
+        <p:spPr>
+          <a:xfrm>
+            <a:off x="548640" y="365760"/>
+            <a:ext cx="11064240" cy="731520"/>
+          </a:xfrm>
+          <a:prstGeom prst="rect">
+            <a:avLst/>
+          </a:prstGeom>
+          <a:noFill/>
+          <a:ln/>
+        </p:spPr>
+        <p:txBody>
+          <a:bodyPr wrap="square" lIns="0" tIns="0" rIns="0" bIns="0" rtlCol="0" anchor="ctr"/>
+          <a:lstStyle/>
+          <a:p>
+            <a:pPr indent="0" marL="0">
+              <a:buNone/>
+            </a:pPr>
+            <a:r>
+              <a:rPr lang="en-US" sz="2800" b="1" dirty="0">
+                <a:solidFill>
+                  <a:srgbClr val="1F2429"/>
+                </a:solidFill>
+                <a:latin typeface="Calibri" pitchFamily="34" charset="0"/>
+                <a:ea typeface="Calibri" pitchFamily="34" charset="-122"/>
+                <a:cs typeface="Calibri" pitchFamily="34" charset="-120"/>
+              </a:rPr>
+              <a:t>Looking Ahead: Lecture 3</a:t>
+            </a:r>
+            <a:endParaRPr lang="en-US" sz="2800" dirty="0"/>
+          </a:p>
+        </p:txBody>
+      </p:sp>
+      <p:sp>
+        <p:nvSpPr>
+          <p:cNvPr id="3" name="Text 1"/>
+          <p:cNvSpPr txBox="1"/>
+          <p:nvPr/>
+        </p:nvSpPr>
+        <p:spPr>
+          <a:xfrm>
+            <a:off x="9951415" y="6455664"/>
+            <a:ext cx="2011680" cy="292608"/>
+          </a:xfrm>
+          <a:prstGeom prst="rect">
+            <a:avLst/>
+          </a:prstGeom>
+          <a:noFill/>
+          <a:ln/>
+        </p:spPr>
+        <p:txBody>
+          <a:bodyPr wrap="square" lIns="0" tIns="0" rIns="0" bIns="0" rtlCol="0" anchor="ctr"/>
+          <a:lstStyle/>
+          <a:p>
+            <a:pPr algn="r" indent="0" marL="0">
+              <a:buNone/>
+            </a:pPr>
+            <a:r>
+              <a:rPr lang="en-US" sz="1200" u="sng" dirty="0">
+                <a:solidFill>
+                  <a:srgbClr val="8A939B"/>
+                </a:solidFill>
+                <a:latin typeface="Calibri" pitchFamily="34" charset="0"/>
+                <a:ea typeface="Calibri" pitchFamily="34" charset="-122"/>
+                <a:cs typeface="Calibri" pitchFamily="34" charset="-120"/>
+                <a:hlinkClick r:id="rId1" invalidUrl="" action="" tgtFrame="" tooltip="" history="1" highlightClick="0" endSnd="0">
+                  <a:extLst>
+                    <a:ext uri="{A12FA001-AC4F-418D-AE19-62706E023703}">
+                      <ahyp:hlinkClr xmlns:ahyp="http://schemas.microsoft.com/office/drawing/2018/hyperlinkcolor" val="tx"/>
+                    </a:ext>
+                  </a:extLst>
+                </a:hlinkClick>
+              </a:rPr>
+              <a:t>cuinotes.com</a:t>
+            </a:r>
+            <a:pPr algn="r" indent="0" marL="0">
+              <a:buNone/>
+            </a:pPr>
+            <a:r>
+              <a:rPr lang="en-US" sz="1200" dirty="0">
+                <a:solidFill>
+                  <a:srgbClr val="8A939B"/>
+                </a:solidFill>
+                <a:latin typeface="Calibri" pitchFamily="34" charset="0"/>
+                <a:ea typeface="Calibri" pitchFamily="34" charset="-122"/>
+                <a:cs typeface="Calibri" pitchFamily="34" charset="-120"/>
+              </a:rPr>
+              <a:t>  ·  20</a:t>
+            </a:r>
+            <a:endParaRPr lang="en-US" sz="1200" dirty="0"/>
+          </a:p>
+        </p:txBody>
+      </p:sp>
+      <p:sp>
+        <p:nvSpPr>
+          <p:cNvPr id="4" name="Text 2"/>
+          <p:cNvSpPr txBox="1"/>
+          <p:nvPr/>
+        </p:nvSpPr>
+        <p:spPr>
+          <a:xfrm>
+            <a:off x="640080" y="1371600"/>
+            <a:ext cx="10332720" cy="4846320"/>
+          </a:xfrm>
+          <a:prstGeom prst="rect">
+            <a:avLst/>
+          </a:prstGeom>
+          <a:noFill/>
+          <a:ln/>
+        </p:spPr>
+        <p:txBody>
+          <a:bodyPr wrap="square" lIns="0" tIns="0" rIns="0" bIns="0" rtlCol="0" anchor="t"/>
+          <a:lstStyle/>
+          <a:p>
+            <a:pPr marL="342900" indent="-342900">
+              <a:spcAft>
+                <a:spcPts val="1800"/>
+              </a:spcAft>
+              <a:buSzPct val="100000"/>
+              <a:buChar char="•"/>
+            </a:pPr>
+            <a:r>
+              <a:rPr lang="en-US" sz="1800" dirty="0">
+                <a:solidFill>
+                  <a:srgbClr val="1F2429"/>
+                </a:solidFill>
+                <a:latin typeface="Calibri" pitchFamily="34" charset="0"/>
+                <a:ea typeface="Calibri" pitchFamily="34" charset="-122"/>
+                <a:cs typeface="Calibri" pitchFamily="34" charset="-120"/>
+              </a:rPr>
+              <a:t>Lecture 3 looks at the languages people and programs actually use to talk to a DBMS</a:t>
+            </a:r>
+            <a:endParaRPr lang="en-US" sz="1800" dirty="0"/>
+          </a:p>
+          <a:p>
+            <a:pPr marL="342900" indent="-342900">
+              <a:spcAft>
+                <a:spcPts val="1800"/>
+              </a:spcAft>
+              <a:buSzPct val="100000"/>
+              <a:buChar char="•"/>
+            </a:pPr>
+            <a:r>
+              <a:rPr lang="en-US" sz="1800" dirty="0">
+                <a:solidFill>
+                  <a:srgbClr val="1F2429"/>
+                </a:solidFill>
+                <a:latin typeface="Calibri" pitchFamily="34" charset="0"/>
+                <a:ea typeface="Calibri" pitchFamily="34" charset="-122"/>
+                <a:cs typeface="Calibri" pitchFamily="34" charset="-120"/>
+              </a:rPr>
+              <a:t>You'll meet DDL (defining structure), DML (querying and updating data), and DCL (controlling access)</a:t>
+            </a:r>
+            <a:endParaRPr lang="en-US" sz="1800" dirty="0"/>
+          </a:p>
+          <a:p>
+            <a:pPr marL="342900" indent="-342900">
+              <a:spcAft>
+                <a:spcPts val="1800"/>
+              </a:spcAft>
+              <a:buSzPct val="100000"/>
+              <a:buChar char="•"/>
+            </a:pPr>
+            <a:r>
+              <a:rPr lang="en-US" sz="1800" dirty="0">
+                <a:solidFill>
+                  <a:srgbClr val="1F2429"/>
+                </a:solidFill>
+                <a:latin typeface="Calibri" pitchFamily="34" charset="0"/>
+                <a:ea typeface="Calibri" pitchFamily="34" charset="-122"/>
+                <a:cs typeface="Calibri" pitchFamily="34" charset="-120"/>
+              </a:rPr>
+              <a:t>Every role from this lecture — the DBA, the designer, the developer, the end user — reaches the database through one of these languages</a:t>
+            </a:r>
+            <a:endParaRPr lang="en-US" sz="1800" dirty="0"/>
+          </a:p>
+          <a:p>
+            <a:pPr marL="342900" indent="-342900">
+              <a:spcAft>
+                <a:spcPts val="1800"/>
+              </a:spcAft>
+              <a:buSzPct val="100000"/>
+              <a:buChar char="•"/>
+            </a:pPr>
+            <a:r>
+              <a:rPr lang="en-US" sz="1800" dirty="0">
+                <a:solidFill>
+                  <a:srgbClr val="1F2429"/>
+                </a:solidFill>
+                <a:latin typeface="Calibri" pitchFamily="34" charset="0"/>
+                <a:ea typeface="Calibri" pitchFamily="34" charset="-122"/>
+                <a:cs typeface="Calibri" pitchFamily="34" charset="-120"/>
+              </a:rPr>
+              <a:t>Today's components and functions are the machinery; Lecture 3 is the interface everyone actually touches</a:t>
+            </a:r>
+            <a:endParaRPr lang="en-US" sz="1800" dirty="0"/>
+          </a:p>
+        </p:txBody>
+      </p:sp>
+    </p:spTree>
+  </p:cSld>
+  <p:clrMapOvr>
+    <a:masterClrMapping/>
+  </p:clrMapOvr>
+</p:sld>
+</file>
+
+<file path=ppt/slides/slide3.xml><?xml version="1.0" encoding="utf-8"?>
+<p:sld xmlns:a="http://schemas.openxmlformats.org/drawingml/2006/main" xmlns:r="http://schemas.openxmlformats.org/officeDocument/2006/relationships" xmlns:p="http://schemas.openxmlformats.org/presentationml/2006/main">
+  <p:cSld name="Slide 3">
+    <p:bg>
+      <p:bgPr>
+        <a:solidFill>
+          <a:srgbClr val="F7F8F9"/>
+        </a:solidFill>
+      </p:bgPr>
+    </p:bg>
+    <p:spTree>
+      <p:nvGrpSpPr>
+        <p:cNvPr id="1" name=""/>
+        <p:cNvGrpSpPr/>
+        <p:nvPr/>
+      </p:nvGrpSpPr>
+      <p:grpSpPr>
+        <a:xfrm>
+          <a:off x="0" y="0"/>
+          <a:ext cx="0" cy="0"/>
+          <a:chOff x="0" y="0"/>
+          <a:chExt cx="0" cy="0"/>
+        </a:xfrm>
+      </p:grpSpPr>
+      <p:sp>
+        <p:nvSpPr>
+          <p:cNvPr id="2" name="Text 0"/>
+          <p:cNvSpPr txBox="1"/>
+          <p:nvPr/>
+        </p:nvSpPr>
+        <p:spPr>
+          <a:xfrm>
+            <a:off x="548640" y="365760"/>
+            <a:ext cx="11064240" cy="731520"/>
+          </a:xfrm>
+          <a:prstGeom prst="rect">
+            <a:avLst/>
+          </a:prstGeom>
+          <a:noFill/>
+          <a:ln/>
+        </p:spPr>
+        <p:txBody>
+          <a:bodyPr wrap="square" lIns="0" tIns="0" rIns="0" bIns="0" rtlCol="0" anchor="ctr"/>
+          <a:lstStyle/>
+          <a:p>
+            <a:pPr indent="0" marL="0">
+              <a:buNone/>
+            </a:pPr>
+            <a:r>
+              <a:rPr lang="en-US" sz="2800" b="1" dirty="0">
+                <a:solidFill>
+                  <a:srgbClr val="1F2429"/>
+                </a:solidFill>
+                <a:latin typeface="Calibri" pitchFamily="34" charset="0"/>
+                <a:ea typeface="Calibri" pitchFamily="34" charset="-122"/>
+                <a:cs typeface="Calibri" pitchFamily="34" charset="-120"/>
+              </a:rPr>
+              <a:t>Data and Metadata</a:t>
+            </a:r>
+            <a:endParaRPr lang="en-US" sz="2800" dirty="0"/>
+          </a:p>
+        </p:txBody>
+      </p:sp>
+      <p:sp>
+        <p:nvSpPr>
+          <p:cNvPr id="3" name="Text 1"/>
+          <p:cNvSpPr txBox="1"/>
+          <p:nvPr/>
+        </p:nvSpPr>
+        <p:spPr>
+          <a:xfrm>
+            <a:off x="9951415" y="6455664"/>
+            <a:ext cx="2011680" cy="292608"/>
+          </a:xfrm>
+          <a:prstGeom prst="rect">
+            <a:avLst/>
+          </a:prstGeom>
+          <a:noFill/>
+          <a:ln/>
+        </p:spPr>
+        <p:txBody>
+          <a:bodyPr wrap="square" lIns="0" tIns="0" rIns="0" bIns="0" rtlCol="0" anchor="ctr"/>
+          <a:lstStyle/>
+          <a:p>
+            <a:pPr algn="r" indent="0" marL="0">
+              <a:buNone/>
+            </a:pPr>
+            <a:r>
+              <a:rPr lang="en-US" sz="1200" u="sng" dirty="0">
+                <a:solidFill>
+                  <a:srgbClr val="8A939B"/>
+                </a:solidFill>
+                <a:latin typeface="Calibri" pitchFamily="34" charset="0"/>
+                <a:ea typeface="Calibri" pitchFamily="34" charset="-122"/>
+                <a:cs typeface="Calibri" pitchFamily="34" charset="-120"/>
+                <a:hlinkClick r:id="rId1" invalidUrl="" action="" tgtFrame="" tooltip="" history="1" highlightClick="0" endSnd="0">
+                  <a:extLst>
+                    <a:ext uri="{A12FA001-AC4F-418D-AE19-62706E023703}">
+                      <ahyp:hlinkClr xmlns:ahyp="http://schemas.microsoft.com/office/drawing/2018/hyperlinkcolor" val="tx"/>
+                    </a:ext>
+                  </a:extLst>
+                </a:hlinkClick>
+              </a:rPr>
+              <a:t>cuinotes.com</a:t>
+            </a:r>
+            <a:pPr algn="r" indent="0" marL="0">
+              <a:buNone/>
+            </a:pPr>
+            <a:r>
+              <a:rPr lang="en-US" sz="1200" dirty="0">
+                <a:solidFill>
+                  <a:srgbClr val="8A939B"/>
+                </a:solidFill>
+                <a:latin typeface="Calibri" pitchFamily="34" charset="0"/>
+                <a:ea typeface="Calibri" pitchFamily="34" charset="-122"/>
+                <a:cs typeface="Calibri" pitchFamily="34" charset="-120"/>
+              </a:rPr>
+              <a:t>  ·  3</a:t>
+            </a:r>
+            <a:endParaRPr lang="en-US" sz="1200" dirty="0"/>
+          </a:p>
+        </p:txBody>
+      </p:sp>
+      <p:sp>
+        <p:nvSpPr>
+          <p:cNvPr id="4" name="Text 2"/>
+          <p:cNvSpPr txBox="1"/>
+          <p:nvPr/>
+        </p:nvSpPr>
+        <p:spPr>
+          <a:xfrm>
+            <a:off x="640080" y="1188720"/>
+            <a:ext cx="10881360" cy="914400"/>
+          </a:xfrm>
+          <a:prstGeom prst="rect">
+            <a:avLst/>
+          </a:prstGeom>
+          <a:noFill/>
+          <a:ln/>
+        </p:spPr>
+        <p:txBody>
+          <a:bodyPr wrap="square" lIns="0" tIns="0" rIns="0" bIns="0" rtlCol="0" anchor="t"/>
+          <a:lstStyle/>
+          <a:p>
+            <a:pPr indent="0" marL="0">
+              <a:buNone/>
+            </a:pPr>
+            <a:r>
+              <a:rPr lang="en-US" sz="1800" b="1" dirty="0">
+                <a:solidFill>
+                  <a:srgbClr val="8B7FD9"/>
+                </a:solidFill>
+                <a:latin typeface="Calibri" pitchFamily="34" charset="0"/>
+                <a:ea typeface="Calibri" pitchFamily="34" charset="-122"/>
+                <a:cs typeface="Calibri" pitchFamily="34" charset="-120"/>
+              </a:rPr>
+              <a:t>Data</a:t>
+            </a:r>
+            <a:pPr indent="0" marL="0">
+              <a:buNone/>
+            </a:pPr>
+            <a:r>
+              <a:rPr lang="en-US" sz="1800" dirty="0">
+                <a:solidFill>
+                  <a:srgbClr val="1F2429"/>
+                </a:solidFill>
+                <a:latin typeface="Calibri" pitchFamily="34" charset="0"/>
+                <a:ea typeface="Calibri" pitchFamily="34" charset="-122"/>
+                <a:cs typeface="Calibri" pitchFamily="34" charset="-120"/>
+              </a:rPr>
+              <a:t> is the actual facts being stored. On its own, a raw value like 4500000 tells you nothing — a database needs a second layer describing the first: </a:t>
+            </a:r>
+            <a:pPr indent="0" marL="0">
+              <a:buNone/>
+            </a:pPr>
+            <a:r>
+              <a:rPr lang="en-US" sz="1800" b="1" dirty="0">
+                <a:solidFill>
+                  <a:srgbClr val="2FE6C4"/>
+                </a:solidFill>
+                <a:latin typeface="Calibri" pitchFamily="34" charset="0"/>
+                <a:ea typeface="Calibri" pitchFamily="34" charset="-122"/>
+                <a:cs typeface="Calibri" pitchFamily="34" charset="-120"/>
+              </a:rPr>
+              <a:t>metadata</a:t>
+            </a:r>
+            <a:pPr indent="0" marL="0">
+              <a:buNone/>
+            </a:pPr>
+            <a:r>
+              <a:rPr lang="en-US" sz="1800" dirty="0">
+                <a:solidFill>
+                  <a:srgbClr val="1F2429"/>
+                </a:solidFill>
+                <a:latin typeface="Calibri" pitchFamily="34" charset="0"/>
+                <a:ea typeface="Calibri" pitchFamily="34" charset="-122"/>
+                <a:cs typeface="Calibri" pitchFamily="34" charset="-120"/>
+              </a:rPr>
+              <a:t> (the system catalog / data dictionary), data about the data.</a:t>
+            </a:r>
+            <a:endParaRPr lang="en-US" sz="1800" dirty="0"/>
+          </a:p>
+        </p:txBody>
+      </p:sp>
+      <p:sp>
+        <p:nvSpPr>
+          <p:cNvPr id="5" name="Text 3"/>
+          <p:cNvSpPr txBox="1"/>
+          <p:nvPr/>
+        </p:nvSpPr>
+        <p:spPr>
+          <a:xfrm>
+            <a:off x="640080" y="2286000"/>
+            <a:ext cx="10881360" cy="274320"/>
+          </a:xfrm>
+          <a:prstGeom prst="rect">
+            <a:avLst/>
+          </a:prstGeom>
+          <a:noFill/>
+          <a:ln/>
+        </p:spPr>
+        <p:txBody>
+          <a:bodyPr wrap="square" lIns="0" tIns="0" rIns="0" bIns="0" rtlCol="0" anchor="ctr"/>
+          <a:lstStyle/>
+          <a:p>
+            <a:pPr indent="0" marL="0">
+              <a:buNone/>
+            </a:pPr>
+            <a:r>
+              <a:rPr lang="en-US" sz="1800" b="1" dirty="0">
+                <a:solidFill>
+                  <a:srgbClr val="8A939B"/>
+                </a:solidFill>
+                <a:latin typeface="Calibri" pitchFamily="34" charset="0"/>
+                <a:ea typeface="Calibri" pitchFamily="34" charset="-122"/>
+                <a:cs typeface="Calibri" pitchFamily="34" charset="-120"/>
+              </a:rPr>
+              <a:t>Data vs. metadata, for a bank's Account table</a:t>
+            </a:r>
+            <a:endParaRPr lang="en-US" sz="1800" dirty="0"/>
+          </a:p>
+        </p:txBody>
+      </p:sp>
+      <p:sp>
+        <p:nvSpPr>
+          <p:cNvPr id="6" name="Shape 4"/>
+          <p:cNvSpPr/>
+          <p:nvPr/>
+        </p:nvSpPr>
+        <p:spPr>
+          <a:xfrm>
+            <a:off x="640080" y="2606040"/>
+            <a:ext cx="5326380" cy="1417320"/>
+          </a:xfrm>
+          <a:prstGeom prst="roundRect">
+            <a:avLst>
+              <a:gd name="adj" fmla="val 5161"/>
+            </a:avLst>
+          </a:prstGeom>
+          <a:solidFill>
+            <a:srgbClr val="2FE6C4"/>
+          </a:solidFill>
+          <a:ln/>
+        </p:spPr>
+      </p:sp>
+      <p:sp>
+        <p:nvSpPr>
+          <p:cNvPr id="7" name="Text 5"/>
+          <p:cNvSpPr txBox="1"/>
+          <p:nvPr/>
+        </p:nvSpPr>
+        <p:spPr>
+          <a:xfrm>
+            <a:off x="822960" y="2734056"/>
+            <a:ext cx="4960620" cy="320040"/>
+          </a:xfrm>
+          <a:prstGeom prst="rect">
+            <a:avLst/>
+          </a:prstGeom>
+          <a:noFill/>
+          <a:ln/>
+        </p:spPr>
+        <p:txBody>
+          <a:bodyPr wrap="square" lIns="0" tIns="0" rIns="0" bIns="0" rtlCol="0" anchor="ctr"/>
+          <a:lstStyle/>
+          <a:p>
+            <a:pPr indent="0" marL="0">
+              <a:buNone/>
+            </a:pPr>
+            <a:r>
+              <a:rPr lang="en-US" sz="1800" b="1" dirty="0">
+                <a:solidFill>
+                  <a:srgbClr val="FFFFFF"/>
+                </a:solidFill>
+                <a:latin typeface="Calibri" pitchFamily="34" charset="0"/>
+                <a:ea typeface="Calibri" pitchFamily="34" charset="-122"/>
+                <a:cs typeface="Calibri" pitchFamily="34" charset="-120"/>
+              </a:rPr>
+              <a:t>Data</a:t>
+            </a:r>
+            <a:endParaRPr lang="en-US" sz="1800" dirty="0"/>
+          </a:p>
+        </p:txBody>
+      </p:sp>
+      <p:sp>
+        <p:nvSpPr>
+          <p:cNvPr id="8" name="Text 6"/>
+          <p:cNvSpPr txBox="1"/>
+          <p:nvPr/>
+        </p:nvSpPr>
+        <p:spPr>
+          <a:xfrm>
+            <a:off x="822960" y="3081528"/>
+            <a:ext cx="4960620" cy="850392"/>
+          </a:xfrm>
+          <a:prstGeom prst="rect">
+            <a:avLst/>
+          </a:prstGeom>
+          <a:noFill/>
+          <a:ln/>
+        </p:spPr>
+        <p:txBody>
+          <a:bodyPr wrap="square" lIns="0" tIns="0" rIns="0" bIns="0" rtlCol="0" anchor="t"/>
+          <a:lstStyle/>
+          <a:p>
+            <a:pPr indent="0" marL="0">
+              <a:buNone/>
+            </a:pPr>
+            <a:r>
+              <a:rPr lang="en-US" sz="1800" dirty="0">
+                <a:solidFill>
+                  <a:srgbClr val="FFFFFF"/>
+                </a:solidFill>
+                <a:latin typeface="Calibri" pitchFamily="34" charset="0"/>
+                <a:ea typeface="Calibri" pitchFamily="34" charset="-122"/>
+                <a:cs typeface="Calibri" pitchFamily="34" charset="-120"/>
+              </a:rPr>
+              <a:t>“SL21”, 4500000, “B003” — the actual stored values</a:t>
+            </a:r>
+            <a:endParaRPr lang="en-US" sz="1800" dirty="0"/>
+          </a:p>
+        </p:txBody>
+      </p:sp>
+      <p:sp>
+        <p:nvSpPr>
+          <p:cNvPr id="9" name="Shape 7"/>
+          <p:cNvSpPr/>
+          <p:nvPr/>
+        </p:nvSpPr>
+        <p:spPr>
+          <a:xfrm>
+            <a:off x="6195060" y="2606040"/>
+            <a:ext cx="5326380" cy="1417320"/>
+          </a:xfrm>
+          <a:prstGeom prst="roundRect">
+            <a:avLst>
+              <a:gd name="adj" fmla="val 5161"/>
+            </a:avLst>
+          </a:prstGeom>
+          <a:solidFill>
+            <a:srgbClr val="8B7FD9"/>
+          </a:solidFill>
+          <a:ln/>
+        </p:spPr>
+      </p:sp>
+      <p:sp>
+        <p:nvSpPr>
+          <p:cNvPr id="10" name="Text 8"/>
+          <p:cNvSpPr txBox="1"/>
+          <p:nvPr/>
+        </p:nvSpPr>
+        <p:spPr>
+          <a:xfrm>
+            <a:off x="6377940" y="2734056"/>
+            <a:ext cx="4960620" cy="320040"/>
+          </a:xfrm>
+          <a:prstGeom prst="rect">
+            <a:avLst/>
+          </a:prstGeom>
+          <a:noFill/>
+          <a:ln/>
+        </p:spPr>
+        <p:txBody>
+          <a:bodyPr wrap="square" lIns="0" tIns="0" rIns="0" bIns="0" rtlCol="0" anchor="ctr"/>
+          <a:lstStyle/>
+          <a:p>
+            <a:pPr indent="0" marL="0">
+              <a:buNone/>
+            </a:pPr>
+            <a:r>
+              <a:rPr lang="en-US" sz="1800" b="1" dirty="0">
+                <a:solidFill>
+                  <a:srgbClr val="FFFFFF"/>
+                </a:solidFill>
+                <a:latin typeface="Calibri" pitchFamily="34" charset="0"/>
+                <a:ea typeface="Calibri" pitchFamily="34" charset="-122"/>
+                <a:cs typeface="Calibri" pitchFamily="34" charset="-120"/>
+              </a:rPr>
+              <a:t>Metadata</a:t>
+            </a:r>
+            <a:endParaRPr lang="en-US" sz="1800" dirty="0"/>
+          </a:p>
+        </p:txBody>
+      </p:sp>
+      <p:sp>
+        <p:nvSpPr>
+          <p:cNvPr id="11" name="Text 9"/>
+          <p:cNvSpPr txBox="1"/>
+          <p:nvPr/>
+        </p:nvSpPr>
+        <p:spPr>
+          <a:xfrm>
+            <a:off x="6377940" y="3081528"/>
+            <a:ext cx="4960620" cy="850392"/>
+          </a:xfrm>
+          <a:prstGeom prst="rect">
+            <a:avLst/>
+          </a:prstGeom>
+          <a:noFill/>
+          <a:ln/>
+        </p:spPr>
+        <p:txBody>
+          <a:bodyPr wrap="square" lIns="0" tIns="0" rIns="0" bIns="0" rtlCol="0" anchor="t"/>
+          <a:lstStyle/>
+          <a:p>
+            <a:pPr indent="0" marL="0">
+              <a:buNone/>
+            </a:pPr>
+            <a:r>
+              <a:rPr lang="en-US" sz="1800" dirty="0">
+                <a:solidFill>
+                  <a:srgbClr val="FFFFFF"/>
+                </a:solidFill>
+                <a:latin typeface="Calibri" pitchFamily="34" charset="0"/>
+                <a:ea typeface="Calibri" pitchFamily="34" charset="-122"/>
+                <a:cs typeface="Calibri" pitchFamily="34" charset="-120"/>
+              </a:rPr>
+              <a:t>accountNo is CHAR(5) and a primary key; balance is DECIMAL and must be &gt;= 0; branchNo is a foreign key to Branch</a:t>
+            </a:r>
+            <a:endParaRPr lang="en-US" sz="1800" dirty="0"/>
+          </a:p>
+        </p:txBody>
+      </p:sp>
+      <p:sp>
+        <p:nvSpPr>
+          <p:cNvPr id="12" name="Shape 10"/>
+          <p:cNvSpPr/>
+          <p:nvPr/>
+        </p:nvSpPr>
+        <p:spPr>
+          <a:xfrm>
+            <a:off x="640080" y="4343400"/>
+            <a:ext cx="10881360" cy="1417320"/>
+          </a:xfrm>
+          <a:prstGeom prst="roundRect">
+            <a:avLst>
+              <a:gd name="adj" fmla="val 5161"/>
+            </a:avLst>
+          </a:prstGeom>
+          <a:solidFill>
+            <a:srgbClr val="F7F8F9"/>
+          </a:solidFill>
+          <a:ln w="12700">
+            <a:solidFill>
+              <a:srgbClr val="2FE6C4"/>
+            </a:solidFill>
+            <a:prstDash val="solid"/>
+          </a:ln>
+        </p:spPr>
+      </p:sp>
+      <p:sp>
+        <p:nvSpPr>
+          <p:cNvPr id="13" name="Text 11"/>
+          <p:cNvSpPr txBox="1"/>
+          <p:nvPr/>
+        </p:nvSpPr>
+        <p:spPr>
+          <a:xfrm>
+            <a:off x="868680" y="4480560"/>
+            <a:ext cx="10424160" cy="1143000"/>
+          </a:xfrm>
+          <a:prstGeom prst="rect">
+            <a:avLst/>
+          </a:prstGeom>
+          <a:noFill/>
+          <a:ln/>
+        </p:spPr>
+        <p:txBody>
+          <a:bodyPr wrap="square" lIns="0" tIns="0" rIns="0" bIns="0" rtlCol="0" anchor="t"/>
+          <a:lstStyle/>
+          <a:p>
+            <a:pPr indent="0" marL="0">
+              <a:buNone/>
+            </a:pPr>
+            <a:r>
+              <a:rPr lang="en-US" sz="1800" b="1" dirty="0">
+                <a:solidFill>
+                  <a:srgbClr val="1F2429"/>
+                </a:solidFill>
+                <a:latin typeface="Calibri" pitchFamily="34" charset="0"/>
+                <a:ea typeface="Calibri" pitchFamily="34" charset="-122"/>
+                <a:cs typeface="Calibri" pitchFamily="34" charset="-120"/>
+              </a:rPr>
+              <a:t>Metadata is why a DBMS can reject bad requests before running them.  </a:t>
+            </a:r>
+            <a:pPr indent="0" marL="0">
+              <a:buNone/>
+            </a:pPr>
+            <a:r>
+              <a:rPr lang="en-US" sz="1800" dirty="0">
+                <a:solidFill>
+                  <a:srgbClr val="1F2429"/>
+                </a:solidFill>
+                <a:latin typeface="Calibri" pitchFamily="34" charset="0"/>
+                <a:ea typeface="Calibri" pitchFamily="34" charset="-122"/>
+                <a:cs typeface="Calibri" pitchFamily="34" charset="-120"/>
+              </a:rPr>
+              <a:t>When an application tries to insert a letter into balance, the DBMS looks up balance's type in the catalog, sees it's numeric, and refuses the insert — general rule enforcement, not hand-coded per column.</a:t>
+            </a:r>
+            <a:endParaRPr lang="en-US" sz="1800" dirty="0"/>
+          </a:p>
+        </p:txBody>
+      </p:sp>
+    </p:spTree>
+  </p:cSld>
+  <p:clrMapOvr>
+    <a:masterClrMapping/>
+  </p:clrMapOvr>
+</p:sld>
+</file>
+
+<file path=ppt/slides/slide4.xml><?xml version="1.0" encoding="utf-8"?>
+<p:sld xmlns:a="http://schemas.openxmlformats.org/drawingml/2006/main" xmlns:r="http://schemas.openxmlformats.org/officeDocument/2006/relationships" xmlns:p="http://schemas.openxmlformats.org/presentationml/2006/main">
+  <p:cSld name="Slide 4">
+    <p:bg>
+      <p:bgPr>
+        <a:solidFill>
+          <a:srgbClr val="F7F8F9"/>
+        </a:solidFill>
+      </p:bgPr>
+    </p:bg>
+    <p:spTree>
+      <p:nvGrpSpPr>
+        <p:cNvPr id="1" name=""/>
+        <p:cNvGrpSpPr/>
+        <p:nvPr/>
+      </p:nvGrpSpPr>
+      <p:grpSpPr>
+        <a:xfrm>
+          <a:off x="0" y="0"/>
+          <a:ext cx="0" cy="0"/>
+          <a:chOff x="0" y="0"/>
+          <a:chExt cx="0" cy="0"/>
+        </a:xfrm>
+      </p:grpSpPr>
+      <p:sp>
+        <p:nvSpPr>
+          <p:cNvPr id="2" name="Text 0"/>
+          <p:cNvSpPr txBox="1"/>
+          <p:nvPr/>
+        </p:nvSpPr>
+        <p:spPr>
+          <a:xfrm>
+            <a:off x="548640" y="365760"/>
+            <a:ext cx="11064240" cy="731520"/>
+          </a:xfrm>
+          <a:prstGeom prst="rect">
+            <a:avLst/>
+          </a:prstGeom>
+          <a:noFill/>
+          <a:ln/>
+        </p:spPr>
+        <p:txBody>
+          <a:bodyPr wrap="square" lIns="0" tIns="0" rIns="0" bIns="0" rtlCol="0" anchor="ctr"/>
+          <a:lstStyle/>
+          <a:p>
+            <a:pPr indent="0" marL="0">
+              <a:buNone/>
+            </a:pPr>
+            <a:r>
+              <a:rPr lang="en-US" sz="2800" b="1" dirty="0">
+                <a:solidFill>
+                  <a:srgbClr val="1F2429"/>
+                </a:solidFill>
+                <a:latin typeface="Calibri" pitchFamily="34" charset="0"/>
+                <a:ea typeface="Calibri" pitchFamily="34" charset="-122"/>
+                <a:cs typeface="Calibri" pitchFamily="34" charset="-120"/>
+              </a:rPr>
+              <a:t>The Database Environment</a:t>
+            </a:r>
+            <a:endParaRPr lang="en-US" sz="2800" dirty="0"/>
+          </a:p>
+        </p:txBody>
+      </p:sp>
+      <p:sp>
+        <p:nvSpPr>
+          <p:cNvPr id="3" name="Text 1"/>
+          <p:cNvSpPr txBox="1"/>
+          <p:nvPr/>
+        </p:nvSpPr>
+        <p:spPr>
+          <a:xfrm>
+            <a:off x="9951415" y="6455664"/>
+            <a:ext cx="2011680" cy="292608"/>
+          </a:xfrm>
+          <a:prstGeom prst="rect">
+            <a:avLst/>
+          </a:prstGeom>
+          <a:noFill/>
+          <a:ln/>
+        </p:spPr>
+        <p:txBody>
+          <a:bodyPr wrap="square" lIns="0" tIns="0" rIns="0" bIns="0" rtlCol="0" anchor="ctr"/>
+          <a:lstStyle/>
+          <a:p>
+            <a:pPr algn="r" indent="0" marL="0">
+              <a:buNone/>
+            </a:pPr>
+            <a:r>
+              <a:rPr lang="en-US" sz="1200" u="sng" dirty="0">
+                <a:solidFill>
+                  <a:srgbClr val="8A939B"/>
+                </a:solidFill>
+                <a:latin typeface="Calibri" pitchFamily="34" charset="0"/>
+                <a:ea typeface="Calibri" pitchFamily="34" charset="-122"/>
+                <a:cs typeface="Calibri" pitchFamily="34" charset="-120"/>
+                <a:hlinkClick r:id="rId1" invalidUrl="" action="" tgtFrame="" tooltip="" history="1" highlightClick="0" endSnd="0">
+                  <a:extLst>
+                    <a:ext uri="{A12FA001-AC4F-418D-AE19-62706E023703}">
+                      <ahyp:hlinkClr xmlns:ahyp="http://schemas.microsoft.com/office/drawing/2018/hyperlinkcolor" val="tx"/>
+                    </a:ext>
+                  </a:extLst>
+                </a:hlinkClick>
+              </a:rPr>
+              <a:t>cuinotes.com</a:t>
+            </a:r>
+            <a:pPr algn="r" indent="0" marL="0">
+              <a:buNone/>
+            </a:pPr>
+            <a:r>
+              <a:rPr lang="en-US" sz="1200" dirty="0">
+                <a:solidFill>
+                  <a:srgbClr val="8A939B"/>
+                </a:solidFill>
+                <a:latin typeface="Calibri" pitchFamily="34" charset="0"/>
+                <a:ea typeface="Calibri" pitchFamily="34" charset="-122"/>
+                <a:cs typeface="Calibri" pitchFamily="34" charset="-120"/>
+              </a:rPr>
+              <a:t>  ·  5</a:t>
+            </a:r>
+            <a:endParaRPr lang="en-US" sz="1200" dirty="0"/>
+          </a:p>
+        </p:txBody>
+      </p:sp>
+      <p:sp>
+        <p:nvSpPr>
+          <p:cNvPr id="4" name="Text 2"/>
+          <p:cNvSpPr txBox="1"/>
+          <p:nvPr/>
+        </p:nvSpPr>
+        <p:spPr>
+          <a:xfrm>
+            <a:off x="640080" y="1143000"/>
+            <a:ext cx="10881360" cy="457200"/>
+          </a:xfrm>
+          <a:prstGeom prst="rect">
+            <a:avLst/>
+          </a:prstGeom>
+          <a:noFill/>
+          <a:ln/>
+        </p:spPr>
+        <p:txBody>
+          <a:bodyPr wrap="square" lIns="0" tIns="0" rIns="0" bIns="0" rtlCol="0" anchor="ctr"/>
+          <a:lstStyle/>
+          <a:p>
+            <a:pPr indent="0" marL="0">
+              <a:buNone/>
+            </a:pPr>
+            <a:r>
+              <a:rPr lang="en-US" sz="1800" dirty="0">
+                <a:solidFill>
+                  <a:srgbClr val="1F2429"/>
+                </a:solidFill>
+                <a:latin typeface="Calibri" pitchFamily="34" charset="0"/>
+                <a:ea typeface="Calibri" pitchFamily="34" charset="-122"/>
+                <a:cs typeface="Calibri" pitchFamily="34" charset="-120"/>
+              </a:rPr>
+              <a:t>A database is five interacting components, per Connolly &amp; Begg:</a:t>
+            </a:r>
+            <a:endParaRPr lang="en-US" sz="1800" dirty="0"/>
+          </a:p>
+        </p:txBody>
+      </p:sp>
+      <p:sp>
+        <p:nvSpPr>
+          <p:cNvPr id="5" name="Shape 3"/>
+          <p:cNvSpPr/>
+          <p:nvPr/>
+        </p:nvSpPr>
+        <p:spPr>
+          <a:xfrm>
+            <a:off x="1554480" y="1691640"/>
+            <a:ext cx="9052560" cy="786384"/>
+          </a:xfrm>
+          <a:prstGeom prst="roundRect">
+            <a:avLst>
+              <a:gd name="adj" fmla="val 9302"/>
+            </a:avLst>
+          </a:prstGeom>
+          <a:solidFill>
+            <a:srgbClr val="2FE6C4"/>
+          </a:solidFill>
+          <a:ln/>
+        </p:spPr>
+      </p:sp>
+      <p:sp>
+        <p:nvSpPr>
+          <p:cNvPr id="6" name="Text 4"/>
+          <p:cNvSpPr txBox="1"/>
+          <p:nvPr/>
+        </p:nvSpPr>
+        <p:spPr>
+          <a:xfrm>
+            <a:off x="1783080" y="1764792"/>
+            <a:ext cx="8595360" cy="274320"/>
+          </a:xfrm>
+          <a:prstGeom prst="rect">
+            <a:avLst/>
+          </a:prstGeom>
+          <a:noFill/>
+          <a:ln/>
+        </p:spPr>
+        <p:txBody>
+          <a:bodyPr wrap="square" lIns="0" tIns="0" rIns="0" bIns="0" rtlCol="0" anchor="ctr"/>
+          <a:lstStyle/>
+          <a:p>
+            <a:pPr indent="0" marL="0">
+              <a:buNone/>
+            </a:pPr>
+            <a:r>
+              <a:rPr lang="en-US" sz="1800" b="1" dirty="0">
+                <a:solidFill>
+                  <a:srgbClr val="FFFFFF"/>
+                </a:solidFill>
+                <a:latin typeface="Calibri" pitchFamily="34" charset="0"/>
+                <a:ea typeface="Calibri" pitchFamily="34" charset="-122"/>
+                <a:cs typeface="Calibri" pitchFamily="34" charset="-120"/>
+              </a:rPr>
+              <a:t>Hardware</a:t>
+            </a:r>
+            <a:endParaRPr lang="en-US" sz="1800" dirty="0"/>
+          </a:p>
+        </p:txBody>
+      </p:sp>
+      <p:sp>
+        <p:nvSpPr>
+          <p:cNvPr id="7" name="Text 5"/>
+          <p:cNvSpPr txBox="1"/>
+          <p:nvPr/>
+        </p:nvSpPr>
+        <p:spPr>
+          <a:xfrm>
+            <a:off x="1783080" y="2020824"/>
+            <a:ext cx="8595360" cy="402336"/>
+          </a:xfrm>
+          <a:prstGeom prst="rect">
+            <a:avLst/>
+          </a:prstGeom>
+          <a:noFill/>
+          <a:ln/>
+        </p:spPr>
+        <p:txBody>
+          <a:bodyPr wrap="square" lIns="0" tIns="0" rIns="0" bIns="0" rtlCol="0" anchor="t"/>
+          <a:lstStyle/>
+          <a:p>
+            <a:pPr indent="0" marL="0">
+              <a:buNone/>
+            </a:pPr>
+            <a:r>
+              <a:rPr lang="en-US" sz="1800" dirty="0">
+                <a:solidFill>
+                  <a:srgbClr val="FFFFFF"/>
+                </a:solidFill>
+                <a:latin typeface="Calibri" pitchFamily="34" charset="0"/>
+                <a:ea typeface="Calibri" pitchFamily="34" charset="-122"/>
+                <a:cs typeface="Calibri" pitchFamily="34" charset="-120"/>
+              </a:rPr>
+              <a:t>Servers, storage devices, network — where the bytes physically live</a:t>
+            </a:r>
+            <a:endParaRPr lang="en-US" sz="1800" dirty="0"/>
+          </a:p>
+        </p:txBody>
+      </p:sp>
+      <p:sp>
+        <p:nvSpPr>
+          <p:cNvPr id="8" name="Shape 6"/>
+          <p:cNvSpPr/>
+          <p:nvPr/>
+        </p:nvSpPr>
+        <p:spPr>
+          <a:xfrm rot="5400000">
+            <a:off x="6007608" y="2484882"/>
+            <a:ext cx="146304" cy="123444"/>
+          </a:xfrm>
+          <a:prstGeom prst="rightArrow">
+            <a:avLst/>
+          </a:prstGeom>
+          <a:solidFill>
+            <a:srgbClr val="8A939B"/>
+          </a:solidFill>
+          <a:ln/>
+        </p:spPr>
+      </p:sp>
+      <p:sp>
+        <p:nvSpPr>
+          <p:cNvPr id="9" name="Shape 7"/>
+          <p:cNvSpPr/>
+          <p:nvPr/>
+        </p:nvSpPr>
+        <p:spPr>
+          <a:xfrm>
+            <a:off x="1554480" y="2615184"/>
+            <a:ext cx="9052560" cy="786384"/>
+          </a:xfrm>
+          <a:prstGeom prst="roundRect">
+            <a:avLst>
+              <a:gd name="adj" fmla="val 9302"/>
+            </a:avLst>
+          </a:prstGeom>
+          <a:solidFill>
+            <a:srgbClr val="8B7FD9"/>
+          </a:solidFill>
+          <a:ln/>
+        </p:spPr>
+      </p:sp>
+      <p:sp>
+        <p:nvSpPr>
+          <p:cNvPr id="10" name="Text 8"/>
+          <p:cNvSpPr txBox="1"/>
+          <p:nvPr/>
+        </p:nvSpPr>
+        <p:spPr>
+          <a:xfrm>
+            <a:off x="1783080" y="2688336"/>
+            <a:ext cx="8595360" cy="274320"/>
+          </a:xfrm>
+          <a:prstGeom prst="rect">
+            <a:avLst/>
+          </a:prstGeom>
+          <a:noFill/>
+          <a:ln/>
+        </p:spPr>
+        <p:txBody>
+          <a:bodyPr wrap="square" lIns="0" tIns="0" rIns="0" bIns="0" rtlCol="0" anchor="ctr"/>
+          <a:lstStyle/>
+          <a:p>
+            <a:pPr indent="0" marL="0">
+              <a:buNone/>
+            </a:pPr>
+            <a:r>
+              <a:rPr lang="en-US" sz="1800" b="1" dirty="0">
+                <a:solidFill>
+                  <a:srgbClr val="FFFFFF"/>
+                </a:solidFill>
+                <a:latin typeface="Calibri" pitchFamily="34" charset="0"/>
+                <a:ea typeface="Calibri" pitchFamily="34" charset="-122"/>
+                <a:cs typeface="Calibri" pitchFamily="34" charset="-120"/>
+              </a:rPr>
+              <a:t>Software</a:t>
+            </a:r>
+            <a:endParaRPr lang="en-US" sz="1800" dirty="0"/>
+          </a:p>
+        </p:txBody>
+      </p:sp>
+      <p:sp>
+        <p:nvSpPr>
+          <p:cNvPr id="11" name="Text 9"/>
+          <p:cNvSpPr txBox="1"/>
+          <p:nvPr/>
+        </p:nvSpPr>
+        <p:spPr>
+          <a:xfrm>
+            <a:off x="1783080" y="2944368"/>
+            <a:ext cx="8595360" cy="402336"/>
+          </a:xfrm>
+          <a:prstGeom prst="rect">
+            <a:avLst/>
+          </a:prstGeom>
+          <a:noFill/>
+          <a:ln/>
+        </p:spPr>
+        <p:txBody>
+          <a:bodyPr wrap="square" lIns="0" tIns="0" rIns="0" bIns="0" rtlCol="0" anchor="t"/>
+          <a:lstStyle/>
+          <a:p>
+            <a:pPr indent="0" marL="0">
+              <a:buNone/>
+            </a:pPr>
+            <a:r>
+              <a:rPr lang="en-US" sz="1800" dirty="0">
+                <a:solidFill>
+                  <a:srgbClr val="FFFFFF"/>
+                </a:solidFill>
+                <a:latin typeface="Calibri" pitchFamily="34" charset="0"/>
+                <a:ea typeface="Calibri" pitchFamily="34" charset="-122"/>
+                <a:cs typeface="Calibri" pitchFamily="34" charset="-120"/>
+              </a:rPr>
+              <a:t>The DBMS itself, the operating system, and application programs</a:t>
+            </a:r>
+            <a:endParaRPr lang="en-US" sz="1800" dirty="0"/>
+          </a:p>
+        </p:txBody>
+      </p:sp>
+      <p:sp>
+        <p:nvSpPr>
+          <p:cNvPr id="12" name="Shape 10"/>
+          <p:cNvSpPr/>
+          <p:nvPr/>
+        </p:nvSpPr>
+        <p:spPr>
+          <a:xfrm rot="5400000">
+            <a:off x="6007608" y="3408426"/>
+            <a:ext cx="146304" cy="123444"/>
+          </a:xfrm>
+          <a:prstGeom prst="rightArrow">
+            <a:avLst/>
+          </a:prstGeom>
+          <a:solidFill>
+            <a:srgbClr val="8A939B"/>
+          </a:solidFill>
+          <a:ln/>
+        </p:spPr>
+      </p:sp>
+      <p:sp>
+        <p:nvSpPr>
+          <p:cNvPr id="13" name="Shape 11"/>
+          <p:cNvSpPr/>
+          <p:nvPr/>
+        </p:nvSpPr>
+        <p:spPr>
+          <a:xfrm>
+            <a:off x="1554480" y="3538728"/>
+            <a:ext cx="9052560" cy="786384"/>
+          </a:xfrm>
+          <a:prstGeom prst="roundRect">
+            <a:avLst>
+              <a:gd name="adj" fmla="val 9302"/>
+            </a:avLst>
+          </a:prstGeom>
+          <a:solidFill>
+            <a:srgbClr val="E8A33D"/>
+          </a:solidFill>
+          <a:ln/>
+        </p:spPr>
+      </p:sp>
+      <p:sp>
+        <p:nvSpPr>
+          <p:cNvPr id="14" name="Text 12"/>
+          <p:cNvSpPr txBox="1"/>
+          <p:nvPr/>
+        </p:nvSpPr>
+        <p:spPr>
+          <a:xfrm>
+            <a:off x="1783080" y="3611880"/>
+            <a:ext cx="8595360" cy="274320"/>
+          </a:xfrm>
+          <a:prstGeom prst="rect">
+            <a:avLst/>
+          </a:prstGeom>
+          <a:noFill/>
+          <a:ln/>
+        </p:spPr>
+        <p:txBody>
+          <a:bodyPr wrap="square" lIns="0" tIns="0" rIns="0" bIns="0" rtlCol="0" anchor="ctr"/>
+          <a:lstStyle/>
+          <a:p>
+            <a:pPr indent="0" marL="0">
+              <a:buNone/>
+            </a:pPr>
+            <a:r>
+              <a:rPr lang="en-US" sz="1800" b="1" dirty="0">
+                <a:solidFill>
+                  <a:srgbClr val="FFFFFF"/>
+                </a:solidFill>
+                <a:latin typeface="Calibri" pitchFamily="34" charset="0"/>
+                <a:ea typeface="Calibri" pitchFamily="34" charset="-122"/>
+                <a:cs typeface="Calibri" pitchFamily="34" charset="-120"/>
+              </a:rPr>
+              <a:t>Data</a:t>
+            </a:r>
+            <a:endParaRPr lang="en-US" sz="1800" dirty="0"/>
+          </a:p>
+        </p:txBody>
+      </p:sp>
+      <p:sp>
+        <p:nvSpPr>
+          <p:cNvPr id="15" name="Text 13"/>
+          <p:cNvSpPr txBox="1"/>
+          <p:nvPr/>
+        </p:nvSpPr>
+        <p:spPr>
+          <a:xfrm>
+            <a:off x="1783080" y="3867912"/>
+            <a:ext cx="8595360" cy="402336"/>
+          </a:xfrm>
+          <a:prstGeom prst="rect">
+            <a:avLst/>
+          </a:prstGeom>
+          <a:noFill/>
+          <a:ln/>
+        </p:spPr>
+        <p:txBody>
+          <a:bodyPr wrap="square" lIns="0" tIns="0" rIns="0" bIns="0" rtlCol="0" anchor="t"/>
+          <a:lstStyle/>
+          <a:p>
+            <a:pPr indent="0" marL="0">
+              <a:buNone/>
+            </a:pPr>
+            <a:r>
+              <a:rPr lang="en-US" sz="1800" dirty="0">
+                <a:solidFill>
+                  <a:srgbClr val="FFFFFF"/>
+                </a:solidFill>
+                <a:latin typeface="Calibri" pitchFamily="34" charset="0"/>
+                <a:ea typeface="Calibri" pitchFamily="34" charset="-122"/>
+                <a:cs typeface="Calibri" pitchFamily="34" charset="-120"/>
+              </a:rPr>
+              <a:t>The facts being stored, plus the metadata describing them</a:t>
+            </a:r>
+            <a:endParaRPr lang="en-US" sz="1800" dirty="0"/>
+          </a:p>
+        </p:txBody>
+      </p:sp>
+      <p:sp>
+        <p:nvSpPr>
+          <p:cNvPr id="16" name="Shape 14"/>
+          <p:cNvSpPr/>
+          <p:nvPr/>
+        </p:nvSpPr>
+        <p:spPr>
+          <a:xfrm rot="5400000">
+            <a:off x="6007608" y="4331970"/>
+            <a:ext cx="146304" cy="123444"/>
+          </a:xfrm>
+          <a:prstGeom prst="rightArrow">
+            <a:avLst/>
+          </a:prstGeom>
+          <a:solidFill>
+            <a:srgbClr val="8A939B"/>
+          </a:solidFill>
+          <a:ln/>
+        </p:spPr>
+      </p:sp>
+      <p:sp>
+        <p:nvSpPr>
+          <p:cNvPr id="17" name="Shape 15"/>
+          <p:cNvSpPr/>
+          <p:nvPr/>
+        </p:nvSpPr>
+        <p:spPr>
+          <a:xfrm>
+            <a:off x="1554480" y="4462272"/>
+            <a:ext cx="9052560" cy="786384"/>
+          </a:xfrm>
+          <a:prstGeom prst="roundRect">
+            <a:avLst>
+              <a:gd name="adj" fmla="val 9302"/>
+            </a:avLst>
+          </a:prstGeom>
+          <a:solidFill>
+            <a:srgbClr val="2FE6C4"/>
+          </a:solidFill>
+          <a:ln/>
+        </p:spPr>
+      </p:sp>
+      <p:sp>
+        <p:nvSpPr>
+          <p:cNvPr id="18" name="Text 16"/>
+          <p:cNvSpPr txBox="1"/>
+          <p:nvPr/>
+        </p:nvSpPr>
+        <p:spPr>
+          <a:xfrm>
+            <a:off x="1783080" y="4535424"/>
+            <a:ext cx="8595360" cy="274320"/>
+          </a:xfrm>
+          <a:prstGeom prst="rect">
+            <a:avLst/>
+          </a:prstGeom>
+          <a:noFill/>
+          <a:ln/>
+        </p:spPr>
+        <p:txBody>
+          <a:bodyPr wrap="square" lIns="0" tIns="0" rIns="0" bIns="0" rtlCol="0" anchor="ctr"/>
+          <a:lstStyle/>
+          <a:p>
+            <a:pPr indent="0" marL="0">
+              <a:buNone/>
+            </a:pPr>
+            <a:r>
+              <a:rPr lang="en-US" sz="1800" b="1" dirty="0">
+                <a:solidFill>
+                  <a:srgbClr val="FFFFFF"/>
+                </a:solidFill>
+                <a:latin typeface="Calibri" pitchFamily="34" charset="0"/>
+                <a:ea typeface="Calibri" pitchFamily="34" charset="-122"/>
+                <a:cs typeface="Calibri" pitchFamily="34" charset="-120"/>
+              </a:rPr>
+              <a:t>Procedures</a:t>
+            </a:r>
+            <a:endParaRPr lang="en-US" sz="1800" dirty="0"/>
+          </a:p>
+        </p:txBody>
+      </p:sp>
+      <p:sp>
+        <p:nvSpPr>
+          <p:cNvPr id="19" name="Text 17"/>
+          <p:cNvSpPr txBox="1"/>
+          <p:nvPr/>
+        </p:nvSpPr>
+        <p:spPr>
+          <a:xfrm>
+            <a:off x="1783080" y="4791456"/>
+            <a:ext cx="8595360" cy="402336"/>
+          </a:xfrm>
+          <a:prstGeom prst="rect">
+            <a:avLst/>
+          </a:prstGeom>
+          <a:noFill/>
+          <a:ln/>
+        </p:spPr>
+        <p:txBody>
+          <a:bodyPr wrap="square" lIns="0" tIns="0" rIns="0" bIns="0" rtlCol="0" anchor="t"/>
+          <a:lstStyle/>
+          <a:p>
+            <a:pPr indent="0" marL="0">
+              <a:buNone/>
+            </a:pPr>
+            <a:r>
+              <a:rPr lang="en-US" sz="1800" dirty="0">
+                <a:solidFill>
+                  <a:srgbClr val="FFFFFF"/>
+                </a:solidFill>
+                <a:latin typeface="Calibri" pitchFamily="34" charset="0"/>
+                <a:ea typeface="Calibri" pitchFamily="34" charset="-122"/>
+                <a:cs typeface="Calibri" pitchFamily="34" charset="-120"/>
+              </a:rPr>
+              <a:t>Documented instructions — backup schedules, login steps</a:t>
+            </a:r>
+            <a:endParaRPr lang="en-US" sz="1800" dirty="0"/>
+          </a:p>
+        </p:txBody>
+      </p:sp>
+      <p:sp>
+        <p:nvSpPr>
+          <p:cNvPr id="20" name="Shape 18"/>
+          <p:cNvSpPr/>
+          <p:nvPr/>
+        </p:nvSpPr>
+        <p:spPr>
+          <a:xfrm rot="5400000">
+            <a:off x="6007608" y="5255514"/>
+            <a:ext cx="146304" cy="123444"/>
+          </a:xfrm>
+          <a:prstGeom prst="rightArrow">
+            <a:avLst/>
+          </a:prstGeom>
+          <a:solidFill>
+            <a:srgbClr val="8A939B"/>
+          </a:solidFill>
+          <a:ln/>
+        </p:spPr>
+      </p:sp>
+      <p:sp>
+        <p:nvSpPr>
+          <p:cNvPr id="21" name="Shape 19"/>
+          <p:cNvSpPr/>
+          <p:nvPr/>
+        </p:nvSpPr>
+        <p:spPr>
+          <a:xfrm>
+            <a:off x="1554480" y="5385816"/>
+            <a:ext cx="9052560" cy="786384"/>
+          </a:xfrm>
+          <a:prstGeom prst="roundRect">
+            <a:avLst>
+              <a:gd name="adj" fmla="val 9302"/>
+            </a:avLst>
+          </a:prstGeom>
+          <a:solidFill>
+            <a:srgbClr val="8B7FD9"/>
+          </a:solidFill>
+          <a:ln/>
+        </p:spPr>
+      </p:sp>
+      <p:sp>
+        <p:nvSpPr>
+          <p:cNvPr id="22" name="Text 20"/>
+          <p:cNvSpPr txBox="1"/>
+          <p:nvPr/>
+        </p:nvSpPr>
+        <p:spPr>
+          <a:xfrm>
+            <a:off x="1783080" y="5458968"/>
+            <a:ext cx="8595360" cy="274320"/>
+          </a:xfrm>
+          <a:prstGeom prst="rect">
+            <a:avLst/>
+          </a:prstGeom>
+          <a:noFill/>
+          <a:ln/>
+        </p:spPr>
+        <p:txBody>
+          <a:bodyPr wrap="square" lIns="0" tIns="0" rIns="0" bIns="0" rtlCol="0" anchor="ctr"/>
+          <a:lstStyle/>
+          <a:p>
+            <a:pPr indent="0" marL="0">
+              <a:buNone/>
+            </a:pPr>
+            <a:r>
+              <a:rPr lang="en-US" sz="1800" b="1" dirty="0">
+                <a:solidFill>
+                  <a:srgbClr val="FFFFFF"/>
+                </a:solidFill>
+                <a:latin typeface="Calibri" pitchFamily="34" charset="0"/>
+                <a:ea typeface="Calibri" pitchFamily="34" charset="-122"/>
+                <a:cs typeface="Calibri" pitchFamily="34" charset="-120"/>
+              </a:rPr>
+              <a:t>People</a:t>
+            </a:r>
+            <a:endParaRPr lang="en-US" sz="1800" dirty="0"/>
+          </a:p>
+        </p:txBody>
+      </p:sp>
+      <p:sp>
+        <p:nvSpPr>
+          <p:cNvPr id="23" name="Text 21"/>
+          <p:cNvSpPr txBox="1"/>
+          <p:nvPr/>
+        </p:nvSpPr>
+        <p:spPr>
+          <a:xfrm>
+            <a:off x="1783080" y="5715000"/>
+            <a:ext cx="8595360" cy="402336"/>
+          </a:xfrm>
+          <a:prstGeom prst="rect">
+            <a:avLst/>
+          </a:prstGeom>
+          <a:noFill/>
+          <a:ln/>
+        </p:spPr>
+        <p:txBody>
+          <a:bodyPr wrap="square" lIns="0" tIns="0" rIns="0" bIns="0" rtlCol="0" anchor="t"/>
+          <a:lstStyle/>
+          <a:p>
+            <a:pPr indent="0" marL="0">
+              <a:buNone/>
+            </a:pPr>
+            <a:r>
+              <a:rPr lang="en-US" sz="1800" dirty="0">
+                <a:solidFill>
+                  <a:srgbClr val="FFFFFF"/>
+                </a:solidFill>
+                <a:latin typeface="Calibri" pitchFamily="34" charset="0"/>
+                <a:ea typeface="Calibri" pitchFamily="34" charset="-122"/>
+                <a:cs typeface="Calibri" pitchFamily="34" charset="-120"/>
+              </a:rPr>
+              <a:t>Everyone who designs, administers, develops for, or uses the database</a:t>
+            </a:r>
+            <a:endParaRPr lang="en-US" sz="1800" dirty="0"/>
+          </a:p>
+        </p:txBody>
+      </p:sp>
+    </p:spTree>
+  </p:cSld>
+  <p:clrMapOvr>
+    <a:masterClrMapping/>
+  </p:clrMapOvr>
+</p:sld>
+</file>
+
+<file path=ppt/slides/slide5.xml><?xml version="1.0" encoding="utf-8"?>
+<p:sld xmlns:a="http://schemas.openxmlformats.org/drawingml/2006/main" xmlns:r="http://schemas.openxmlformats.org/officeDocument/2006/relationships" xmlns:p="http://schemas.openxmlformats.org/presentationml/2006/main">
+  <p:cSld name="Slide 5">
+    <p:bg>
+      <p:bgPr>
+        <a:solidFill>
+          <a:srgbClr val="F7F8F9"/>
+        </a:solidFill>
+      </p:bgPr>
+    </p:bg>
+    <p:spTree>
+      <p:nvGrpSpPr>
+        <p:cNvPr id="1" name=""/>
+        <p:cNvGrpSpPr/>
+        <p:nvPr/>
+      </p:nvGrpSpPr>
+      <p:grpSpPr>
+        <a:xfrm>
+          <a:off x="0" y="0"/>
+          <a:ext cx="0" cy="0"/>
+          <a:chOff x="0" y="0"/>
+          <a:chExt cx="0" cy="0"/>
+        </a:xfrm>
+      </p:grpSpPr>
+      <p:sp>
+        <p:nvSpPr>
+          <p:cNvPr id="2" name="Text 0"/>
+          <p:cNvSpPr txBox="1"/>
+          <p:nvPr/>
+        </p:nvSpPr>
+        <p:spPr>
+          <a:xfrm>
+            <a:off x="548640" y="365760"/>
+            <a:ext cx="11064240" cy="731520"/>
+          </a:xfrm>
+          <a:prstGeom prst="rect">
+            <a:avLst/>
+          </a:prstGeom>
+          <a:noFill/>
+          <a:ln/>
+        </p:spPr>
+        <p:txBody>
+          <a:bodyPr wrap="square" lIns="0" tIns="0" rIns="0" bIns="0" rtlCol="0" anchor="ctr"/>
+          <a:lstStyle/>
+          <a:p>
+            <a:pPr indent="0" marL="0">
+              <a:buNone/>
+            </a:pPr>
+            <a:r>
+              <a:rPr lang="en-US" sz="2800" b="1" dirty="0">
+                <a:solidFill>
+                  <a:srgbClr val="1F2429"/>
+                </a:solidFill>
+                <a:latin typeface="Calibri" pitchFamily="34" charset="0"/>
+                <a:ea typeface="Calibri" pitchFamily="34" charset="-122"/>
+                <a:cs typeface="Calibri" pitchFamily="34" charset="-120"/>
+              </a:rPr>
+              <a:t>Roles Around a Database</a:t>
+            </a:r>
+            <a:endParaRPr lang="en-US" sz="2800" dirty="0"/>
+          </a:p>
+        </p:txBody>
+      </p:sp>
+      <p:sp>
+        <p:nvSpPr>
+          <p:cNvPr id="3" name="Text 1"/>
+          <p:cNvSpPr txBox="1"/>
+          <p:nvPr/>
+        </p:nvSpPr>
+        <p:spPr>
+          <a:xfrm>
+            <a:off x="9951415" y="6455664"/>
+            <a:ext cx="2011680" cy="292608"/>
+          </a:xfrm>
+          <a:prstGeom prst="rect">
+            <a:avLst/>
+          </a:prstGeom>
+          <a:noFill/>
+          <a:ln/>
+        </p:spPr>
+        <p:txBody>
+          <a:bodyPr wrap="square" lIns="0" tIns="0" rIns="0" bIns="0" rtlCol="0" anchor="ctr"/>
+          <a:lstStyle/>
+          <a:p>
+            <a:pPr algn="r" indent="0" marL="0">
+              <a:buNone/>
+            </a:pPr>
+            <a:r>
+              <a:rPr lang="en-US" sz="1200" u="sng" dirty="0">
+                <a:solidFill>
+                  <a:srgbClr val="8A939B"/>
+                </a:solidFill>
+                <a:latin typeface="Calibri" pitchFamily="34" charset="0"/>
+                <a:ea typeface="Calibri" pitchFamily="34" charset="-122"/>
+                <a:cs typeface="Calibri" pitchFamily="34" charset="-120"/>
+                <a:hlinkClick r:id="rId1" invalidUrl="" action="" tgtFrame="" tooltip="" history="1" highlightClick="0" endSnd="0">
+                  <a:extLst>
+                    <a:ext uri="{A12FA001-AC4F-418D-AE19-62706E023703}">
+                      <ahyp:hlinkClr xmlns:ahyp="http://schemas.microsoft.com/office/drawing/2018/hyperlinkcolor" val="tx"/>
+                    </a:ext>
+                  </a:extLst>
+                </a:hlinkClick>
+              </a:rPr>
+              <a:t>cuinotes.com</a:t>
+            </a:r>
+            <a:pPr algn="r" indent="0" marL="0">
+              <a:buNone/>
+            </a:pPr>
+            <a:r>
+              <a:rPr lang="en-US" sz="1200" dirty="0">
+                <a:solidFill>
+                  <a:srgbClr val="8A939B"/>
+                </a:solidFill>
+                <a:latin typeface="Calibri" pitchFamily="34" charset="0"/>
+                <a:ea typeface="Calibri" pitchFamily="34" charset="-122"/>
+                <a:cs typeface="Calibri" pitchFamily="34" charset="-120"/>
+              </a:rPr>
+              <a:t>  ·  8</a:t>
+            </a:r>
+            <a:endParaRPr lang="en-US" sz="1200" dirty="0"/>
+          </a:p>
+        </p:txBody>
+      </p:sp>
+      <p:graphicFrame>
+        <p:nvGraphicFramePr>
+          <p:cNvPr id="6" name="Table 0"/>
+          <p:cNvGraphicFramePr>
+            <a:graphicFrameLocks noGrp="1"/>
+          </p:cNvGraphicFramePr>
+          <p:nvPr>
+            <p:extLst>
+              <p:ext uri="{D42A27DB-BD31-4B8C-83A1-F6EECF244321}">
+                <p14:modId xmlns:p14="http://schemas.microsoft.com/office/powerpoint/2010/main" val="1579011935"/>
+              </p:ext>
+            </p:extLst>
+          </p:nvPr>
+        </p:nvGraphicFramePr>
+        <p:xfrm>
+          <a:off x="640080" y="1188720"/>
+          <a:ext cx="10881360" cy="2468880"/>
+        </p:xfrm>
+        <a:graphic>
+          <a:graphicData uri="http://schemas.openxmlformats.org/drawingml/2006/table">
+            <a:tbl>
+              <a:tblPr/>
+              <a:tblGrid>
+                <a:gridCol w="2743200"/>
+                <a:gridCol w="4480560"/>
+                <a:gridCol w="3657600"/>
+              </a:tblGrid>
+              <a:tr h="493776">
+                <a:tc>
+                  <a:txBody>
+                    <a:bodyPr/>
+                    <a:lstStyle/>
+                    <a:p>
+                      <a:pPr indent="0" marL="0">
+                        <a:buNone/>
+                      </a:pPr>
+                      <a:r>
+                        <a:rPr lang="en-US" sz="1400" b="1" dirty="0">
+                          <a:solidFill>
+                            <a:srgbClr val="FFFFFF"/>
+                          </a:solidFill>
+                          <a:latin typeface="Calibri" pitchFamily="34" charset="0"/>
+                          <a:ea typeface="Calibri" pitchFamily="34" charset="-122"/>
+                          <a:cs typeface="Calibri" pitchFamily="34" charset="-120"/>
+                        </a:rPr>
+                        <a:t>Role</a:t>
+                      </a:r>
+                      <a:endParaRPr lang="en-US" sz="1400" dirty="0">
+                        <a:latin typeface="Calibri" charset="0"/>
+                        <a:ea typeface="Calibri" charset="0"/>
+                        <a:cs typeface="Calibri" charset="0"/>
+                      </a:endParaRPr>
+                    </a:p>
+                  </a:txBody>
+                  <a:tcPr marL="91440" marR="91440" marT="45720" marB="45720" anchor="ctr">
+                    <a:lnL w="9525" cap="flat" cmpd="sng" algn="ctr">
+                      <a:solidFill>
+                        <a:srgbClr val="E1E4E8"/>
+                      </a:solidFill>
+                      <a:prstDash val="solid"/>
+                      <a:round/>
+                      <a:headEnd type="none" w="med" len="med"/>
+                      <a:tailEnd type="none" w="med" len="med"/>
+                    </a:lnL>
+                    <a:lnR w="9525" cap="flat" cmpd="sng" algn="ctr">
+                      <a:solidFill>
+                        <a:srgbClr val="E1E4E8"/>
+                      </a:solidFill>
+                      <a:prstDash val="solid"/>
+                      <a:round/>
+                      <a:headEnd type="none" w="med" len="med"/>
+                      <a:tailEnd type="none" w="med" len="med"/>
+                    </a:lnR>
+                    <a:lnT w="9525" cap="flat" cmpd="sng" algn="ctr">
+                      <a:solidFill>
+                        <a:srgbClr val="E1E4E8"/>
+                      </a:solidFill>
+                      <a:prstDash val="solid"/>
+                      <a:round/>
+                      <a:headEnd type="none" w="med" len="med"/>
+                      <a:tailEnd type="none" w="med" len="med"/>
+                    </a:lnT>
+                    <a:lnB w="9525" cap="flat" cmpd="sng" algn="ctr">
+                      <a:solidFill>
+                        <a:srgbClr val="E1E4E8"/>
+                      </a:solidFill>
+                      <a:prstDash val="solid"/>
+                      <a:round/>
+                      <a:headEnd type="none" w="med" len="med"/>
+                      <a:tailEnd type="none" w="med" len="med"/>
+                    </a:lnB>
+                    <a:solidFill>
+                      <a:srgbClr val="1F2429"/>
+                    </a:solidFill>
+                  </a:tcPr>
+                </a:tc>
+                <a:tc>
+                  <a:txBody>
+                    <a:bodyPr/>
+                    <a:lstStyle/>
+                    <a:p>
+                      <a:pPr indent="0" marL="0">
+                        <a:buNone/>
+                      </a:pPr>
+                      <a:r>
+                        <a:rPr lang="en-US" sz="1400" b="1" dirty="0">
+                          <a:solidFill>
+                            <a:srgbClr val="FFFFFF"/>
+                          </a:solidFill>
+                          <a:latin typeface="Calibri" pitchFamily="34" charset="0"/>
+                          <a:ea typeface="Calibri" pitchFamily="34" charset="-122"/>
+                          <a:cs typeface="Calibri" pitchFamily="34" charset="-120"/>
+                        </a:rPr>
+                        <a:t>Primary concern</a:t>
+                      </a:r>
+                      <a:endParaRPr lang="en-US" sz="1400" dirty="0">
+                        <a:latin typeface="Calibri" charset="0"/>
+                        <a:ea typeface="Calibri" charset="0"/>
+                        <a:cs typeface="Calibri" charset="0"/>
+                      </a:endParaRPr>
+                    </a:p>
+                  </a:txBody>
+                  <a:tcPr marL="91440" marR="91440" marT="45720" marB="45720" anchor="ctr">
+                    <a:lnL w="9525" cap="flat" cmpd="sng" algn="ctr">
+                      <a:solidFill>
+                        <a:srgbClr val="E1E4E8"/>
+                      </a:solidFill>
+                      <a:prstDash val="solid"/>
+                      <a:round/>
+                      <a:headEnd type="none" w="med" len="med"/>
+                      <a:tailEnd type="none" w="med" len="med"/>
+                    </a:lnL>
+                    <a:lnR w="9525" cap="flat" cmpd="sng" algn="ctr">
+                      <a:solidFill>
+                        <a:srgbClr val="E1E4E8"/>
+                      </a:solidFill>
+                      <a:prstDash val="solid"/>
+                      <a:round/>
+                      <a:headEnd type="none" w="med" len="med"/>
+                      <a:tailEnd type="none" w="med" len="med"/>
+                    </a:lnR>
+                    <a:lnT w="9525" cap="flat" cmpd="sng" algn="ctr">
+                      <a:solidFill>
+                        <a:srgbClr val="E1E4E8"/>
+                      </a:solidFill>
+                      <a:prstDash val="solid"/>
+                      <a:round/>
+                      <a:headEnd type="none" w="med" len="med"/>
+                      <a:tailEnd type="none" w="med" len="med"/>
+                    </a:lnT>
+                    <a:lnB w="9525" cap="flat" cmpd="sng" algn="ctr">
+                      <a:solidFill>
+                        <a:srgbClr val="E1E4E8"/>
+                      </a:solidFill>
+                      <a:prstDash val="solid"/>
+                      <a:round/>
+                      <a:headEnd type="none" w="med" len="med"/>
+                      <a:tailEnd type="none" w="med" len="med"/>
+                    </a:lnB>
+                    <a:solidFill>
+                      <a:srgbClr val="1F2429"/>
+                    </a:solidFill>
+                  </a:tcPr>
+                </a:tc>
+                <a:tc>
+                  <a:txBody>
+                    <a:bodyPr/>
+                    <a:lstStyle/>
+                    <a:p>
+                      <a:pPr indent="0" marL="0">
+                        <a:buNone/>
+                      </a:pPr>
+                      <a:r>
+                        <a:rPr lang="en-US" sz="1400" b="1" dirty="0">
+                          <a:solidFill>
+                            <a:srgbClr val="FFFFFF"/>
+                          </a:solidFill>
+                          <a:latin typeface="Calibri" pitchFamily="34" charset="0"/>
+                          <a:ea typeface="Calibri" pitchFamily="34" charset="-122"/>
+                          <a:cs typeface="Calibri" pitchFamily="34" charset="-120"/>
+                        </a:rPr>
+                        <a:t>Example task at a bank</a:t>
+                      </a:r>
+                      <a:endParaRPr lang="en-US" sz="1400" dirty="0">
+                        <a:latin typeface="Calibri" charset="0"/>
+                        <a:ea typeface="Calibri" charset="0"/>
+                        <a:cs typeface="Calibri" charset="0"/>
+                      </a:endParaRPr>
+                    </a:p>
+                  </a:txBody>
+                  <a:tcPr marL="91440" marR="91440" marT="45720" marB="45720" anchor="ctr">
+                    <a:lnL w="9525" cap="flat" cmpd="sng" algn="ctr">
+                      <a:solidFill>
+                        <a:srgbClr val="E1E4E8"/>
+                      </a:solidFill>
+                      <a:prstDash val="solid"/>
+                      <a:round/>
+                      <a:headEnd type="none" w="med" len="med"/>
+                      <a:tailEnd type="none" w="med" len="med"/>
+                    </a:lnL>
+                    <a:lnR w="9525" cap="flat" cmpd="sng" algn="ctr">
+                      <a:solidFill>
+                        <a:srgbClr val="E1E4E8"/>
+                      </a:solidFill>
+                      <a:prstDash val="solid"/>
+                      <a:round/>
+                      <a:headEnd type="none" w="med" len="med"/>
+                      <a:tailEnd type="none" w="med" len="med"/>
+                    </a:lnR>
+                    <a:lnT w="9525" cap="flat" cmpd="sng" algn="ctr">
+                      <a:solidFill>
+                        <a:srgbClr val="E1E4E8"/>
+                      </a:solidFill>
+                      <a:prstDash val="solid"/>
+                      <a:round/>
+                      <a:headEnd type="none" w="med" len="med"/>
+                      <a:tailEnd type="none" w="med" len="med"/>
+                    </a:lnT>
+                    <a:lnB w="9525" cap="flat" cmpd="sng" algn="ctr">
+                      <a:solidFill>
+                        <a:srgbClr val="E1E4E8"/>
+                      </a:solidFill>
+                      <a:prstDash val="solid"/>
+                      <a:round/>
+                      <a:headEnd type="none" w="med" len="med"/>
+                      <a:tailEnd type="none" w="med" len="med"/>
+                    </a:lnB>
+                    <a:solidFill>
+                      <a:srgbClr val="1F2429"/>
+                    </a:solidFill>
+                  </a:tcPr>
+                </a:tc>
+              </a:tr>
+              <a:tr h="493776">
+                <a:tc>
+                  <a:txBody>
+                    <a:bodyPr/>
+                    <a:lstStyle/>
+                    <a:p>
+                      <a:pPr indent="0" marL="0">
+                        <a:buNone/>
+                      </a:pPr>
+                      <a:r>
+                        <a:rPr lang="en-US" sz="1400" dirty="0">
+                          <a:solidFill>
+                            <a:srgbClr val="1F2429"/>
+                          </a:solidFill>
+                          <a:latin typeface="Calibri" pitchFamily="34" charset="0"/>
+                          <a:ea typeface="Calibri" pitchFamily="34" charset="-122"/>
+                          <a:cs typeface="Calibri" pitchFamily="34" charset="-120"/>
+                        </a:rPr>
+                        <a:t>Database Administrator (DBA)</a:t>
+                      </a:r>
+                      <a:endParaRPr lang="en-US" sz="1400" dirty="0">
+                        <a:latin typeface="Calibri" charset="0"/>
+                        <a:ea typeface="Calibri" charset="0"/>
+                        <a:cs typeface="Calibri" charset="0"/>
+                      </a:endParaRPr>
+                    </a:p>
+                  </a:txBody>
+                  <a:tcPr marL="91440" marR="91440" marT="45720" marB="45720" anchor="ctr">
+                    <a:lnL w="9525" cap="flat" cmpd="sng" algn="ctr">
+                      <a:solidFill>
+                        <a:srgbClr val="E1E4E8"/>
+                      </a:solidFill>
+                      <a:prstDash val="solid"/>
+                      <a:round/>
+                      <a:headEnd type="none" w="med" len="med"/>
+                      <a:tailEnd type="none" w="med" len="med"/>
+                    </a:lnL>
+                    <a:lnR w="9525" cap="flat" cmpd="sng" algn="ctr">
+                      <a:solidFill>
+                        <a:srgbClr val="E1E4E8"/>
+                      </a:solidFill>
+                      <a:prstDash val="solid"/>
+                      <a:round/>
+                      <a:headEnd type="none" w="med" len="med"/>
+                      <a:tailEnd type="none" w="med" len="med"/>
+                    </a:lnR>
+                    <a:lnT w="9525" cap="flat" cmpd="sng" algn="ctr">
+                      <a:solidFill>
+                        <a:srgbClr val="E1E4E8"/>
+                      </a:solidFill>
+                      <a:prstDash val="solid"/>
+                      <a:round/>
+                      <a:headEnd type="none" w="med" len="med"/>
+                      <a:tailEnd type="none" w="med" len="med"/>
+                    </a:lnT>
+                    <a:lnB w="9525" cap="flat" cmpd="sng" algn="ctr">
+                      <a:solidFill>
+                        <a:srgbClr val="E1E4E8"/>
+                      </a:solidFill>
+                      <a:prstDash val="solid"/>
+                      <a:round/>
+                      <a:headEnd type="none" w="med" len="med"/>
+                      <a:tailEnd type="none" w="med" len="med"/>
+                    </a:lnB>
+                  </a:tcPr>
+                </a:tc>
+                <a:tc>
+                  <a:txBody>
+                    <a:bodyPr/>
+                    <a:lstStyle/>
+                    <a:p>
+                      <a:pPr indent="0" marL="0">
+                        <a:buNone/>
+                      </a:pPr>
+                      <a:r>
+                        <a:rPr lang="en-US" sz="1400" dirty="0">
+                          <a:solidFill>
+                            <a:srgbClr val="1F2429"/>
+                          </a:solidFill>
+                          <a:latin typeface="Calibri" pitchFamily="34" charset="0"/>
+                          <a:ea typeface="Calibri" pitchFamily="34" charset="-122"/>
+                          <a:cs typeface="Calibri" pitchFamily="34" charset="-120"/>
+                        </a:rPr>
+                        <a:t>Security, performance, backup/recovery, availability</a:t>
+                      </a:r>
+                      <a:endParaRPr lang="en-US" sz="1400" dirty="0">
+                        <a:latin typeface="Calibri" charset="0"/>
+                        <a:ea typeface="Calibri" charset="0"/>
+                        <a:cs typeface="Calibri" charset="0"/>
+                      </a:endParaRPr>
+                    </a:p>
+                  </a:txBody>
+                  <a:tcPr marL="91440" marR="91440" marT="45720" marB="45720" anchor="ctr">
+                    <a:lnL w="9525" cap="flat" cmpd="sng" algn="ctr">
+                      <a:solidFill>
+                        <a:srgbClr val="E1E4E8"/>
+                      </a:solidFill>
+                      <a:prstDash val="solid"/>
+                      <a:round/>
+                      <a:headEnd type="none" w="med" len="med"/>
+                      <a:tailEnd type="none" w="med" len="med"/>
+                    </a:lnL>
+                    <a:lnR w="9525" cap="flat" cmpd="sng" algn="ctr">
+                      <a:solidFill>
+                        <a:srgbClr val="E1E4E8"/>
+                      </a:solidFill>
+                      <a:prstDash val="solid"/>
+                      <a:round/>
+                      <a:headEnd type="none" w="med" len="med"/>
+                      <a:tailEnd type="none" w="med" len="med"/>
+                    </a:lnR>
+                    <a:lnT w="9525" cap="flat" cmpd="sng" algn="ctr">
+                      <a:solidFill>
+                        <a:srgbClr val="E1E4E8"/>
+                      </a:solidFill>
+                      <a:prstDash val="solid"/>
+                      <a:round/>
+                      <a:headEnd type="none" w="med" len="med"/>
+                      <a:tailEnd type="none" w="med" len="med"/>
+                    </a:lnT>
+                    <a:lnB w="9525" cap="flat" cmpd="sng" algn="ctr">
+                      <a:solidFill>
+                        <a:srgbClr val="E1E4E8"/>
+                      </a:solidFill>
+                      <a:prstDash val="solid"/>
+                      <a:round/>
+                      <a:headEnd type="none" w="med" len="med"/>
+                      <a:tailEnd type="none" w="med" len="med"/>
+                    </a:lnB>
+                  </a:tcPr>
+                </a:tc>
+                <a:tc>
+                  <a:txBody>
+                    <a:bodyPr/>
+                    <a:lstStyle/>
+                    <a:p>
+                      <a:pPr indent="0" marL="0">
+                        <a:buNone/>
+                      </a:pPr>
+                      <a:r>
+                        <a:rPr lang="en-US" sz="1400" dirty="0">
+                          <a:solidFill>
+                            <a:srgbClr val="1F2429"/>
+                          </a:solidFill>
+                          <a:latin typeface="Calibri" pitchFamily="34" charset="0"/>
+                          <a:ea typeface="Calibri" pitchFamily="34" charset="-122"/>
+                          <a:cs typeface="Calibri" pitchFamily="34" charset="-120"/>
+                        </a:rPr>
+                        <a:t>Granting a new teller SELECT-only access to Account</a:t>
+                      </a:r>
+                      <a:endParaRPr lang="en-US" sz="1400" dirty="0">
+                        <a:latin typeface="Calibri" charset="0"/>
+                        <a:ea typeface="Calibri" charset="0"/>
+                        <a:cs typeface="Calibri" charset="0"/>
+                      </a:endParaRPr>
+                    </a:p>
+                  </a:txBody>
+                  <a:tcPr marL="91440" marR="91440" marT="45720" marB="45720" anchor="ctr">
+                    <a:lnL w="9525" cap="flat" cmpd="sng" algn="ctr">
+                      <a:solidFill>
+                        <a:srgbClr val="E1E4E8"/>
+                      </a:solidFill>
+                      <a:prstDash val="solid"/>
+                      <a:round/>
+                      <a:headEnd type="none" w="med" len="med"/>
+                      <a:tailEnd type="none" w="med" len="med"/>
+                    </a:lnL>
+                    <a:lnR w="9525" cap="flat" cmpd="sng" algn="ctr">
+                      <a:solidFill>
+                        <a:srgbClr val="E1E4E8"/>
+                      </a:solidFill>
+                      <a:prstDash val="solid"/>
+                      <a:round/>
+                      <a:headEnd type="none" w="med" len="med"/>
+                      <a:tailEnd type="none" w="med" len="med"/>
+                    </a:lnR>
+                    <a:lnT w="9525" cap="flat" cmpd="sng" algn="ctr">
+                      <a:solidFill>
+                        <a:srgbClr val="E1E4E8"/>
+                      </a:solidFill>
+                      <a:prstDash val="solid"/>
+                      <a:round/>
+                      <a:headEnd type="none" w="med" len="med"/>
+                      <a:tailEnd type="none" w="med" len="med"/>
+                    </a:lnT>
+                    <a:lnB w="9525" cap="flat" cmpd="sng" algn="ctr">
+                      <a:solidFill>
+                        <a:srgbClr val="E1E4E8"/>
+                      </a:solidFill>
+                      <a:prstDash val="solid"/>
+                      <a:round/>
+                      <a:headEnd type="none" w="med" len="med"/>
+                      <a:tailEnd type="none" w="med" len="med"/>
+                    </a:lnB>
+                  </a:tcPr>
+                </a:tc>
+              </a:tr>
+              <a:tr h="493776">
+                <a:tc>
+                  <a:txBody>
+                    <a:bodyPr/>
+                    <a:lstStyle/>
+                    <a:p>
+                      <a:pPr indent="0" marL="0">
+                        <a:buNone/>
+                      </a:pPr>
+                      <a:r>
+                        <a:rPr lang="en-US" sz="1400" dirty="0">
+                          <a:solidFill>
+                            <a:srgbClr val="1F2429"/>
+                          </a:solidFill>
+                          <a:latin typeface="Calibri" pitchFamily="34" charset="0"/>
+                          <a:ea typeface="Calibri" pitchFamily="34" charset="-122"/>
+                          <a:cs typeface="Calibri" pitchFamily="34" charset="-120"/>
+                        </a:rPr>
+                        <a:t>Database Designers</a:t>
+                      </a:r>
+                      <a:endParaRPr lang="en-US" sz="1400" dirty="0">
+                        <a:latin typeface="Calibri" charset="0"/>
+                        <a:ea typeface="Calibri" charset="0"/>
+                        <a:cs typeface="Calibri" charset="0"/>
+                      </a:endParaRPr>
+                    </a:p>
+                  </a:txBody>
+                  <a:tcPr marL="91440" marR="91440" marT="45720" marB="45720" anchor="ctr">
+                    <a:lnL w="9525" cap="flat" cmpd="sng" algn="ctr">
+                      <a:solidFill>
+                        <a:srgbClr val="E1E4E8"/>
+                      </a:solidFill>
+                      <a:prstDash val="solid"/>
+                      <a:round/>
+                      <a:headEnd type="none" w="med" len="med"/>
+                      <a:tailEnd type="none" w="med" len="med"/>
+                    </a:lnL>
+                    <a:lnR w="9525" cap="flat" cmpd="sng" algn="ctr">
+                      <a:solidFill>
+                        <a:srgbClr val="E1E4E8"/>
+                      </a:solidFill>
+                      <a:prstDash val="solid"/>
+                      <a:round/>
+                      <a:headEnd type="none" w="med" len="med"/>
+                      <a:tailEnd type="none" w="med" len="med"/>
+                    </a:lnR>
+                    <a:lnT w="9525" cap="flat" cmpd="sng" algn="ctr">
+                      <a:solidFill>
+                        <a:srgbClr val="E1E4E8"/>
+                      </a:solidFill>
+                      <a:prstDash val="solid"/>
+                      <a:round/>
+                      <a:headEnd type="none" w="med" len="med"/>
+                      <a:tailEnd type="none" w="med" len="med"/>
+                    </a:lnT>
+                    <a:lnB w="9525" cap="flat" cmpd="sng" algn="ctr">
+                      <a:solidFill>
+                        <a:srgbClr val="E1E4E8"/>
+                      </a:solidFill>
+                      <a:prstDash val="solid"/>
+                      <a:round/>
+                      <a:headEnd type="none" w="med" len="med"/>
+                      <a:tailEnd type="none" w="med" len="med"/>
+                    </a:lnB>
+                  </a:tcPr>
+                </a:tc>
+                <a:tc>
+                  <a:txBody>
+                    <a:bodyPr/>
+                    <a:lstStyle/>
+                    <a:p>
+                      <a:pPr indent="0" marL="0">
+                        <a:buNone/>
+                      </a:pPr>
+                      <a:r>
+                        <a:rPr lang="en-US" sz="1400" dirty="0">
+                          <a:solidFill>
+                            <a:srgbClr val="1F2429"/>
+                          </a:solidFill>
+                          <a:latin typeface="Calibri" pitchFamily="34" charset="0"/>
+                          <a:ea typeface="Calibri" pitchFamily="34" charset="-122"/>
+                          <a:cs typeface="Calibri" pitchFamily="34" charset="-120"/>
+                        </a:rPr>
+                        <a:t>Deciding what data to store and how it relates</a:t>
+                      </a:r>
+                      <a:endParaRPr lang="en-US" sz="1400" dirty="0">
+                        <a:latin typeface="Calibri" charset="0"/>
+                        <a:ea typeface="Calibri" charset="0"/>
+                        <a:cs typeface="Calibri" charset="0"/>
+                      </a:endParaRPr>
+                    </a:p>
+                  </a:txBody>
+                  <a:tcPr marL="91440" marR="91440" marT="45720" marB="45720" anchor="ctr">
+                    <a:lnL w="9525" cap="flat" cmpd="sng" algn="ctr">
+                      <a:solidFill>
+                        <a:srgbClr val="E1E4E8"/>
+                      </a:solidFill>
+                      <a:prstDash val="solid"/>
+                      <a:round/>
+                      <a:headEnd type="none" w="med" len="med"/>
+                      <a:tailEnd type="none" w="med" len="med"/>
+                    </a:lnL>
+                    <a:lnR w="9525" cap="flat" cmpd="sng" algn="ctr">
+                      <a:solidFill>
+                        <a:srgbClr val="E1E4E8"/>
+                      </a:solidFill>
+                      <a:prstDash val="solid"/>
+                      <a:round/>
+                      <a:headEnd type="none" w="med" len="med"/>
+                      <a:tailEnd type="none" w="med" len="med"/>
+                    </a:lnR>
+                    <a:lnT w="9525" cap="flat" cmpd="sng" algn="ctr">
+                      <a:solidFill>
+                        <a:srgbClr val="E1E4E8"/>
+                      </a:solidFill>
+                      <a:prstDash val="solid"/>
+                      <a:round/>
+                      <a:headEnd type="none" w="med" len="med"/>
+                      <a:tailEnd type="none" w="med" len="med"/>
+                    </a:lnT>
+                    <a:lnB w="9525" cap="flat" cmpd="sng" algn="ctr">
+                      <a:solidFill>
+                        <a:srgbClr val="E1E4E8"/>
+                      </a:solidFill>
+                      <a:prstDash val="solid"/>
+                      <a:round/>
+                      <a:headEnd type="none" w="med" len="med"/>
+                      <a:tailEnd type="none" w="med" len="med"/>
+                    </a:lnB>
+                  </a:tcPr>
+                </a:tc>
+                <a:tc>
+                  <a:txBody>
+                    <a:bodyPr/>
+                    <a:lstStyle/>
+                    <a:p>
+                      <a:pPr indent="0" marL="0">
+                        <a:buNone/>
+                      </a:pPr>
+                      <a:r>
+                        <a:rPr lang="en-US" sz="1400" dirty="0">
+                          <a:solidFill>
+                            <a:srgbClr val="1F2429"/>
+                          </a:solidFill>
+                          <a:latin typeface="Calibri" pitchFamily="34" charset="0"/>
+                          <a:ea typeface="Calibri" pitchFamily="34" charset="-122"/>
+                          <a:cs typeface="Calibri" pitchFamily="34" charset="-120"/>
+                        </a:rPr>
+                        <a:t>Deciding Account needs a branchNo foreign key</a:t>
+                      </a:r>
+                      <a:endParaRPr lang="en-US" sz="1400" dirty="0">
+                        <a:latin typeface="Calibri" charset="0"/>
+                        <a:ea typeface="Calibri" charset="0"/>
+                        <a:cs typeface="Calibri" charset="0"/>
+                      </a:endParaRPr>
+                    </a:p>
+                  </a:txBody>
+                  <a:tcPr marL="91440" marR="91440" marT="45720" marB="45720" anchor="ctr">
+                    <a:lnL w="9525" cap="flat" cmpd="sng" algn="ctr">
+                      <a:solidFill>
+                        <a:srgbClr val="E1E4E8"/>
+                      </a:solidFill>
+                      <a:prstDash val="solid"/>
+                      <a:round/>
+                      <a:headEnd type="none" w="med" len="med"/>
+                      <a:tailEnd type="none" w="med" len="med"/>
+                    </a:lnL>
+                    <a:lnR w="9525" cap="flat" cmpd="sng" algn="ctr">
+                      <a:solidFill>
+                        <a:srgbClr val="E1E4E8"/>
+                      </a:solidFill>
+                      <a:prstDash val="solid"/>
+                      <a:round/>
+                      <a:headEnd type="none" w="med" len="med"/>
+                      <a:tailEnd type="none" w="med" len="med"/>
+                    </a:lnR>
+                    <a:lnT w="9525" cap="flat" cmpd="sng" algn="ctr">
+                      <a:solidFill>
+                        <a:srgbClr val="E1E4E8"/>
+                      </a:solidFill>
+                      <a:prstDash val="solid"/>
+                      <a:round/>
+                      <a:headEnd type="none" w="med" len="med"/>
+                      <a:tailEnd type="none" w="med" len="med"/>
+                    </a:lnT>
+                    <a:lnB w="9525" cap="flat" cmpd="sng" algn="ctr">
+                      <a:solidFill>
+                        <a:srgbClr val="E1E4E8"/>
+                      </a:solidFill>
+                      <a:prstDash val="solid"/>
+                      <a:round/>
+                      <a:headEnd type="none" w="med" len="med"/>
+                      <a:tailEnd type="none" w="med" len="med"/>
+                    </a:lnB>
+                  </a:tcPr>
+                </a:tc>
+              </a:tr>
+              <a:tr h="493776">
+                <a:tc>
+                  <a:txBody>
+                    <a:bodyPr/>
+                    <a:lstStyle/>
+                    <a:p>
+                      <a:pPr indent="0" marL="0">
+                        <a:buNone/>
+                      </a:pPr>
+                      <a:r>
+                        <a:rPr lang="en-US" sz="1400" dirty="0">
+                          <a:solidFill>
+                            <a:srgbClr val="1F2429"/>
+                          </a:solidFill>
+                          <a:latin typeface="Calibri" pitchFamily="34" charset="0"/>
+                          <a:ea typeface="Calibri" pitchFamily="34" charset="-122"/>
+                          <a:cs typeface="Calibri" pitchFamily="34" charset="-120"/>
+                        </a:rPr>
+                        <a:t>Application Developers</a:t>
+                      </a:r>
+                      <a:endParaRPr lang="en-US" sz="1400" dirty="0">
+                        <a:latin typeface="Calibri" charset="0"/>
+                        <a:ea typeface="Calibri" charset="0"/>
+                        <a:cs typeface="Calibri" charset="0"/>
+                      </a:endParaRPr>
+                    </a:p>
+                  </a:txBody>
+                  <a:tcPr marL="91440" marR="91440" marT="45720" marB="45720" anchor="ctr">
+                    <a:lnL w="9525" cap="flat" cmpd="sng" algn="ctr">
+                      <a:solidFill>
+                        <a:srgbClr val="E1E4E8"/>
+                      </a:solidFill>
+                      <a:prstDash val="solid"/>
+                      <a:round/>
+                      <a:headEnd type="none" w="med" len="med"/>
+                      <a:tailEnd type="none" w="med" len="med"/>
+                    </a:lnL>
+                    <a:lnR w="9525" cap="flat" cmpd="sng" algn="ctr">
+                      <a:solidFill>
+                        <a:srgbClr val="E1E4E8"/>
+                      </a:solidFill>
+                      <a:prstDash val="solid"/>
+                      <a:round/>
+                      <a:headEnd type="none" w="med" len="med"/>
+                      <a:tailEnd type="none" w="med" len="med"/>
+                    </a:lnR>
+                    <a:lnT w="9525" cap="flat" cmpd="sng" algn="ctr">
+                      <a:solidFill>
+                        <a:srgbClr val="E1E4E8"/>
+                      </a:solidFill>
+                      <a:prstDash val="solid"/>
+                      <a:round/>
+                      <a:headEnd type="none" w="med" len="med"/>
+                      <a:tailEnd type="none" w="med" len="med"/>
+                    </a:lnT>
+                    <a:lnB w="9525" cap="flat" cmpd="sng" algn="ctr">
+                      <a:solidFill>
+                        <a:srgbClr val="E1E4E8"/>
+                      </a:solidFill>
+                      <a:prstDash val="solid"/>
+                      <a:round/>
+                      <a:headEnd type="none" w="med" len="med"/>
+                      <a:tailEnd type="none" w="med" len="med"/>
+                    </a:lnB>
+                  </a:tcPr>
+                </a:tc>
+                <a:tc>
+                  <a:txBody>
+                    <a:bodyPr/>
+                    <a:lstStyle/>
+                    <a:p>
+                      <a:pPr indent="0" marL="0">
+                        <a:buNone/>
+                      </a:pPr>
+                      <a:r>
+                        <a:rPr lang="en-US" sz="1400" dirty="0">
+                          <a:solidFill>
+                            <a:srgbClr val="1F2429"/>
+                          </a:solidFill>
+                          <a:latin typeface="Calibri" pitchFamily="34" charset="0"/>
+                          <a:ea typeface="Calibri" pitchFamily="34" charset="-122"/>
+                          <a:cs typeface="Calibri" pitchFamily="34" charset="-120"/>
+                        </a:rPr>
+                        <a:t>Writing the programs end users interact with</a:t>
+                      </a:r>
+                      <a:endParaRPr lang="en-US" sz="1400" dirty="0">
+                        <a:latin typeface="Calibri" charset="0"/>
+                        <a:ea typeface="Calibri" charset="0"/>
+                        <a:cs typeface="Calibri" charset="0"/>
+                      </a:endParaRPr>
+                    </a:p>
+                  </a:txBody>
+                  <a:tcPr marL="91440" marR="91440" marT="45720" marB="45720" anchor="ctr">
+                    <a:lnL w="9525" cap="flat" cmpd="sng" algn="ctr">
+                      <a:solidFill>
+                        <a:srgbClr val="E1E4E8"/>
+                      </a:solidFill>
+                      <a:prstDash val="solid"/>
+                      <a:round/>
+                      <a:headEnd type="none" w="med" len="med"/>
+                      <a:tailEnd type="none" w="med" len="med"/>
+                    </a:lnL>
+                    <a:lnR w="9525" cap="flat" cmpd="sng" algn="ctr">
+                      <a:solidFill>
+                        <a:srgbClr val="E1E4E8"/>
+                      </a:solidFill>
+                      <a:prstDash val="solid"/>
+                      <a:round/>
+                      <a:headEnd type="none" w="med" len="med"/>
+                      <a:tailEnd type="none" w="med" len="med"/>
+                    </a:lnR>
+                    <a:lnT w="9525" cap="flat" cmpd="sng" algn="ctr">
+                      <a:solidFill>
+                        <a:srgbClr val="E1E4E8"/>
+                      </a:solidFill>
+                      <a:prstDash val="solid"/>
+                      <a:round/>
+                      <a:headEnd type="none" w="med" len="med"/>
+                      <a:tailEnd type="none" w="med" len="med"/>
+                    </a:lnT>
+                    <a:lnB w="9525" cap="flat" cmpd="sng" algn="ctr">
+                      <a:solidFill>
+                        <a:srgbClr val="E1E4E8"/>
+                      </a:solidFill>
+                      <a:prstDash val="solid"/>
+                      <a:round/>
+                      <a:headEnd type="none" w="med" len="med"/>
+                      <a:tailEnd type="none" w="med" len="med"/>
+                    </a:lnB>
+                  </a:tcPr>
+                </a:tc>
+                <a:tc>
+                  <a:txBody>
+                    <a:bodyPr/>
+                    <a:lstStyle/>
+                    <a:p>
+                      <a:pPr indent="0" marL="0">
+                        <a:buNone/>
+                      </a:pPr>
+                      <a:r>
+                        <a:rPr lang="en-US" sz="1400" dirty="0">
+                          <a:solidFill>
+                            <a:srgbClr val="1F2429"/>
+                          </a:solidFill>
+                          <a:latin typeface="Calibri" pitchFamily="34" charset="0"/>
+                          <a:ea typeface="Calibri" pitchFamily="34" charset="-122"/>
+                          <a:cs typeface="Calibri" pitchFamily="34" charset="-120"/>
+                        </a:rPr>
+                        <a:t>Building the teller's “process withdrawal” screen</a:t>
+                      </a:r>
+                      <a:endParaRPr lang="en-US" sz="1400" dirty="0">
+                        <a:latin typeface="Calibri" charset="0"/>
+                        <a:ea typeface="Calibri" charset="0"/>
+                        <a:cs typeface="Calibri" charset="0"/>
+                      </a:endParaRPr>
+                    </a:p>
+                  </a:txBody>
+                  <a:tcPr marL="91440" marR="91440" marT="45720" marB="45720" anchor="ctr">
+                    <a:lnL w="9525" cap="flat" cmpd="sng" algn="ctr">
+                      <a:solidFill>
+                        <a:srgbClr val="E1E4E8"/>
+                      </a:solidFill>
+                      <a:prstDash val="solid"/>
+                      <a:round/>
+                      <a:headEnd type="none" w="med" len="med"/>
+                      <a:tailEnd type="none" w="med" len="med"/>
+                    </a:lnL>
+                    <a:lnR w="9525" cap="flat" cmpd="sng" algn="ctr">
+                      <a:solidFill>
+                        <a:srgbClr val="E1E4E8"/>
+                      </a:solidFill>
+                      <a:prstDash val="solid"/>
+                      <a:round/>
+                      <a:headEnd type="none" w="med" len="med"/>
+                      <a:tailEnd type="none" w="med" len="med"/>
+                    </a:lnR>
+                    <a:lnT w="9525" cap="flat" cmpd="sng" algn="ctr">
+                      <a:solidFill>
+                        <a:srgbClr val="E1E4E8"/>
+                      </a:solidFill>
+                      <a:prstDash val="solid"/>
+                      <a:round/>
+                      <a:headEnd type="none" w="med" len="med"/>
+                      <a:tailEnd type="none" w="med" len="med"/>
+                    </a:lnT>
+                    <a:lnB w="9525" cap="flat" cmpd="sng" algn="ctr">
+                      <a:solidFill>
+                        <a:srgbClr val="E1E4E8"/>
+                      </a:solidFill>
+                      <a:prstDash val="solid"/>
+                      <a:round/>
+                      <a:headEnd type="none" w="med" len="med"/>
+                      <a:tailEnd type="none" w="med" len="med"/>
+                    </a:lnB>
+                  </a:tcPr>
+                </a:tc>
+              </a:tr>
+              <a:tr h="493776">
+                <a:tc>
+                  <a:txBody>
+                    <a:bodyPr/>
+                    <a:lstStyle/>
+                    <a:p>
+                      <a:pPr indent="0" marL="0">
+                        <a:buNone/>
+                      </a:pPr>
+                      <a:r>
+                        <a:rPr lang="en-US" sz="1400" dirty="0">
+                          <a:solidFill>
+                            <a:srgbClr val="1F2429"/>
+                          </a:solidFill>
+                          <a:latin typeface="Calibri" pitchFamily="34" charset="0"/>
+                          <a:ea typeface="Calibri" pitchFamily="34" charset="-122"/>
+                          <a:cs typeface="Calibri" pitchFamily="34" charset="-120"/>
+                        </a:rPr>
+                        <a:t>End Users</a:t>
+                      </a:r>
+                      <a:endParaRPr lang="en-US" sz="1400" dirty="0">
+                        <a:latin typeface="Calibri" charset="0"/>
+                        <a:ea typeface="Calibri" charset="0"/>
+                        <a:cs typeface="Calibri" charset="0"/>
+                      </a:endParaRPr>
+                    </a:p>
+                  </a:txBody>
+                  <a:tcPr marL="91440" marR="91440" marT="45720" marB="45720" anchor="ctr">
+                    <a:lnL w="9525" cap="flat" cmpd="sng" algn="ctr">
+                      <a:solidFill>
+                        <a:srgbClr val="E1E4E8"/>
+                      </a:solidFill>
+                      <a:prstDash val="solid"/>
+                      <a:round/>
+                      <a:headEnd type="none" w="med" len="med"/>
+                      <a:tailEnd type="none" w="med" len="med"/>
+                    </a:lnL>
+                    <a:lnR w="9525" cap="flat" cmpd="sng" algn="ctr">
+                      <a:solidFill>
+                        <a:srgbClr val="E1E4E8"/>
+                      </a:solidFill>
+                      <a:prstDash val="solid"/>
+                      <a:round/>
+                      <a:headEnd type="none" w="med" len="med"/>
+                      <a:tailEnd type="none" w="med" len="med"/>
+                    </a:lnR>
+                    <a:lnT w="9525" cap="flat" cmpd="sng" algn="ctr">
+                      <a:solidFill>
+                        <a:srgbClr val="E1E4E8"/>
+                      </a:solidFill>
+                      <a:prstDash val="solid"/>
+                      <a:round/>
+                      <a:headEnd type="none" w="med" len="med"/>
+                      <a:tailEnd type="none" w="med" len="med"/>
+                    </a:lnT>
+                    <a:lnB w="9525" cap="flat" cmpd="sng" algn="ctr">
+                      <a:solidFill>
+                        <a:srgbClr val="E1E4E8"/>
+                      </a:solidFill>
+                      <a:prstDash val="solid"/>
+                      <a:round/>
+                      <a:headEnd type="none" w="med" len="med"/>
+                      <a:tailEnd type="none" w="med" len="med"/>
+                    </a:lnB>
+                  </a:tcPr>
+                </a:tc>
+                <a:tc>
+                  <a:txBody>
+                    <a:bodyPr/>
+                    <a:lstStyle/>
+                    <a:p>
+                      <a:pPr indent="0" marL="0">
+                        <a:buNone/>
+                      </a:pPr>
+                      <a:r>
+                        <a:rPr lang="en-US" sz="1400" dirty="0">
+                          <a:solidFill>
+                            <a:srgbClr val="1F2429"/>
+                          </a:solidFill>
+                          <a:latin typeface="Calibri" pitchFamily="34" charset="0"/>
+                          <a:ea typeface="Calibri" pitchFamily="34" charset="-122"/>
+                          <a:cs typeface="Calibri" pitchFamily="34" charset="-120"/>
+                        </a:rPr>
+                        <a:t>Using the finished application to do their job</a:t>
+                      </a:r>
+                      <a:endParaRPr lang="en-US" sz="1400" dirty="0">
+                        <a:latin typeface="Calibri" charset="0"/>
+                        <a:ea typeface="Calibri" charset="0"/>
+                        <a:cs typeface="Calibri" charset="0"/>
+                      </a:endParaRPr>
+                    </a:p>
+                  </a:txBody>
+                  <a:tcPr marL="91440" marR="91440" marT="45720" marB="45720" anchor="ctr">
+                    <a:lnL w="9525" cap="flat" cmpd="sng" algn="ctr">
+                      <a:solidFill>
+                        <a:srgbClr val="E1E4E8"/>
+                      </a:solidFill>
+                      <a:prstDash val="solid"/>
+                      <a:round/>
+                      <a:headEnd type="none" w="med" len="med"/>
+                      <a:tailEnd type="none" w="med" len="med"/>
+                    </a:lnL>
+                    <a:lnR w="9525" cap="flat" cmpd="sng" algn="ctr">
+                      <a:solidFill>
+                        <a:srgbClr val="E1E4E8"/>
+                      </a:solidFill>
+                      <a:prstDash val="solid"/>
+                      <a:round/>
+                      <a:headEnd type="none" w="med" len="med"/>
+                      <a:tailEnd type="none" w="med" len="med"/>
+                    </a:lnR>
+                    <a:lnT w="9525" cap="flat" cmpd="sng" algn="ctr">
+                      <a:solidFill>
+                        <a:srgbClr val="E1E4E8"/>
+                      </a:solidFill>
+                      <a:prstDash val="solid"/>
+                      <a:round/>
+                      <a:headEnd type="none" w="med" len="med"/>
+                      <a:tailEnd type="none" w="med" len="med"/>
+                    </a:lnT>
+                    <a:lnB w="9525" cap="flat" cmpd="sng" algn="ctr">
+                      <a:solidFill>
+                        <a:srgbClr val="E1E4E8"/>
+                      </a:solidFill>
+                      <a:prstDash val="solid"/>
+                      <a:round/>
+                      <a:headEnd type="none" w="med" len="med"/>
+                      <a:tailEnd type="none" w="med" len="med"/>
+                    </a:lnB>
+                  </a:tcPr>
+                </a:tc>
+                <a:tc>
+                  <a:txBody>
+                    <a:bodyPr/>
+                    <a:lstStyle/>
+                    <a:p>
+                      <a:pPr indent="0" marL="0">
+                        <a:buNone/>
+                      </a:pPr>
+                      <a:r>
+                        <a:rPr lang="en-US" sz="1400" dirty="0">
                           <a:solidFill>
                             <a:srgbClr val="1F2429"/>
                           </a:solidFill>
@@ -4815,7 +8383,7 @@
                         </a:rPr>
                         <a:t>A teller processing a customer's withdrawal</a:t>
                       </a:r>
-                      <a:endParaRPr lang="en-US" sz="1200" dirty="0">
+                      <a:endParaRPr lang="en-US" sz="1400" dirty="0">
                         <a:latin typeface="Calibri" charset="0"/>
                         <a:ea typeface="Calibri" charset="0"/>
                         <a:cs typeface="Calibri" charset="0"/>
@@ -4866,125 +8434,6 @@
           </a:graphicData>
         </a:graphic>
       </p:graphicFrame>
-      <p:sp>
-        <p:nvSpPr>
-          <p:cNvPr id="5" name="Shape 2"/>
-          <p:cNvSpPr/>
-          <p:nvPr/>
-        </p:nvSpPr>
-        <p:spPr>
-          <a:xfrm>
-            <a:off x="640080" y="3886200"/>
-            <a:ext cx="10881360" cy="1508760"/>
-          </a:xfrm>
-          <a:prstGeom prst="roundRect">
-            <a:avLst>
-              <a:gd name="adj" fmla="val 4848"/>
-            </a:avLst>
-          </a:prstGeom>
-          <a:solidFill>
-            <a:srgbClr val="EDEAFB"/>
-          </a:solidFill>
-          <a:ln w="12700">
-            <a:solidFill>
-              <a:srgbClr val="8B7FD9"/>
-            </a:solidFill>
-            <a:prstDash val="solid"/>
-          </a:ln>
-        </p:spPr>
-      </p:sp>
-      <p:sp>
-        <p:nvSpPr>
-          <p:cNvPr id="6" name="Text 3"/>
-          <p:cNvSpPr txBox="1"/>
-          <p:nvPr/>
-        </p:nvSpPr>
-        <p:spPr>
-          <a:xfrm>
-            <a:off x="868680" y="4023360"/>
-            <a:ext cx="10424160" cy="1234440"/>
-          </a:xfrm>
-          <a:prstGeom prst="rect">
-            <a:avLst/>
-          </a:prstGeom>
-          <a:noFill/>
-          <a:ln/>
-        </p:spPr>
-        <p:txBody>
-          <a:bodyPr wrap="square" lIns="0" tIns="0" rIns="0" bIns="0" rtlCol="0" anchor="t"/>
-          <a:lstStyle/>
-          <a:p>
-            <a:pPr indent="0" marL="0">
-              <a:buNone/>
-            </a:pPr>
-            <a:r>
-              <a:rPr lang="en-US" sz="1250" b="1" dirty="0">
-                <a:solidFill>
-                  <a:srgbClr val="1F2429"/>
-                </a:solidFill>
-                <a:latin typeface="Calibri" pitchFamily="34" charset="0"/>
-                <a:ea typeface="Calibri" pitchFamily="34" charset="-122"/>
-                <a:cs typeface="Calibri" pitchFamily="34" charset="-120"/>
-              </a:rPr>
-              <a:t>Two kinds of end user.  </a:t>
-            </a:r>
-            <a:pPr indent="0" marL="0">
-              <a:buNone/>
-            </a:pPr>
-            <a:r>
-              <a:rPr lang="en-US" sz="1250" dirty="0">
-                <a:solidFill>
-                  <a:srgbClr val="1F2429"/>
-                </a:solidFill>
-                <a:latin typeface="Calibri" pitchFamily="34" charset="0"/>
-                <a:ea typeface="Calibri" pitchFamily="34" charset="-122"/>
-                <a:cs typeface="Calibri" pitchFamily="34" charset="-120"/>
-              </a:rPr>
-              <a:t>Naive users interact only through a fixed application interface, unaware a database even exists (a teller using a withdrawal screen). Sophisticated users write their own queries directly against the database (a risk analyst querying total outstanding loans per branch).</a:t>
-            </a:r>
-            <a:endParaRPr lang="en-US" sz="1250" dirty="0"/>
-          </a:p>
-        </p:txBody>
-      </p:sp>
-      <p:sp>
-        <p:nvSpPr>
-          <p:cNvPr id="7" name="Text 4"/>
-          <p:cNvSpPr txBox="1"/>
-          <p:nvPr/>
-        </p:nvSpPr>
-        <p:spPr>
-          <a:xfrm>
-            <a:off x="640080" y="5532120"/>
-            <a:ext cx="10881360" cy="548640"/>
-          </a:xfrm>
-          <a:prstGeom prst="rect">
-            <a:avLst/>
-          </a:prstGeom>
-          <a:noFill/>
-          <a:ln/>
-        </p:spPr>
-        <p:txBody>
-          <a:bodyPr wrap="square" lIns="0" tIns="0" rIns="0" bIns="0" rtlCol="0" anchor="ctr"/>
-          <a:lstStyle/>
-          <a:p>
-            <a:pPr indent="0" marL="0">
-              <a:buNone/>
-            </a:pPr>
-            <a:r>
-              <a:rPr lang="en-US" sz="1150" i="1" dirty="0">
-                <a:solidFill>
-                  <a:srgbClr val="8A939B"/>
-                </a:solidFill>
-                <a:latin typeface="Calibri" pitchFamily="34" charset="0"/>
-                <a:ea typeface="Calibri" pitchFamily="34" charset="-122"/>
-                <a:cs typeface="Calibri" pitchFamily="34" charset="-120"/>
-              </a:rPr>
-              <a:t>The DBA deserves particular emphasis: in a file-based world, no single person was responsible for the organization's data as a whole — the database approach concentrates that responsibility into one role.</a:t>
-            </a:r>
-            <a:endParaRPr lang="en-US" sz="1150" dirty="0"/>
-          </a:p>
-        </p:txBody>
-      </p:sp>
     </p:spTree>
   </p:cSld>
   <p:clrMapOvr>
@@ -5081,7 +8530,7 @@
               <a:buNone/>
             </a:pPr>
             <a:r>
-              <a:rPr lang="en-US" sz="1000" u="sng" dirty="0">
+              <a:rPr lang="en-US" sz="1200" u="sng" dirty="0">
                 <a:solidFill>
                   <a:srgbClr val="8A939B"/>
                 </a:solidFill>
@@ -5102,7 +8551,7 @@
               <a:buNone/>
             </a:pPr>
             <a:r>
-              <a:rPr lang="en-US" sz="1000" dirty="0">
+              <a:rPr lang="en-US" sz="1200" dirty="0">
                 <a:solidFill>
                   <a:srgbClr val="8A939B"/>
                 </a:solidFill>
@@ -5110,9 +8559,9 @@
                 <a:ea typeface="Calibri" pitchFamily="34" charset="-122"/>
                 <a:cs typeface="Calibri" pitchFamily="34" charset="-120"/>
               </a:rPr>
-              <a:t>  ·  6</a:t>
-            </a:r>
-            <a:endParaRPr lang="en-US" sz="1000" dirty="0"/>
+              <a:t>  ·  11</a:t>
+            </a:r>
+            <a:endParaRPr lang="en-US" sz="1200" dirty="0"/>
           </a:p>
         </p:txBody>
       </p:sp>
@@ -5141,7 +8590,7 @@
               <a:buNone/>
             </a:pPr>
             <a:r>
-              <a:rPr lang="en-US" sz="1400" dirty="0">
+              <a:rPr lang="en-US" sz="1800" dirty="0">
                 <a:solidFill>
                   <a:srgbClr val="1F2429"/>
                 </a:solidFill>
@@ -5151,7 +8600,7 @@
               </a:rPr>
               <a:t>Zooming in from the environment to the DBMS software itself, several cooperating components each handle a distinct concern:</a:t>
             </a:r>
-            <a:endParaRPr lang="en-US" sz="1400" dirty="0"/>
+            <a:endParaRPr lang="en-US" sz="1800" dirty="0"/>
           </a:p>
         </p:txBody>
       </p:sp>
@@ -5202,7 +8651,7 @@
               <a:buNone/>
             </a:pPr>
             <a:r>
-              <a:rPr lang="en-US" sz="1350" b="1" dirty="0">
+              <a:rPr lang="en-US" sz="1600" b="1" dirty="0">
                 <a:solidFill>
                   <a:srgbClr val="FFFFFF"/>
                 </a:solidFill>
@@ -5212,7 +8661,7 @@
               </a:rPr>
               <a:t>Query Processor</a:t>
             </a:r>
-            <a:endParaRPr lang="en-US" sz="1350" dirty="0"/>
+            <a:endParaRPr lang="en-US" sz="1400" dirty="0"/>
           </a:p>
         </p:txBody>
       </p:sp>
@@ -5241,7 +8690,7 @@
               <a:buNone/>
             </a:pPr>
             <a:r>
-              <a:rPr lang="en-US" sz="1050" dirty="0">
+              <a:rPr lang="en-US" sz="1400" dirty="0">
                 <a:solidFill>
                   <a:srgbClr val="FFFFFF"/>
                 </a:solidFill>
@@ -5251,7 +8700,7 @@
               </a:rPr>
               <a:t>Parses and optimizes queries submitted by users and applications</a:t>
             </a:r>
-            <a:endParaRPr lang="en-US" sz="1050" dirty="0"/>
+            <a:endParaRPr lang="en-US" sz="1400" dirty="0"/>
           </a:p>
         </p:txBody>
       </p:sp>
@@ -5302,7 +8751,7 @@
               <a:buNone/>
             </a:pPr>
             <a:r>
-              <a:rPr lang="en-US" sz="1350" b="1" dirty="0">
+              <a:rPr lang="en-US" sz="1600" b="1" dirty="0">
                 <a:solidFill>
                   <a:srgbClr val="FFFFFF"/>
                 </a:solidFill>
@@ -5312,7 +8761,7 @@
               </a:rPr>
               <a:t>Database Manager</a:t>
             </a:r>
-            <a:endParaRPr lang="en-US" sz="1350" dirty="0"/>
+            <a:endParaRPr lang="en-US" sz="1400" dirty="0"/>
           </a:p>
         </p:txBody>
       </p:sp>
@@ -5341,7 +8790,7 @@
               <a:buNone/>
             </a:pPr>
             <a:r>
-              <a:rPr lang="en-US" sz="1050" dirty="0">
+              <a:rPr lang="en-US" sz="1400" dirty="0">
                 <a:solidFill>
                   <a:srgbClr val="FFFFFF"/>
                 </a:solidFill>
@@ -5351,7 +8800,7 @@
               </a:rPr>
               <a:t>Coordinates access to stored data; enforces integrity and security rules</a:t>
             </a:r>
-            <a:endParaRPr lang="en-US" sz="1050" dirty="0"/>
+            <a:endParaRPr lang="en-US" sz="1400" dirty="0"/>
           </a:p>
         </p:txBody>
       </p:sp>
@@ -5402,7 +8851,7 @@
               <a:buNone/>
             </a:pPr>
             <a:r>
-              <a:rPr lang="en-US" sz="1350" b="1" dirty="0">
+              <a:rPr lang="en-US" sz="1600" b="1" dirty="0">
                 <a:solidFill>
                   <a:srgbClr val="FFFFFF"/>
                 </a:solidFill>
@@ -5412,7 +8861,7 @@
               </a:rPr>
               <a:t>Transaction Manager</a:t>
             </a:r>
-            <a:endParaRPr lang="en-US" sz="1350" dirty="0"/>
+            <a:endParaRPr lang="en-US" sz="1400" dirty="0"/>
           </a:p>
         </p:txBody>
       </p:sp>
@@ -5441,7 +8890,7 @@
               <a:buNone/>
             </a:pPr>
             <a:r>
-              <a:rPr lang="en-US" sz="1050" dirty="0">
+              <a:rPr lang="en-US" sz="1400" dirty="0">
                 <a:solidFill>
                   <a:srgbClr val="FFFFFF"/>
                 </a:solidFill>
@@ -5451,7 +8900,7 @@
               </a:rPr>
               <a:t>Ensures concurrent operations stay correct and recoverable</a:t>
             </a:r>
-            <a:endParaRPr lang="en-US" sz="1050" dirty="0"/>
+            <a:endParaRPr lang="en-US" sz="1400" dirty="0"/>
           </a:p>
         </p:txBody>
       </p:sp>
@@ -5502,7 +8951,7 @@
               <a:buNone/>
             </a:pPr>
             <a:r>
-              <a:rPr lang="en-US" sz="1350" b="1" dirty="0">
+              <a:rPr lang="en-US" sz="1600" b="1" dirty="0">
                 <a:solidFill>
                   <a:srgbClr val="FFFFFF"/>
                 </a:solidFill>
@@ -5512,7 +8961,7 @@
               </a:rPr>
               <a:t>File Manager</a:t>
             </a:r>
-            <a:endParaRPr lang="en-US" sz="1350" dirty="0"/>
+            <a:endParaRPr lang="en-US" sz="1400" dirty="0"/>
           </a:p>
         </p:txBody>
       </p:sp>
@@ -5541,7 +8990,7 @@
               <a:buNone/>
             </a:pPr>
             <a:r>
-              <a:rPr lang="en-US" sz="1050" dirty="0">
+              <a:rPr lang="en-US" sz="1400" dirty="0">
                 <a:solidFill>
                   <a:srgbClr val="FFFFFF"/>
                 </a:solidFill>
@@ -5551,7 +9000,7 @@
               </a:rPr>
               <a:t>Manages the allocation of physical disk space for stored files</a:t>
             </a:r>
-            <a:endParaRPr lang="en-US" sz="1050" dirty="0"/>
+            <a:endParaRPr lang="en-US" sz="1400" dirty="0"/>
           </a:p>
         </p:txBody>
       </p:sp>
@@ -5602,7 +9051,7 @@
               <a:buNone/>
             </a:pPr>
             <a:r>
-              <a:rPr lang="en-US" sz="1350" b="1" dirty="0">
+              <a:rPr lang="en-US" sz="1600" b="1" dirty="0">
                 <a:solidFill>
                   <a:srgbClr val="FFFFFF"/>
                 </a:solidFill>
@@ -5612,7 +9061,7 @@
               </a:rPr>
               <a:t>DML / DDL Precompiler</a:t>
             </a:r>
-            <a:endParaRPr lang="en-US" sz="1350" dirty="0"/>
+            <a:endParaRPr lang="en-US" sz="1400" dirty="0"/>
           </a:p>
         </p:txBody>
       </p:sp>
@@ -5641,7 +9090,7 @@
               <a:buNone/>
             </a:pPr>
             <a:r>
-              <a:rPr lang="en-US" sz="1050" dirty="0">
+              <a:rPr lang="en-US" sz="1400" dirty="0">
                 <a:solidFill>
                   <a:srgbClr val="FFFFFF"/>
                 </a:solidFill>
@@ -5651,7 +9100,7 @@
               </a:rPr>
               <a:t>Translates database statements embedded in application code</a:t>
             </a:r>
-            <a:endParaRPr lang="en-US" sz="1050" dirty="0"/>
+            <a:endParaRPr lang="en-US" sz="1400" dirty="0"/>
           </a:p>
         </p:txBody>
       </p:sp>
@@ -5702,7 +9151,7 @@
               <a:buNone/>
             </a:pPr>
             <a:r>
-              <a:rPr lang="en-US" sz="1350" b="1" dirty="0">
+              <a:rPr lang="en-US" sz="1600" b="1" dirty="0">
                 <a:solidFill>
                   <a:srgbClr val="FFFFFF"/>
                 </a:solidFill>
@@ -5712,7 +9161,7 @@
               </a:rPr>
               <a:t>Data Dictionary / Catalog</a:t>
             </a:r>
-            <a:endParaRPr lang="en-US" sz="1350" dirty="0"/>
+            <a:endParaRPr lang="en-US" sz="1400" dirty="0"/>
           </a:p>
         </p:txBody>
       </p:sp>
@@ -5741,7 +9190,7 @@
               <a:buNone/>
             </a:pPr>
             <a:r>
-              <a:rPr lang="en-US" sz="1050" dirty="0">
+              <a:rPr lang="en-US" sz="1400" dirty="0">
                 <a:solidFill>
                   <a:srgbClr val="FFFFFF"/>
                 </a:solidFill>
@@ -5751,7 +9200,7 @@
               </a:rPr>
               <a:t>Stores the metadata every other component consults</a:t>
             </a:r>
-            <a:endParaRPr lang="en-US" sz="1050" dirty="0"/>
+            <a:endParaRPr lang="en-US" sz="1400" dirty="0"/>
           </a:p>
         </p:txBody>
       </p:sp>
@@ -5780,7 +9229,7 @@
               <a:buNone/>
             </a:pPr>
             <a:r>
-              <a:rPr lang="en-US" sz="1200" dirty="0">
+              <a:rPr lang="en-US" sz="1800" dirty="0">
                 <a:solidFill>
                   <a:srgbClr val="8A939B"/>
                 </a:solidFill>
@@ -5790,7 +9239,7 @@
               </a:rPr>
               <a:t>A single UPDATE Account SET balance = balance - 5000 WHERE accountNo = 'SL21' passes through the query processor, the catalog, the transaction manager, and finally the file manager to write the new value to disk.</a:t>
             </a:r>
-            <a:endParaRPr lang="en-US" sz="1200" dirty="0"/>
+            <a:endParaRPr lang="en-US" sz="1800" dirty="0"/>
           </a:p>
         </p:txBody>
       </p:sp>
@@ -5890,7 +9339,7 @@
               <a:buNone/>
             </a:pPr>
             <a:r>
-              <a:rPr lang="en-US" sz="1000" u="sng" dirty="0">
+              <a:rPr lang="en-US" sz="1200" u="sng" dirty="0">
                 <a:solidFill>
                   <a:srgbClr val="8A939B"/>
                 </a:solidFill>
@@ -5911,7 +9360,7 @@
               <a:buNone/>
             </a:pPr>
             <a:r>
-              <a:rPr lang="en-US" sz="1000" dirty="0">
+              <a:rPr lang="en-US" sz="1200" dirty="0">
                 <a:solidFill>
                   <a:srgbClr val="8A939B"/>
                 </a:solidFill>
@@ -5919,9 +9368,9 @@
                 <a:ea typeface="Calibri" pitchFamily="34" charset="-122"/>
                 <a:cs typeface="Calibri" pitchFamily="34" charset="-120"/>
               </a:rPr>
-              <a:t>  ·  7</a:t>
-            </a:r>
-            <a:endParaRPr lang="en-US" sz="1000" dirty="0"/>
+              <a:t>  ·  13</a:t>
+            </a:r>
+            <a:endParaRPr lang="en-US" sz="1200" dirty="0"/>
           </a:p>
         </p:txBody>
       </p:sp>
@@ -5954,7 +9403,7 @@
               <a:buChar char="•"/>
             </a:pPr>
             <a:r>
-              <a:rPr lang="en-US" sz="1400" b="1" dirty="0">
+              <a:rPr lang="en-US" sz="1800" b="1" dirty="0">
                 <a:solidFill>
                   <a:srgbClr val="1F2429"/>
                 </a:solidFill>
@@ -5971,7 +9420,7 @@
               <a:buNone/>
             </a:pPr>
             <a:r>
-              <a:rPr lang="en-US" sz="1400" dirty="0">
+              <a:rPr lang="en-US" sz="1800" dirty="0">
                 <a:solidFill>
                   <a:srgbClr val="1F2429"/>
                 </a:solidFill>
@@ -5981,7 +9430,7 @@
               </a:rPr>
               <a:t> — the most basic function: store a value, get it back, change it</a:t>
             </a:r>
-            <a:endParaRPr lang="en-US" sz="1400" dirty="0"/>
+            <a:endParaRPr lang="en-US" sz="1800" dirty="0"/>
           </a:p>
           <a:p>
             <a:pPr marL="342900" indent="-342900">
@@ -5992,7 +9441,7 @@
               <a:buChar char="•"/>
             </a:pPr>
             <a:r>
-              <a:rPr lang="en-US" sz="1400" b="1" dirty="0">
+              <a:rPr lang="en-US" sz="1800" b="1" dirty="0">
                 <a:solidFill>
                   <a:srgbClr val="1F2429"/>
                 </a:solidFill>
@@ -6009,7 +9458,7 @@
               <a:buNone/>
             </a:pPr>
             <a:r>
-              <a:rPr lang="en-US" sz="1400" dirty="0">
+              <a:rPr lang="en-US" sz="1800" dirty="0">
                 <a:solidFill>
                   <a:srgbClr val="1F2429"/>
                 </a:solidFill>
@@ -6019,7 +9468,7 @@
               </a:rPr>
               <a:t> — metadata is itself queryable by tools and administrators</a:t>
             </a:r>
-            <a:endParaRPr lang="en-US" sz="1400" dirty="0"/>
+            <a:endParaRPr lang="en-US" sz="1800" dirty="0"/>
           </a:p>
           <a:p>
             <a:pPr marL="342900" indent="-342900">
@@ -6030,7 +9479,7 @@
               <a:buChar char="•"/>
             </a:pPr>
             <a:r>
-              <a:rPr lang="en-US" sz="1400" b="1" dirty="0">
+              <a:rPr lang="en-US" sz="1800" b="1" dirty="0">
                 <a:solidFill>
                   <a:srgbClr val="1F2429"/>
                 </a:solidFill>
@@ -6047,7 +9496,7 @@
               <a:buNone/>
             </a:pPr>
             <a:r>
-              <a:rPr lang="en-US" sz="1400" dirty="0">
+              <a:rPr lang="en-US" sz="1800" dirty="0">
                 <a:solidFill>
                   <a:srgbClr val="1F2429"/>
                 </a:solidFill>
@@ -6057,7 +9506,7 @@
               </a:rPr>
               <a:t> — a group of related operations either all complete or none do</a:t>
             </a:r>
-            <a:endParaRPr lang="en-US" sz="1400" dirty="0"/>
+            <a:endParaRPr lang="en-US" sz="1800" dirty="0"/>
           </a:p>
           <a:p>
             <a:pPr marL="342900" indent="-342900">
@@ -6068,7 +9517,7 @@
               <a:buChar char="•"/>
             </a:pPr>
             <a:r>
-              <a:rPr lang="en-US" sz="1400" b="1" dirty="0">
+              <a:rPr lang="en-US" sz="1800" b="1" dirty="0">
                 <a:solidFill>
                   <a:srgbClr val="1F2429"/>
                 </a:solidFill>
@@ -6085,7 +9534,7 @@
               <a:buNone/>
             </a:pPr>
             <a:r>
-              <a:rPr lang="en-US" sz="1400" dirty="0">
+              <a:rPr lang="en-US" sz="1800" dirty="0">
                 <a:solidFill>
                   <a:srgbClr val="1F2429"/>
                 </a:solidFill>
@@ -6095,7 +9544,7 @@
               </a:rPr>
               <a:t> — correctness guarantees when many users access data at once</a:t>
             </a:r>
-            <a:endParaRPr lang="en-US" sz="1400" dirty="0"/>
+            <a:endParaRPr lang="en-US" sz="1800" dirty="0"/>
           </a:p>
           <a:p>
             <a:pPr marL="342900" indent="-342900">
@@ -6106,7 +9555,7 @@
               <a:buChar char="•"/>
             </a:pPr>
             <a:r>
-              <a:rPr lang="en-US" sz="1400" b="1" dirty="0">
+              <a:rPr lang="en-US" sz="1800" b="1" dirty="0">
                 <a:solidFill>
                   <a:srgbClr val="1F2429"/>
                 </a:solidFill>
@@ -6123,7 +9572,7 @@
               <a:buNone/>
             </a:pPr>
             <a:r>
-              <a:rPr lang="en-US" sz="1400" dirty="0">
+              <a:rPr lang="en-US" sz="1800" dirty="0">
                 <a:solidFill>
                   <a:srgbClr val="1F2429"/>
                 </a:solidFill>
@@ -6133,7 +9582,7 @@
               </a:rPr>
               <a:t> — restoring correct state after a hardware or software failure</a:t>
             </a:r>
-            <a:endParaRPr lang="en-US" sz="1400" dirty="0"/>
+            <a:endParaRPr lang="en-US" sz="1800" dirty="0"/>
           </a:p>
         </p:txBody>
       </p:sp>
@@ -6233,7 +9682,7 @@
               <a:buNone/>
             </a:pPr>
             <a:r>
-              <a:rPr lang="en-US" sz="1000" u="sng" dirty="0">
+              <a:rPr lang="en-US" sz="1200" u="sng" dirty="0">
                 <a:solidFill>
                   <a:srgbClr val="8A939B"/>
                 </a:solidFill>
@@ -6254,7 +9703,7 @@
               <a:buNone/>
             </a:pPr>
             <a:r>
-              <a:rPr lang="en-US" sz="1000" dirty="0">
+              <a:rPr lang="en-US" sz="1200" dirty="0">
                 <a:solidFill>
                   <a:srgbClr val="8A939B"/>
                 </a:solidFill>
@@ -6262,9 +9711,9 @@
                 <a:ea typeface="Calibri" pitchFamily="34" charset="-122"/>
                 <a:cs typeface="Calibri" pitchFamily="34" charset="-120"/>
               </a:rPr>
-              <a:t>  ·  8</a:t>
-            </a:r>
-            <a:endParaRPr lang="en-US" sz="1000" dirty="0"/>
+              <a:t>  ·  14</a:t>
+            </a:r>
+            <a:endParaRPr lang="en-US" sz="1200" dirty="0"/>
           </a:p>
         </p:txBody>
       </p:sp>
@@ -6297,7 +9746,7 @@
               <a:buChar char="•"/>
             </a:pPr>
             <a:r>
-              <a:rPr lang="en-US" sz="1400" b="1" dirty="0">
+              <a:rPr lang="en-US" sz="1800" b="1" dirty="0">
                 <a:solidFill>
                   <a:srgbClr val="1F2429"/>
                 </a:solidFill>
@@ -6314,7 +9763,7 @@
               <a:buNone/>
             </a:pPr>
             <a:r>
-              <a:rPr lang="en-US" sz="1400" dirty="0">
+              <a:rPr lang="en-US" sz="1800" dirty="0">
                 <a:solidFill>
                   <a:srgbClr val="1F2429"/>
                 </a:solidFill>
@@ -6324,7 +9773,7 @@
               </a:rPr>
               <a:t> — controlling who is allowed to do what, down to individual tables or columns</a:t>
             </a:r>
-            <a:endParaRPr lang="en-US" sz="1400" dirty="0"/>
+            <a:endParaRPr lang="en-US" sz="1800" dirty="0"/>
           </a:p>
           <a:p>
             <a:pPr marL="342900" indent="-342900">
@@ -6335,7 +9784,7 @@
               <a:buChar char="•"/>
             </a:pPr>
             <a:r>
-              <a:rPr lang="en-US" sz="1400" b="1" dirty="0">
+              <a:rPr lang="en-US" sz="1800" b="1" dirty="0">
                 <a:solidFill>
                   <a:srgbClr val="1F2429"/>
                 </a:solidFill>
@@ -6352,7 +9801,7 @@
               <a:buNone/>
             </a:pPr>
             <a:r>
-              <a:rPr lang="en-US" sz="1400" dirty="0">
+              <a:rPr lang="en-US" sz="1800" dirty="0">
                 <a:solidFill>
                   <a:srgbClr val="1F2429"/>
                 </a:solidFill>
@@ -6362,7 +9811,7 @@
               </a:rPr>
               <a:t> — integrating with the network software applications use to reach the database</a:t>
             </a:r>
-            <a:endParaRPr lang="en-US" sz="1400" dirty="0"/>
+            <a:endParaRPr lang="en-US" sz="1800" dirty="0"/>
           </a:p>
           <a:p>
             <a:pPr marL="342900" indent="-342900">
@@ -6373,7 +9822,7 @@
               <a:buChar char="•"/>
             </a:pPr>
             <a:r>
-              <a:rPr lang="en-US" sz="1400" b="1" dirty="0">
+              <a:rPr lang="en-US" sz="1800" b="1" dirty="0">
                 <a:solidFill>
                   <a:srgbClr val="1F2429"/>
                 </a:solidFill>
@@ -6390,7 +9839,7 @@
               <a:buNone/>
             </a:pPr>
             <a:r>
-              <a:rPr lang="en-US" sz="1400" dirty="0">
+              <a:rPr lang="en-US" sz="1800" dirty="0">
                 <a:solidFill>
                   <a:srgbClr val="1F2429"/>
                 </a:solidFill>
@@ -6400,7 +9849,7 @@
               </a:rPr>
               <a:t> — enforcing that stored data satisfies the organization's business rules</a:t>
             </a:r>
-            <a:endParaRPr lang="en-US" sz="1400" dirty="0"/>
+            <a:endParaRPr lang="en-US" sz="1800" dirty="0"/>
           </a:p>
           <a:p>
             <a:pPr marL="342900" indent="-342900">
@@ -6411,7 +9860,7 @@
               <a:buChar char="•"/>
             </a:pPr>
             <a:r>
-              <a:rPr lang="en-US" sz="1400" b="1" dirty="0">
+              <a:rPr lang="en-US" sz="1800" b="1" dirty="0">
                 <a:solidFill>
                   <a:srgbClr val="1F2429"/>
                 </a:solidFill>
@@ -6428,7 +9877,7 @@
               <a:buNone/>
             </a:pPr>
             <a:r>
-              <a:rPr lang="en-US" sz="1400" dirty="0">
+              <a:rPr lang="en-US" sz="1800" dirty="0">
                 <a:solidFill>
                   <a:srgbClr val="1F2429"/>
                 </a:solidFill>
@@ -6438,7 +9887,7 @@
               </a:rPr>
               <a:t> — insulating applications from physical storage details</a:t>
             </a:r>
-            <a:endParaRPr lang="en-US" sz="1400" dirty="0"/>
+            <a:endParaRPr lang="en-US" sz="1800" dirty="0"/>
           </a:p>
           <a:p>
             <a:pPr marL="342900" indent="-342900">
@@ -6449,7 +9898,7 @@
               <a:buChar char="•"/>
             </a:pPr>
             <a:r>
-              <a:rPr lang="en-US" sz="1400" b="1" dirty="0">
+              <a:rPr lang="en-US" sz="1800" b="1" dirty="0">
                 <a:solidFill>
                   <a:srgbClr val="1F2429"/>
                 </a:solidFill>
@@ -6466,7 +9915,7 @@
               <a:buNone/>
             </a:pPr>
             <a:r>
-              <a:rPr lang="en-US" sz="1400" dirty="0">
+              <a:rPr lang="en-US" sz="1800" dirty="0">
                 <a:solidFill>
                   <a:srgbClr val="1F2429"/>
                 </a:solidFill>
@@ -6476,7 +9925,7 @@
               </a:rPr>
               <a:t> — import/export, performance monitoring, and analysis tools</a:t>
             </a:r>
-            <a:endParaRPr lang="en-US" sz="1400" dirty="0"/>
+            <a:endParaRPr lang="en-US" sz="1800" dirty="0"/>
           </a:p>
         </p:txBody>
       </p:sp>
@@ -6576,7 +10025,7 @@
               <a:buNone/>
             </a:pPr>
             <a:r>
-              <a:rPr lang="en-US" sz="1000" u="sng" dirty="0">
+              <a:rPr lang="en-US" sz="1200" u="sng" dirty="0">
                 <a:solidFill>
                   <a:srgbClr val="8A939B"/>
                 </a:solidFill>
@@ -6597,7 +10046,7 @@
               <a:buNone/>
             </a:pPr>
             <a:r>
-              <a:rPr lang="en-US" sz="1000" dirty="0">
+              <a:rPr lang="en-US" sz="1200" dirty="0">
                 <a:solidFill>
                   <a:srgbClr val="8A939B"/>
                 </a:solidFill>
@@ -6605,9 +10054,9 @@
                 <a:ea typeface="Calibri" pitchFamily="34" charset="-122"/>
                 <a:cs typeface="Calibri" pitchFamily="34" charset="-120"/>
               </a:rPr>
-              <a:t>  ·  9</a:t>
-            </a:r>
-            <a:endParaRPr lang="en-US" sz="1000" dirty="0"/>
+              <a:t>  ·  16</a:t>
+            </a:r>
+            <a:endParaRPr lang="en-US" sz="1200" dirty="0"/>
           </a:p>
         </p:txBody>
       </p:sp>
@@ -6636,7 +10085,7 @@
               <a:buNone/>
             </a:pPr>
             <a:r>
-              <a:rPr lang="en-US" sz="1400" dirty="0">
+              <a:rPr lang="en-US" sz="1800" dirty="0">
                 <a:solidFill>
                   <a:srgbClr val="1F2429"/>
                 </a:solidFill>
@@ -6646,7 +10095,7 @@
               </a:rPr>
               <a:t>File-based systems suffered from program-data dependence: application code was written assuming an exact physical file layout. Data independence is the DBMS's answer.</a:t>
             </a:r>
-            <a:endParaRPr lang="en-US" sz="1400" dirty="0"/>
+            <a:endParaRPr lang="en-US" sz="1800" dirty="0"/>
           </a:p>
         </p:txBody>
       </p:sp>
@@ -6697,7 +10146,7 @@
               <a:buNone/>
             </a:pPr>
             <a:r>
-              <a:rPr lang="en-US" sz="1350" b="1" dirty="0">
+              <a:rPr lang="en-US" sz="1800" b="1" dirty="0">
                 <a:solidFill>
                   <a:srgbClr val="FFFFFF"/>
                 </a:solidFill>
@@ -6707,7 +10156,7 @@
               </a:rPr>
               <a:t>Data dependence (file-based)</a:t>
             </a:r>
-            <a:endParaRPr lang="en-US" sz="1350" dirty="0"/>
+            <a:endParaRPr lang="en-US" sz="1800" dirty="0"/>
           </a:p>
         </p:txBody>
       </p:sp>
@@ -6736,7 +10185,7 @@
               <a:buNone/>
             </a:pPr>
             <a:r>
-              <a:rPr lang="en-US" sz="1050" dirty="0">
+              <a:rPr lang="en-US" sz="1800" dirty="0">
                 <a:solidFill>
                   <a:srgbClr val="FFFFFF"/>
                 </a:solidFill>
@@ -6746,7 +10195,7 @@
               </a:rPr>
               <a:t>Application code hard-codes field order and size; any physical change breaks every program that reads the file</a:t>
             </a:r>
-            <a:endParaRPr lang="en-US" sz="1050" dirty="0"/>
+            <a:endParaRPr lang="en-US" sz="1800" dirty="0"/>
           </a:p>
         </p:txBody>
       </p:sp>
@@ -6797,7 +10246,7 @@
               <a:buNone/>
             </a:pPr>
             <a:r>
-              <a:rPr lang="en-US" sz="1350" b="1" dirty="0">
+              <a:rPr lang="en-US" sz="1800" b="1" dirty="0">
                 <a:solidFill>
                   <a:srgbClr val="FFFFFF"/>
                 </a:solidFill>
@@ -6807,7 +10256,7 @@
               </a:rPr>
               <a:t>Data independence (database approach)</a:t>
             </a:r>
-            <a:endParaRPr lang="en-US" sz="1350" dirty="0"/>
+            <a:endParaRPr lang="en-US" sz="1800" dirty="0"/>
           </a:p>
         </p:txBody>
       </p:sp>
@@ -6836,7 +10285,7 @@
               <a:buNone/>
             </a:pPr>
             <a:r>
-              <a:rPr lang="en-US" sz="1050" dirty="0">
+              <a:rPr lang="en-US" sz="1800" dirty="0">
                 <a:solidFill>
                   <a:srgbClr val="FFFFFF"/>
                 </a:solidFill>
@@ -6846,87 +10295,7 @@
               </a:rPr>
               <a:t>Applications see a stable logical view; the DBMS absorbs physical changes underneath it</a:t>
             </a:r>
-            <a:endParaRPr lang="en-US" sz="1050" dirty="0"/>
-          </a:p>
-        </p:txBody>
-      </p:sp>
-      <p:sp>
-        <p:nvSpPr>
-          <p:cNvPr id="11" name="Shape 9"/>
-          <p:cNvSpPr/>
-          <p:nvPr/>
-        </p:nvSpPr>
-        <p:spPr>
-          <a:xfrm>
-            <a:off x="640080" y="3977640"/>
-            <a:ext cx="10881360" cy="1737360"/>
-          </a:xfrm>
-          <a:prstGeom prst="roundRect">
-            <a:avLst>
-              <a:gd name="adj" fmla="val 4211"/>
-            </a:avLst>
-          </a:prstGeom>
-          <a:solidFill>
-            <a:srgbClr val="FBEEDD"/>
-          </a:solidFill>
-          <a:ln w="12700">
-            <a:solidFill>
-              <a:srgbClr val="E8A33D"/>
-            </a:solidFill>
-            <a:prstDash val="solid"/>
-          </a:ln>
-        </p:spPr>
-      </p:sp>
-      <p:sp>
-        <p:nvSpPr>
-          <p:cNvPr id="12" name="Text 10"/>
-          <p:cNvSpPr txBox="1"/>
-          <p:nvPr/>
-        </p:nvSpPr>
-        <p:spPr>
-          <a:xfrm>
-            <a:off x="868680" y="4114800"/>
-            <a:ext cx="10424160" cy="1463040"/>
-          </a:xfrm>
-          <a:prstGeom prst="rect">
-            <a:avLst/>
-          </a:prstGeom>
-          <a:noFill/>
-          <a:ln/>
-        </p:spPr>
-        <p:txBody>
-          <a:bodyPr wrap="square" lIns="0" tIns="0" rIns="0" bIns="0" rtlCol="0" anchor="t"/>
-          <a:lstStyle/>
-          <a:p>
-            <a:pPr indent="0" marL="0">
-              <a:buNone/>
-            </a:pPr>
-            <a:r>
-              <a:rPr lang="en-US" sz="1250" b="1" dirty="0">
-                <a:solidFill>
-                  <a:srgbClr val="1F2429"/>
-                </a:solidFill>
-                <a:latin typeface="Calibri" pitchFamily="34" charset="0"/>
-                <a:ea typeface="Calibri" pitchFamily="34" charset="-122"/>
-                <a:cs typeface="Calibri" pitchFamily="34" charset="-120"/>
-              </a:rPr>
-              <a:t>Don't confuse “independence” with “the schema never changes.”  </a:t>
-            </a:r>
-            <a:pPr indent="0" marL="0">
-              <a:buNone/>
-            </a:pPr>
-            <a:r>
-              <a:rPr lang="en-US" sz="1250" dirty="0">
-                <a:solidFill>
-                  <a:srgbClr val="1F2429"/>
-                </a:solidFill>
-                <a:latin typeface="Calibri" pitchFamily="34" charset="0"/>
-                <a:ea typeface="Calibri" pitchFamily="34" charset="-122"/>
-                <a:cs typeface="Calibri" pitchFamily="34" charset="-120"/>
-              </a:rPr>
-              <a:t>Data independence does not mean the database's structure is frozen. It means changes at one level can be made without cascading into forced changes at another level. Lecture 4 splits this into logical and physical data independence, once the ANSI-SPARC three-schema architecture is on the table.</a:t>
-            </a:r>
-            <a:endParaRPr lang="en-US" sz="1250" dirty="0"/>
+            <a:endParaRPr lang="en-US" sz="1800" dirty="0"/>
           </a:p>
         </p:txBody>
       </p:sp>
